--- a/submission/HimanshuDigitalTwin_Presentation.pptx
+++ b/submission/HimanshuDigitalTwin_Presentation.pptx
@@ -12,7 +12,7 @@
     <p:sldId id="260" r:id="rId11"/>
     <p:sldId id="261" r:id="rId12"/>
   </p:sldIdLst>
-  <p:sldSz cx="14630400" cy="8229600" type="screen4x3"/>
+  <p:sldSz cx="12191695" cy="6858000" type="screen4x3"/>
   <p:notesSz cx="6858000" cy="9144000"/>
   <p:defaultTextStyle>
     <a:defPPr>
@@ -3093,30 +3093,1175 @@
         <p:nvPr/>
       </p:nvGrpSpPr>
       <p:grpSpPr/>
-      <p:pic>
-        <p:nvPicPr>
-          <p:cNvPr id="2" name="Picture 1" descr="image.png"/>
-          <p:cNvPicPr>
-            <a:picLocks noChangeAspect="1"/>
-          </p:cNvPicPr>
-          <p:nvPr/>
-        </p:nvPicPr>
-        <p:blipFill>
-          <a:blip r:embed="rId2"/>
-          <a:stretch>
-            <a:fillRect/>
-          </a:stretch>
-        </p:blipFill>
+      <p:sp>
+        <p:nvSpPr>
+          <p:cNvPr id="2" name="Rectangle 1"/>
+          <p:cNvSpPr/>
+          <p:nvPr/>
+        </p:nvSpPr>
         <p:spPr>
           <a:xfrm>
             <a:off x="0" y="0"/>
-            <a:ext cx="14630400" cy="8229600"/>
-          </a:xfrm>
-          <a:prstGeom prst="rect">
-            <a:avLst/>
-          </a:prstGeom>
-        </p:spPr>
-      </p:pic>
+            <a:ext cx="12191695" cy="6858000"/>
+          </a:xfrm>
+          <a:prstGeom prst="rect">
+            <a:avLst/>
+          </a:prstGeom>
+          <a:solidFill>
+            <a:srgbClr val="152C3C"/>
+          </a:solidFill>
+          <a:ln>
+            <a:noFill/>
+          </a:ln>
+        </p:spPr>
+        <p:style>
+          <a:lnRef idx="1">
+            <a:schemeClr val="accent1"/>
+          </a:lnRef>
+          <a:fillRef idx="3">
+            <a:schemeClr val="accent1"/>
+          </a:fillRef>
+          <a:effectRef idx="2">
+            <a:schemeClr val="accent1"/>
+          </a:effectRef>
+          <a:fontRef idx="minor">
+            <a:schemeClr val="lt1"/>
+          </a:fontRef>
+        </p:style>
+        <p:txBody>
+          <a:bodyPr rtlCol="0" anchor="ctr"/>
+          <a:lstStyle/>
+          <a:p>
+            <a:pPr algn="ctr"/>
+          </a:p>
+        </p:txBody>
+      </p:sp>
+      <p:sp>
+        <p:nvSpPr>
+          <p:cNvPr id="3" name="Rectangle 2"/>
+          <p:cNvSpPr/>
+          <p:nvPr/>
+        </p:nvSpPr>
+        <p:spPr>
+          <a:xfrm>
+            <a:off x="0" y="0"/>
+            <a:ext cx="82296" cy="6858000"/>
+          </a:xfrm>
+          <a:prstGeom prst="rect">
+            <a:avLst/>
+          </a:prstGeom>
+          <a:solidFill>
+            <a:srgbClr val="167E78"/>
+          </a:solidFill>
+          <a:ln>
+            <a:noFill/>
+          </a:ln>
+        </p:spPr>
+        <p:style>
+          <a:lnRef idx="1">
+            <a:schemeClr val="accent1"/>
+          </a:lnRef>
+          <a:fillRef idx="3">
+            <a:schemeClr val="accent1"/>
+          </a:fillRef>
+          <a:effectRef idx="2">
+            <a:schemeClr val="accent1"/>
+          </a:effectRef>
+          <a:fontRef idx="minor">
+            <a:schemeClr val="lt1"/>
+          </a:fontRef>
+        </p:style>
+        <p:txBody>
+          <a:bodyPr rtlCol="0" anchor="ctr"/>
+          <a:lstStyle/>
+          <a:p>
+            <a:pPr algn="ctr"/>
+          </a:p>
+        </p:txBody>
+      </p:sp>
+      <p:sp>
+        <p:nvSpPr>
+          <p:cNvPr id="4" name="TextBox 3"/>
+          <p:cNvSpPr txBox="1"/>
+          <p:nvPr/>
+        </p:nvSpPr>
+        <p:spPr>
+          <a:xfrm>
+            <a:off x="548640" y="310896"/>
+            <a:ext cx="9144000" cy="246888"/>
+          </a:xfrm>
+          <a:prstGeom prst="rect">
+            <a:avLst/>
+          </a:prstGeom>
+          <a:noFill/>
+        </p:spPr>
+        <p:txBody>
+          <a:bodyPr wrap="square" lIns="0" rIns="0" tIns="0" bIns="0" anchor="ctr">
+            <a:spAutoFit/>
+          </a:bodyPr>
+          <a:lstStyle/>
+          <a:p>
+            <a:pPr algn="l">
+              <a:spcAft>
+                <a:spcPts val="200"/>
+              </a:spcAft>
+              <a:defRPr sz="1000" b="1">
+                <a:solidFill>
+                  <a:srgbClr val="A5DCCB"/>
+                </a:solidFill>
+                <a:latin typeface="Aptos"/>
+              </a:defRPr>
+            </a:pPr>
+            <a:r>
+              <a:t>HAPPIEST HEALTH DIGITAL TWIN CHALLENGE 2026</a:t>
+            </a:r>
+          </a:p>
+        </p:txBody>
+      </p:sp>
+      <p:cxnSp>
+        <p:nvCxnSpPr>
+          <p:cNvPr id="5" name="Connector 4"/>
+          <p:cNvCxnSpPr/>
+          <p:nvPr/>
+        </p:nvCxnSpPr>
+        <p:spPr>
+          <a:xfrm>
+            <a:off x="548640" y="6446520"/>
+            <a:ext cx="11109960" cy="0"/>
+          </a:xfrm>
+          <a:prstGeom prst="line">
+            <a:avLst/>
+          </a:prstGeom>
+          <a:ln w="12700">
+            <a:solidFill>
+              <a:srgbClr val="395968"/>
+            </a:solidFill>
+          </a:ln>
+        </p:spPr>
+        <p:style>
+          <a:lnRef idx="2">
+            <a:schemeClr val="accent1"/>
+          </a:lnRef>
+          <a:fillRef idx="0">
+            <a:schemeClr val="accent1"/>
+          </a:fillRef>
+          <a:effectRef idx="1">
+            <a:schemeClr val="accent1"/>
+          </a:effectRef>
+          <a:fontRef idx="minor">
+            <a:schemeClr val="tx1"/>
+          </a:fontRef>
+        </p:style>
+      </p:cxnSp>
+      <p:sp>
+        <p:nvSpPr>
+          <p:cNvPr id="6" name="TextBox 5"/>
+          <p:cNvSpPr txBox="1"/>
+          <p:nvPr/>
+        </p:nvSpPr>
+        <p:spPr>
+          <a:xfrm>
+            <a:off x="548640" y="6492240"/>
+            <a:ext cx="6400800" cy="182880"/>
+          </a:xfrm>
+          <a:prstGeom prst="rect">
+            <a:avLst/>
+          </a:prstGeom>
+          <a:noFill/>
+        </p:spPr>
+        <p:txBody>
+          <a:bodyPr wrap="square" lIns="0" rIns="0" tIns="0" bIns="0" anchor="ctr">
+            <a:spAutoFit/>
+          </a:bodyPr>
+          <a:lstStyle/>
+          <a:p>
+            <a:pPr algn="l">
+              <a:spcAft>
+                <a:spcPts val="200"/>
+              </a:spcAft>
+              <a:defRPr sz="900" b="1">
+                <a:solidFill>
+                  <a:srgbClr val="BED3D8"/>
+                </a:solidFill>
+                <a:latin typeface="Aptos"/>
+              </a:defRPr>
+            </a:pPr>
+            <a:r>
+              <a:t>HIMANSHUDIGITALTWIN  /  MITS GWALIOR</a:t>
+            </a:r>
+          </a:p>
+        </p:txBody>
+      </p:sp>
+      <p:sp>
+        <p:nvSpPr>
+          <p:cNvPr id="7" name="TextBox 6"/>
+          <p:cNvSpPr txBox="1"/>
+          <p:nvPr/>
+        </p:nvSpPr>
+        <p:spPr>
+          <a:xfrm>
+            <a:off x="10607040" y="6492240"/>
+            <a:ext cx="1060704" cy="182880"/>
+          </a:xfrm>
+          <a:prstGeom prst="rect">
+            <a:avLst/>
+          </a:prstGeom>
+          <a:noFill/>
+        </p:spPr>
+        <p:txBody>
+          <a:bodyPr wrap="square" lIns="0" rIns="0" tIns="0" bIns="0" anchor="ctr">
+            <a:spAutoFit/>
+          </a:bodyPr>
+          <a:lstStyle/>
+          <a:p>
+            <a:pPr algn="r">
+              <a:spcAft>
+                <a:spcPts val="200"/>
+              </a:spcAft>
+              <a:defRPr sz="900" b="1">
+                <a:solidFill>
+                  <a:srgbClr val="BED3D8"/>
+                </a:solidFill>
+                <a:latin typeface="Aptos"/>
+              </a:defRPr>
+            </a:pPr>
+            <a:r>
+              <a:t>01 / 06</a:t>
+            </a:r>
+          </a:p>
+        </p:txBody>
+      </p:sp>
+      <p:sp>
+        <p:nvSpPr>
+          <p:cNvPr id="8" name="TextBox 7"/>
+          <p:cNvSpPr txBox="1"/>
+          <p:nvPr/>
+        </p:nvSpPr>
+        <p:spPr>
+          <a:xfrm>
+            <a:off x="566928" y="1005840"/>
+            <a:ext cx="6492240" cy="694944"/>
+          </a:xfrm>
+          <a:prstGeom prst="rect">
+            <a:avLst/>
+          </a:prstGeom>
+          <a:noFill/>
+        </p:spPr>
+        <p:txBody>
+          <a:bodyPr wrap="square" lIns="0" rIns="0" tIns="0" bIns="0" anchor="ctr">
+            <a:spAutoFit/>
+          </a:bodyPr>
+          <a:lstStyle/>
+          <a:p>
+            <a:pPr algn="l">
+              <a:spcAft>
+                <a:spcPts val="200"/>
+              </a:spcAft>
+              <a:defRPr sz="4700" b="1">
+                <a:solidFill>
+                  <a:srgbClr val="FFFFFF"/>
+                </a:solidFill>
+                <a:latin typeface="Aptos"/>
+              </a:defRPr>
+            </a:pPr>
+            <a:r>
+              <a:t>Himanshu</a:t>
+            </a:r>
+          </a:p>
+        </p:txBody>
+      </p:sp>
+      <p:sp>
+        <p:nvSpPr>
+          <p:cNvPr id="9" name="TextBox 8"/>
+          <p:cNvSpPr txBox="1"/>
+          <p:nvPr/>
+        </p:nvSpPr>
+        <p:spPr>
+          <a:xfrm>
+            <a:off x="566928" y="1719072"/>
+            <a:ext cx="6492240" cy="749808"/>
+          </a:xfrm>
+          <a:prstGeom prst="rect">
+            <a:avLst/>
+          </a:prstGeom>
+          <a:noFill/>
+        </p:spPr>
+        <p:txBody>
+          <a:bodyPr wrap="square" lIns="0" rIns="0" tIns="0" bIns="0" anchor="ctr">
+            <a:spAutoFit/>
+          </a:bodyPr>
+          <a:lstStyle/>
+          <a:p>
+            <a:pPr algn="l">
+              <a:spcAft>
+                <a:spcPts val="200"/>
+              </a:spcAft>
+              <a:defRPr sz="5000" b="1">
+                <a:solidFill>
+                  <a:srgbClr val="A5DCCB"/>
+                </a:solidFill>
+                <a:latin typeface="Aptos"/>
+              </a:defRPr>
+            </a:pPr>
+            <a:r>
+              <a:t>DigitalTwin</a:t>
+            </a:r>
+          </a:p>
+        </p:txBody>
+      </p:sp>
+      <p:sp>
+        <p:nvSpPr>
+          <p:cNvPr id="10" name="TextBox 9"/>
+          <p:cNvSpPr txBox="1"/>
+          <p:nvPr/>
+        </p:nvSpPr>
+        <p:spPr>
+          <a:xfrm>
+            <a:off x="594360" y="2734056"/>
+            <a:ext cx="5943600" cy="1417320"/>
+          </a:xfrm>
+          <a:prstGeom prst="rect">
+            <a:avLst/>
+          </a:prstGeom>
+          <a:noFill/>
+        </p:spPr>
+        <p:txBody>
+          <a:bodyPr wrap="square" lIns="0" rIns="0" tIns="0" bIns="0" anchor="ctr">
+            <a:spAutoFit/>
+          </a:bodyPr>
+          <a:lstStyle/>
+          <a:p>
+            <a:pPr algn="l">
+              <a:spcAft>
+                <a:spcPts val="200"/>
+              </a:spcAft>
+              <a:defRPr sz="2500" b="0">
+                <a:solidFill>
+                  <a:srgbClr val="FFFFFF"/>
+                </a:solidFill>
+                <a:latin typeface="Aptos"/>
+              </a:defRPr>
+            </a:pPr>
+            <a:r>
+              <a:t>A research prototype for near-term</a:t>
+            </a:r>
+          </a:p>
+          <a:p>
+            <a:pPr algn="l">
+              <a:spcAft>
+                <a:spcPts val="200"/>
+              </a:spcAft>
+              <a:defRPr sz="2500" b="0">
+                <a:solidFill>
+                  <a:srgbClr val="FFFFFF"/>
+                </a:solidFill>
+                <a:latin typeface="Aptos"/>
+              </a:defRPr>
+            </a:pPr>
+            <a:r>
+              <a:t>glucose forecasting — with a reason</a:t>
+            </a:r>
+          </a:p>
+          <a:p>
+            <a:pPr algn="l">
+              <a:spcAft>
+                <a:spcPts val="200"/>
+              </a:spcAft>
+              <a:defRPr sz="2500" b="0">
+                <a:solidFill>
+                  <a:srgbClr val="FFFFFF"/>
+                </a:solidFill>
+                <a:latin typeface="Aptos"/>
+              </a:defRPr>
+            </a:pPr>
+            <a:r>
+              <a:t>to withhold a prediction.</a:t>
+            </a:r>
+          </a:p>
+        </p:txBody>
+      </p:sp>
+      <p:sp>
+        <p:nvSpPr>
+          <p:cNvPr id="11" name="TextBox 10"/>
+          <p:cNvSpPr txBox="1"/>
+          <p:nvPr/>
+        </p:nvSpPr>
+        <p:spPr>
+          <a:xfrm>
+            <a:off x="594360" y="5029200"/>
+            <a:ext cx="5394960" cy="338328"/>
+          </a:xfrm>
+          <a:prstGeom prst="rect">
+            <a:avLst/>
+          </a:prstGeom>
+          <a:noFill/>
+        </p:spPr>
+        <p:txBody>
+          <a:bodyPr wrap="square" lIns="0" rIns="0" tIns="0" bIns="0" anchor="ctr">
+            <a:spAutoFit/>
+          </a:bodyPr>
+          <a:lstStyle/>
+          <a:p>
+            <a:pPr algn="l">
+              <a:spcAft>
+                <a:spcPts val="200"/>
+              </a:spcAft>
+              <a:defRPr sz="1600" b="1">
+                <a:solidFill>
+                  <a:srgbClr val="A5DCCB"/>
+                </a:solidFill>
+                <a:latin typeface="Aptos"/>
+              </a:defRPr>
+            </a:pPr>
+            <a:r>
+              <a:t>Team  himanshusubh1510</a:t>
+            </a:r>
+          </a:p>
+        </p:txBody>
+      </p:sp>
+      <p:sp>
+        <p:nvSpPr>
+          <p:cNvPr id="12" name="TextBox 11"/>
+          <p:cNvSpPr txBox="1"/>
+          <p:nvPr/>
+        </p:nvSpPr>
+        <p:spPr>
+          <a:xfrm>
+            <a:off x="594360" y="5413248"/>
+            <a:ext cx="6217920" cy="310896"/>
+          </a:xfrm>
+          <a:prstGeom prst="rect">
+            <a:avLst/>
+          </a:prstGeom>
+          <a:noFill/>
+        </p:spPr>
+        <p:txBody>
+          <a:bodyPr wrap="square" lIns="0" rIns="0" tIns="0" bIns="0" anchor="ctr">
+            <a:spAutoFit/>
+          </a:bodyPr>
+          <a:lstStyle/>
+          <a:p>
+            <a:pPr algn="l">
+              <a:spcAft>
+                <a:spcPts val="200"/>
+              </a:spcAft>
+              <a:defRPr sz="1400" b="0">
+                <a:solidFill>
+                  <a:srgbClr val="D8E7E7"/>
+                </a:solidFill>
+                <a:latin typeface="Aptos"/>
+              </a:defRPr>
+            </a:pPr>
+            <a:r>
+              <a:t>Presenter  Himanshu Shukla  ·  MITS Gwalior</a:t>
+            </a:r>
+          </a:p>
+        </p:txBody>
+      </p:sp>
+      <p:sp>
+        <p:nvSpPr>
+          <p:cNvPr id="13" name="Rounded Rectangle 12"/>
+          <p:cNvSpPr/>
+          <p:nvPr/>
+        </p:nvSpPr>
+        <p:spPr>
+          <a:xfrm>
+            <a:off x="7040880" y="1325880"/>
+            <a:ext cx="4526280" cy="4315968"/>
+          </a:xfrm>
+          <a:prstGeom prst="roundRect">
+            <a:avLst>
+              <a:gd name="adj" fmla="val 15000"/>
+            </a:avLst>
+          </a:prstGeom>
+          <a:solidFill>
+            <a:srgbClr val="254C5A"/>
+          </a:solidFill>
+          <a:ln>
+            <a:noFill/>
+          </a:ln>
+        </p:spPr>
+        <p:style>
+          <a:lnRef idx="1">
+            <a:schemeClr val="accent1"/>
+          </a:lnRef>
+          <a:fillRef idx="3">
+            <a:schemeClr val="accent1"/>
+          </a:fillRef>
+          <a:effectRef idx="2">
+            <a:schemeClr val="accent1"/>
+          </a:effectRef>
+          <a:fontRef idx="minor">
+            <a:schemeClr val="lt1"/>
+          </a:fontRef>
+        </p:style>
+        <p:txBody>
+          <a:bodyPr rtlCol="0" anchor="ctr"/>
+          <a:lstStyle/>
+          <a:p>
+            <a:pPr algn="ctr"/>
+          </a:p>
+        </p:txBody>
+      </p:sp>
+      <p:sp>
+        <p:nvSpPr>
+          <p:cNvPr id="14" name="TextBox 13"/>
+          <p:cNvSpPr txBox="1"/>
+          <p:nvPr/>
+        </p:nvSpPr>
+        <p:spPr>
+          <a:xfrm>
+            <a:off x="7351775" y="1618488"/>
+            <a:ext cx="3931920" cy="246888"/>
+          </a:xfrm>
+          <a:prstGeom prst="rect">
+            <a:avLst/>
+          </a:prstGeom>
+          <a:noFill/>
+        </p:spPr>
+        <p:txBody>
+          <a:bodyPr wrap="square" lIns="0" rIns="0" tIns="0" bIns="0" anchor="ctr">
+            <a:spAutoFit/>
+          </a:bodyPr>
+          <a:lstStyle/>
+          <a:p>
+            <a:pPr algn="l">
+              <a:spcAft>
+                <a:spcPts val="200"/>
+              </a:spcAft>
+              <a:defRPr sz="1100" b="1">
+                <a:solidFill>
+                  <a:srgbClr val="A5DCCB"/>
+                </a:solidFill>
+                <a:latin typeface="Aptos"/>
+              </a:defRPr>
+            </a:pPr>
+            <a:r>
+              <a:t>SYNTHETIC REPLAY  /  EXAMPLE</a:t>
+            </a:r>
+          </a:p>
+        </p:txBody>
+      </p:sp>
+      <p:sp>
+        <p:nvSpPr>
+          <p:cNvPr id="15" name="TextBox 14"/>
+          <p:cNvSpPr txBox="1"/>
+          <p:nvPr/>
+        </p:nvSpPr>
+        <p:spPr>
+          <a:xfrm>
+            <a:off x="7360920" y="1984248"/>
+            <a:ext cx="1828800" cy="832104"/>
+          </a:xfrm>
+          <a:prstGeom prst="rect">
+            <a:avLst/>
+          </a:prstGeom>
+          <a:noFill/>
+        </p:spPr>
+        <p:txBody>
+          <a:bodyPr wrap="square" lIns="0" rIns="0" tIns="0" bIns="0" anchor="ctr">
+            <a:spAutoFit/>
+          </a:bodyPr>
+          <a:lstStyle/>
+          <a:p>
+            <a:pPr algn="l">
+              <a:spcAft>
+                <a:spcPts val="200"/>
+              </a:spcAft>
+              <a:defRPr sz="5800" b="1">
+                <a:solidFill>
+                  <a:srgbClr val="FFFFFF"/>
+                </a:solidFill>
+                <a:latin typeface="Aptos"/>
+              </a:defRPr>
+            </a:pPr>
+            <a:r>
+              <a:t>144</a:t>
+            </a:r>
+          </a:p>
+        </p:txBody>
+      </p:sp>
+      <p:sp>
+        <p:nvSpPr>
+          <p:cNvPr id="16" name="TextBox 15"/>
+          <p:cNvSpPr txBox="1"/>
+          <p:nvPr/>
+        </p:nvSpPr>
+        <p:spPr>
+          <a:xfrm>
+            <a:off x="9226296" y="2322576"/>
+            <a:ext cx="2057400" cy="338328"/>
+          </a:xfrm>
+          <a:prstGeom prst="rect">
+            <a:avLst/>
+          </a:prstGeom>
+          <a:noFill/>
+        </p:spPr>
+        <p:txBody>
+          <a:bodyPr wrap="square" lIns="0" rIns="0" tIns="0" bIns="0" anchor="ctr">
+            <a:spAutoFit/>
+          </a:bodyPr>
+          <a:lstStyle/>
+          <a:p>
+            <a:pPr algn="l">
+              <a:spcAft>
+                <a:spcPts val="200"/>
+              </a:spcAft>
+              <a:defRPr sz="1400" b="0">
+                <a:solidFill>
+                  <a:srgbClr val="C1D6DB"/>
+                </a:solidFill>
+                <a:latin typeface="Aptos"/>
+              </a:defRPr>
+            </a:pPr>
+            <a:r>
+              <a:t>mg/dL  at 12:15</a:t>
+            </a:r>
+          </a:p>
+        </p:txBody>
+      </p:sp>
+      <p:cxnSp>
+        <p:nvCxnSpPr>
+          <p:cNvPr id="17" name="Connector 16"/>
+          <p:cNvCxnSpPr/>
+          <p:nvPr/>
+        </p:nvCxnSpPr>
+        <p:spPr>
+          <a:xfrm>
+            <a:off x="7360920" y="4160520"/>
+            <a:ext cx="3831336" cy="0"/>
+          </a:xfrm>
+          <a:prstGeom prst="line">
+            <a:avLst/>
+          </a:prstGeom>
+          <a:ln w="12700">
+            <a:solidFill>
+              <a:srgbClr val="658590"/>
+            </a:solidFill>
+          </a:ln>
+        </p:spPr>
+        <p:style>
+          <a:lnRef idx="2">
+            <a:schemeClr val="accent1"/>
+          </a:lnRef>
+          <a:fillRef idx="0">
+            <a:schemeClr val="accent1"/>
+          </a:fillRef>
+          <a:effectRef idx="1">
+            <a:schemeClr val="accent1"/>
+          </a:effectRef>
+          <a:fontRef idx="minor">
+            <a:schemeClr val="tx1"/>
+          </a:fontRef>
+        </p:style>
+      </p:cxnSp>
+      <p:cxnSp>
+        <p:nvCxnSpPr>
+          <p:cNvPr id="18" name="Connector 17"/>
+          <p:cNvCxnSpPr/>
+          <p:nvPr/>
+        </p:nvCxnSpPr>
+        <p:spPr>
+          <a:xfrm>
+            <a:off x="7360920" y="4681728"/>
+            <a:ext cx="3831336" cy="0"/>
+          </a:xfrm>
+          <a:prstGeom prst="line">
+            <a:avLst/>
+          </a:prstGeom>
+          <a:ln w="12700">
+            <a:solidFill>
+              <a:srgbClr val="658590"/>
+            </a:solidFill>
+          </a:ln>
+        </p:spPr>
+        <p:style>
+          <a:lnRef idx="2">
+            <a:schemeClr val="accent1"/>
+          </a:lnRef>
+          <a:fillRef idx="0">
+            <a:schemeClr val="accent1"/>
+          </a:fillRef>
+          <a:effectRef idx="1">
+            <a:schemeClr val="accent1"/>
+          </a:effectRef>
+          <a:fontRef idx="minor">
+            <a:schemeClr val="tx1"/>
+          </a:fontRef>
+        </p:style>
+      </p:cxnSp>
+      <p:cxnSp>
+        <p:nvCxnSpPr>
+          <p:cNvPr id="19" name="Connector 18"/>
+          <p:cNvCxnSpPr/>
+          <p:nvPr/>
+        </p:nvCxnSpPr>
+        <p:spPr>
+          <a:xfrm flipV="1">
+            <a:off x="7388352" y="3986784"/>
+            <a:ext cx="1161288" cy="502920"/>
+          </a:xfrm>
+          <a:prstGeom prst="line">
+            <a:avLst/>
+          </a:prstGeom>
+          <a:ln w="38100">
+            <a:solidFill>
+              <a:srgbClr val="A5DCCB"/>
+            </a:solidFill>
+          </a:ln>
+        </p:spPr>
+        <p:style>
+          <a:lnRef idx="2">
+            <a:schemeClr val="accent1"/>
+          </a:lnRef>
+          <a:fillRef idx="0">
+            <a:schemeClr val="accent1"/>
+          </a:fillRef>
+          <a:effectRef idx="1">
+            <a:schemeClr val="accent1"/>
+          </a:effectRef>
+          <a:fontRef idx="minor">
+            <a:schemeClr val="tx1"/>
+          </a:fontRef>
+        </p:style>
+      </p:cxnSp>
+      <p:cxnSp>
+        <p:nvCxnSpPr>
+          <p:cNvPr id="20" name="Connector 19"/>
+          <p:cNvCxnSpPr/>
+          <p:nvPr/>
+        </p:nvCxnSpPr>
+        <p:spPr>
+          <a:xfrm flipV="1">
+            <a:off x="8549640" y="3968496"/>
+            <a:ext cx="1124712" cy="18288"/>
+          </a:xfrm>
+          <a:prstGeom prst="line">
+            <a:avLst/>
+          </a:prstGeom>
+          <a:ln w="38100">
+            <a:solidFill>
+              <a:srgbClr val="A5DCCB"/>
+            </a:solidFill>
+          </a:ln>
+        </p:spPr>
+        <p:style>
+          <a:lnRef idx="2">
+            <a:schemeClr val="accent1"/>
+          </a:lnRef>
+          <a:fillRef idx="0">
+            <a:schemeClr val="accent1"/>
+          </a:fillRef>
+          <a:effectRef idx="1">
+            <a:schemeClr val="accent1"/>
+          </a:effectRef>
+          <a:fontRef idx="minor">
+            <a:schemeClr val="tx1"/>
+          </a:fontRef>
+        </p:style>
+      </p:cxnSp>
+      <p:cxnSp>
+        <p:nvCxnSpPr>
+          <p:cNvPr id="21" name="Connector 20"/>
+          <p:cNvCxnSpPr/>
+          <p:nvPr/>
+        </p:nvCxnSpPr>
+        <p:spPr>
+          <a:xfrm>
+            <a:off x="9674352" y="3968496"/>
+            <a:ext cx="1444752" cy="438912"/>
+          </a:xfrm>
+          <a:prstGeom prst="line">
+            <a:avLst/>
+          </a:prstGeom>
+          <a:ln w="38100">
+            <a:solidFill>
+              <a:srgbClr val="A5DCCB"/>
+            </a:solidFill>
+          </a:ln>
+        </p:spPr>
+        <p:style>
+          <a:lnRef idx="2">
+            <a:schemeClr val="accent1"/>
+          </a:lnRef>
+          <a:fillRef idx="0">
+            <a:schemeClr val="accent1"/>
+          </a:fillRef>
+          <a:effectRef idx="1">
+            <a:schemeClr val="accent1"/>
+          </a:effectRef>
+          <a:fontRef idx="minor">
+            <a:schemeClr val="tx1"/>
+          </a:fontRef>
+        </p:style>
+      </p:cxnSp>
+      <p:sp>
+        <p:nvSpPr>
+          <p:cNvPr id="22" name="Oval 21"/>
+          <p:cNvSpPr/>
+          <p:nvPr/>
+        </p:nvSpPr>
+        <p:spPr>
+          <a:xfrm>
+            <a:off x="7333488" y="4434840"/>
+            <a:ext cx="109728" cy="109728"/>
+          </a:xfrm>
+          <a:prstGeom prst="ellipse">
+            <a:avLst/>
+          </a:prstGeom>
+          <a:solidFill>
+            <a:srgbClr val="A5DCCB"/>
+          </a:solidFill>
+          <a:ln>
+            <a:noFill/>
+          </a:ln>
+        </p:spPr>
+        <p:style>
+          <a:lnRef idx="1">
+            <a:schemeClr val="accent1"/>
+          </a:lnRef>
+          <a:fillRef idx="3">
+            <a:schemeClr val="accent1"/>
+          </a:fillRef>
+          <a:effectRef idx="2">
+            <a:schemeClr val="accent1"/>
+          </a:effectRef>
+          <a:fontRef idx="minor">
+            <a:schemeClr val="lt1"/>
+          </a:fontRef>
+        </p:style>
+        <p:txBody>
+          <a:bodyPr rtlCol="0" anchor="ctr"/>
+          <a:lstStyle/>
+          <a:p>
+            <a:pPr algn="ctr"/>
+          </a:p>
+        </p:txBody>
+      </p:sp>
+      <p:sp>
+        <p:nvSpPr>
+          <p:cNvPr id="23" name="Oval 22"/>
+          <p:cNvSpPr/>
+          <p:nvPr/>
+        </p:nvSpPr>
+        <p:spPr>
+          <a:xfrm>
+            <a:off x="8494776" y="3931920"/>
+            <a:ext cx="109728" cy="109728"/>
+          </a:xfrm>
+          <a:prstGeom prst="ellipse">
+            <a:avLst/>
+          </a:prstGeom>
+          <a:solidFill>
+            <a:srgbClr val="A5DCCB"/>
+          </a:solidFill>
+          <a:ln>
+            <a:noFill/>
+          </a:ln>
+        </p:spPr>
+        <p:style>
+          <a:lnRef idx="1">
+            <a:schemeClr val="accent1"/>
+          </a:lnRef>
+          <a:fillRef idx="3">
+            <a:schemeClr val="accent1"/>
+          </a:fillRef>
+          <a:effectRef idx="2">
+            <a:schemeClr val="accent1"/>
+          </a:effectRef>
+          <a:fontRef idx="minor">
+            <a:schemeClr val="lt1"/>
+          </a:fontRef>
+        </p:style>
+        <p:txBody>
+          <a:bodyPr rtlCol="0" anchor="ctr"/>
+          <a:lstStyle/>
+          <a:p>
+            <a:pPr algn="ctr"/>
+          </a:p>
+        </p:txBody>
+      </p:sp>
+      <p:sp>
+        <p:nvSpPr>
+          <p:cNvPr id="24" name="Oval 23"/>
+          <p:cNvSpPr/>
+          <p:nvPr/>
+        </p:nvSpPr>
+        <p:spPr>
+          <a:xfrm>
+            <a:off x="9619488" y="3913632"/>
+            <a:ext cx="109728" cy="109728"/>
+          </a:xfrm>
+          <a:prstGeom prst="ellipse">
+            <a:avLst/>
+          </a:prstGeom>
+          <a:solidFill>
+            <a:srgbClr val="A5DCCB"/>
+          </a:solidFill>
+          <a:ln>
+            <a:noFill/>
+          </a:ln>
+        </p:spPr>
+        <p:style>
+          <a:lnRef idx="1">
+            <a:schemeClr val="accent1"/>
+          </a:lnRef>
+          <a:fillRef idx="3">
+            <a:schemeClr val="accent1"/>
+          </a:fillRef>
+          <a:effectRef idx="2">
+            <a:schemeClr val="accent1"/>
+          </a:effectRef>
+          <a:fontRef idx="minor">
+            <a:schemeClr val="lt1"/>
+          </a:fontRef>
+        </p:style>
+        <p:txBody>
+          <a:bodyPr rtlCol="0" anchor="ctr"/>
+          <a:lstStyle/>
+          <a:p>
+            <a:pPr algn="ctr"/>
+          </a:p>
+        </p:txBody>
+      </p:sp>
+      <p:sp>
+        <p:nvSpPr>
+          <p:cNvPr id="25" name="Oval 24"/>
+          <p:cNvSpPr/>
+          <p:nvPr/>
+        </p:nvSpPr>
+        <p:spPr>
+          <a:xfrm>
+            <a:off x="11064240" y="4352544"/>
+            <a:ext cx="109728" cy="109728"/>
+          </a:xfrm>
+          <a:prstGeom prst="ellipse">
+            <a:avLst/>
+          </a:prstGeom>
+          <a:solidFill>
+            <a:srgbClr val="A5DCCB"/>
+          </a:solidFill>
+          <a:ln>
+            <a:noFill/>
+          </a:ln>
+        </p:spPr>
+        <p:style>
+          <a:lnRef idx="1">
+            <a:schemeClr val="accent1"/>
+          </a:lnRef>
+          <a:fillRef idx="3">
+            <a:schemeClr val="accent1"/>
+          </a:fillRef>
+          <a:effectRef idx="2">
+            <a:schemeClr val="accent1"/>
+          </a:effectRef>
+          <a:fontRef idx="minor">
+            <a:schemeClr val="lt1"/>
+          </a:fontRef>
+        </p:style>
+        <p:txBody>
+          <a:bodyPr rtlCol="0" anchor="ctr"/>
+          <a:lstStyle/>
+          <a:p>
+            <a:pPr algn="ctr"/>
+          </a:p>
+        </p:txBody>
+      </p:sp>
+      <p:sp>
+        <p:nvSpPr>
+          <p:cNvPr id="26" name="TextBox 25"/>
+          <p:cNvSpPr txBox="1"/>
+          <p:nvPr/>
+        </p:nvSpPr>
+        <p:spPr>
+          <a:xfrm>
+            <a:off x="7360920" y="4892040"/>
+            <a:ext cx="731520" cy="292608"/>
+          </a:xfrm>
+          <a:prstGeom prst="rect">
+            <a:avLst/>
+          </a:prstGeom>
+          <a:noFill/>
+        </p:spPr>
+        <p:txBody>
+          <a:bodyPr wrap="square" lIns="0" rIns="0" tIns="0" bIns="0" anchor="ctr">
+            <a:spAutoFit/>
+          </a:bodyPr>
+          <a:lstStyle/>
+          <a:p>
+            <a:pPr algn="l">
+              <a:spcAft>
+                <a:spcPts val="200"/>
+              </a:spcAft>
+              <a:defRPr sz="1100" b="1">
+                <a:solidFill>
+                  <a:srgbClr val="B8CED1"/>
+                </a:solidFill>
+                <a:latin typeface="Aptos"/>
+              </a:defRPr>
+            </a:pPr>
+            <a:r>
+              <a:t>NOW</a:t>
+            </a:r>
+          </a:p>
+        </p:txBody>
+      </p:sp>
+      <p:sp>
+        <p:nvSpPr>
+          <p:cNvPr id="27" name="TextBox 26"/>
+          <p:cNvSpPr txBox="1"/>
+          <p:nvPr/>
+        </p:nvSpPr>
+        <p:spPr>
+          <a:xfrm>
+            <a:off x="8467344" y="4892040"/>
+            <a:ext cx="822960" cy="292608"/>
+          </a:xfrm>
+          <a:prstGeom prst="rect">
+            <a:avLst/>
+          </a:prstGeom>
+          <a:noFill/>
+        </p:spPr>
+        <p:txBody>
+          <a:bodyPr wrap="square" lIns="0" rIns="0" tIns="0" bIns="0" anchor="ctr">
+            <a:spAutoFit/>
+          </a:bodyPr>
+          <a:lstStyle/>
+          <a:p>
+            <a:pPr algn="l">
+              <a:spcAft>
+                <a:spcPts val="200"/>
+              </a:spcAft>
+              <a:defRPr sz="1100" b="1">
+                <a:solidFill>
+                  <a:srgbClr val="B8CED1"/>
+                </a:solidFill>
+                <a:latin typeface="Aptos"/>
+              </a:defRPr>
+            </a:pPr>
+            <a:r>
+              <a:t>+30</a:t>
+            </a:r>
+          </a:p>
+        </p:txBody>
+      </p:sp>
+      <p:sp>
+        <p:nvSpPr>
+          <p:cNvPr id="28" name="TextBox 27"/>
+          <p:cNvSpPr txBox="1"/>
+          <p:nvPr/>
+        </p:nvSpPr>
+        <p:spPr>
+          <a:xfrm>
+            <a:off x="9555480" y="4892040"/>
+            <a:ext cx="822960" cy="292608"/>
+          </a:xfrm>
+          <a:prstGeom prst="rect">
+            <a:avLst/>
+          </a:prstGeom>
+          <a:noFill/>
+        </p:spPr>
+        <p:txBody>
+          <a:bodyPr wrap="square" lIns="0" rIns="0" tIns="0" bIns="0" anchor="ctr">
+            <a:spAutoFit/>
+          </a:bodyPr>
+          <a:lstStyle/>
+          <a:p>
+            <a:pPr algn="l">
+              <a:spcAft>
+                <a:spcPts val="200"/>
+              </a:spcAft>
+              <a:defRPr sz="1100" b="1">
+                <a:solidFill>
+                  <a:srgbClr val="B8CED1"/>
+                </a:solidFill>
+                <a:latin typeface="Aptos"/>
+              </a:defRPr>
+            </a:pPr>
+            <a:r>
+              <a:t>+60</a:t>
+            </a:r>
+          </a:p>
+        </p:txBody>
+      </p:sp>
+      <p:sp>
+        <p:nvSpPr>
+          <p:cNvPr id="29" name="TextBox 28"/>
+          <p:cNvSpPr txBox="1"/>
+          <p:nvPr/>
+        </p:nvSpPr>
+        <p:spPr>
+          <a:xfrm>
+            <a:off x="10716768" y="4892040"/>
+            <a:ext cx="822960" cy="292608"/>
+          </a:xfrm>
+          <a:prstGeom prst="rect">
+            <a:avLst/>
+          </a:prstGeom>
+          <a:noFill/>
+        </p:spPr>
+        <p:txBody>
+          <a:bodyPr wrap="square" lIns="0" rIns="0" tIns="0" bIns="0" anchor="ctr">
+            <a:spAutoFit/>
+          </a:bodyPr>
+          <a:lstStyle/>
+          <a:p>
+            <a:pPr algn="l">
+              <a:spcAft>
+                <a:spcPts val="200"/>
+              </a:spcAft>
+              <a:defRPr sz="1100" b="1">
+                <a:solidFill>
+                  <a:srgbClr val="B8CED1"/>
+                </a:solidFill>
+                <a:latin typeface="Aptos"/>
+              </a:defRPr>
+            </a:pPr>
+            <a:r>
+              <a:t>+120</a:t>
+            </a:r>
+          </a:p>
+        </p:txBody>
+      </p:sp>
+      <p:sp>
+        <p:nvSpPr>
+          <p:cNvPr id="30" name="TextBox 29"/>
+          <p:cNvSpPr txBox="1"/>
+          <p:nvPr/>
+        </p:nvSpPr>
+        <p:spPr>
+          <a:xfrm>
+            <a:off x="7351775" y="5504688"/>
+            <a:ext cx="3840480" cy="292608"/>
+          </a:xfrm>
+          <a:prstGeom prst="rect">
+            <a:avLst/>
+          </a:prstGeom>
+          <a:noFill/>
+        </p:spPr>
+        <p:txBody>
+          <a:bodyPr wrap="square" lIns="0" rIns="0" tIns="0" bIns="0" anchor="ctr">
+            <a:spAutoFit/>
+          </a:bodyPr>
+          <a:lstStyle/>
+          <a:p>
+            <a:pPr algn="l">
+              <a:spcAft>
+                <a:spcPts val="200"/>
+              </a:spcAft>
+              <a:defRPr sz="1000" b="0">
+                <a:solidFill>
+                  <a:srgbClr val="B8CED1"/>
+                </a:solidFill>
+                <a:latin typeface="Aptos"/>
+              </a:defRPr>
+            </a:pPr>
+            <a:r>
+              <a:t>Illustrative numbers. Not a calibrated clinical forecast.</a:t>
+            </a:r>
+          </a:p>
+        </p:txBody>
+      </p:sp>
     </p:spTree>
   </p:cSld>
   <p:clrMapOvr>
@@ -3135,30 +4280,1188 @@
         <p:nvPr/>
       </p:nvGrpSpPr>
       <p:grpSpPr/>
-      <p:pic>
-        <p:nvPicPr>
-          <p:cNvPr id="2" name="Picture 1" descr="image.png"/>
-          <p:cNvPicPr>
-            <a:picLocks noChangeAspect="1"/>
-          </p:cNvPicPr>
-          <p:nvPr/>
-        </p:nvPicPr>
-        <p:blipFill>
-          <a:blip r:embed="rId2"/>
-          <a:stretch>
-            <a:fillRect/>
-          </a:stretch>
-        </p:blipFill>
+      <p:sp>
+        <p:nvSpPr>
+          <p:cNvPr id="2" name="Rectangle 1"/>
+          <p:cNvSpPr/>
+          <p:nvPr/>
+        </p:nvSpPr>
         <p:spPr>
           <a:xfrm>
             <a:off x="0" y="0"/>
-            <a:ext cx="14630400" cy="8229600"/>
-          </a:xfrm>
-          <a:prstGeom prst="rect">
-            <a:avLst/>
-          </a:prstGeom>
-        </p:spPr>
-      </p:pic>
+            <a:ext cx="12191695" cy="6858000"/>
+          </a:xfrm>
+          <a:prstGeom prst="rect">
+            <a:avLst/>
+          </a:prstGeom>
+          <a:solidFill>
+            <a:srgbClr val="F5F8F7"/>
+          </a:solidFill>
+          <a:ln>
+            <a:noFill/>
+          </a:ln>
+        </p:spPr>
+        <p:style>
+          <a:lnRef idx="1">
+            <a:schemeClr val="accent1"/>
+          </a:lnRef>
+          <a:fillRef idx="3">
+            <a:schemeClr val="accent1"/>
+          </a:fillRef>
+          <a:effectRef idx="2">
+            <a:schemeClr val="accent1"/>
+          </a:effectRef>
+          <a:fontRef idx="minor">
+            <a:schemeClr val="lt1"/>
+          </a:fontRef>
+        </p:style>
+        <p:txBody>
+          <a:bodyPr rtlCol="0" anchor="ctr"/>
+          <a:lstStyle/>
+          <a:p>
+            <a:pPr algn="ctr"/>
+          </a:p>
+        </p:txBody>
+      </p:sp>
+      <p:sp>
+        <p:nvSpPr>
+          <p:cNvPr id="3" name="Rectangle 2"/>
+          <p:cNvSpPr/>
+          <p:nvPr/>
+        </p:nvSpPr>
+        <p:spPr>
+          <a:xfrm>
+            <a:off x="0" y="0"/>
+            <a:ext cx="82296" cy="6858000"/>
+          </a:xfrm>
+          <a:prstGeom prst="rect">
+            <a:avLst/>
+          </a:prstGeom>
+          <a:solidFill>
+            <a:srgbClr val="167E78"/>
+          </a:solidFill>
+          <a:ln>
+            <a:noFill/>
+          </a:ln>
+        </p:spPr>
+        <p:style>
+          <a:lnRef idx="1">
+            <a:schemeClr val="accent1"/>
+          </a:lnRef>
+          <a:fillRef idx="3">
+            <a:schemeClr val="accent1"/>
+          </a:fillRef>
+          <a:effectRef idx="2">
+            <a:schemeClr val="accent1"/>
+          </a:effectRef>
+          <a:fontRef idx="minor">
+            <a:schemeClr val="lt1"/>
+          </a:fontRef>
+        </p:style>
+        <p:txBody>
+          <a:bodyPr rtlCol="0" anchor="ctr"/>
+          <a:lstStyle/>
+          <a:p>
+            <a:pPr algn="ctr"/>
+          </a:p>
+        </p:txBody>
+      </p:sp>
+      <p:sp>
+        <p:nvSpPr>
+          <p:cNvPr id="4" name="TextBox 3"/>
+          <p:cNvSpPr txBox="1"/>
+          <p:nvPr/>
+        </p:nvSpPr>
+        <p:spPr>
+          <a:xfrm>
+            <a:off x="548640" y="310896"/>
+            <a:ext cx="9144000" cy="246888"/>
+          </a:xfrm>
+          <a:prstGeom prst="rect">
+            <a:avLst/>
+          </a:prstGeom>
+          <a:noFill/>
+        </p:spPr>
+        <p:txBody>
+          <a:bodyPr wrap="square" lIns="0" rIns="0" tIns="0" bIns="0" anchor="ctr">
+            <a:spAutoFit/>
+          </a:bodyPr>
+          <a:lstStyle/>
+          <a:p>
+            <a:pPr algn="l">
+              <a:spcAft>
+                <a:spcPts val="200"/>
+              </a:spcAft>
+              <a:defRPr sz="1000" b="1">
+                <a:solidFill>
+                  <a:srgbClr val="167E78"/>
+                </a:solidFill>
+                <a:latin typeface="Aptos"/>
+              </a:defRPr>
+            </a:pPr>
+            <a:r>
+              <a:t>01 / THE PROBLEM</a:t>
+            </a:r>
+          </a:p>
+        </p:txBody>
+      </p:sp>
+      <p:sp>
+        <p:nvSpPr>
+          <p:cNvPr id="5" name="TextBox 4"/>
+          <p:cNvSpPr txBox="1"/>
+          <p:nvPr/>
+        </p:nvSpPr>
+        <p:spPr>
+          <a:xfrm>
+            <a:off x="548640" y="685800"/>
+            <a:ext cx="10927080" cy="1024128"/>
+          </a:xfrm>
+          <a:prstGeom prst="rect">
+            <a:avLst/>
+          </a:prstGeom>
+          <a:noFill/>
+        </p:spPr>
+        <p:txBody>
+          <a:bodyPr wrap="square" lIns="0" rIns="0" tIns="0" bIns="0" anchor="ctr">
+            <a:spAutoFit/>
+          </a:bodyPr>
+          <a:lstStyle/>
+          <a:p>
+            <a:pPr algn="l">
+              <a:spcAft>
+                <a:spcPts val="200"/>
+              </a:spcAft>
+              <a:defRPr sz="3400" b="1">
+                <a:solidFill>
+                  <a:srgbClr val="172F3B"/>
+                </a:solidFill>
+                <a:latin typeface="Aptos"/>
+              </a:defRPr>
+            </a:pPr>
+            <a:r>
+              <a:t>One number describes the present. It does not explain the next two hours.</a:t>
+            </a:r>
+          </a:p>
+        </p:txBody>
+      </p:sp>
+      <p:sp>
+        <p:nvSpPr>
+          <p:cNvPr id="6" name="TextBox 5"/>
+          <p:cNvSpPr txBox="1"/>
+          <p:nvPr/>
+        </p:nvSpPr>
+        <p:spPr>
+          <a:xfrm>
+            <a:off x="566928" y="1700784"/>
+            <a:ext cx="10881360" cy="411480"/>
+          </a:xfrm>
+          <a:prstGeom prst="rect">
+            <a:avLst/>
+          </a:prstGeom>
+          <a:noFill/>
+        </p:spPr>
+        <p:txBody>
+          <a:bodyPr wrap="square" lIns="0" rIns="0" tIns="0" bIns="0" anchor="ctr">
+            <a:spAutoFit/>
+          </a:bodyPr>
+          <a:lstStyle/>
+          <a:p>
+            <a:pPr algn="l">
+              <a:spcAft>
+                <a:spcPts val="200"/>
+              </a:spcAft>
+              <a:defRPr sz="1500" b="0">
+                <a:solidFill>
+                  <a:srgbClr val="667D88"/>
+                </a:solidFill>
+                <a:latin typeface="Aptos"/>
+              </a:defRPr>
+            </a:pPr>
+            <a:r>
+              <a:t>Patient context and measurement quality change what a forecast can mean.</a:t>
+            </a:r>
+          </a:p>
+        </p:txBody>
+      </p:sp>
+      <p:cxnSp>
+        <p:nvCxnSpPr>
+          <p:cNvPr id="7" name="Connector 6"/>
+          <p:cNvCxnSpPr/>
+          <p:nvPr/>
+        </p:nvCxnSpPr>
+        <p:spPr>
+          <a:xfrm>
+            <a:off x="548640" y="6446520"/>
+            <a:ext cx="11109960" cy="0"/>
+          </a:xfrm>
+          <a:prstGeom prst="line">
+            <a:avLst/>
+          </a:prstGeom>
+          <a:ln w="12700">
+            <a:solidFill>
+              <a:srgbClr val="D9E4E6"/>
+            </a:solidFill>
+          </a:ln>
+        </p:spPr>
+        <p:style>
+          <a:lnRef idx="2">
+            <a:schemeClr val="accent1"/>
+          </a:lnRef>
+          <a:fillRef idx="0">
+            <a:schemeClr val="accent1"/>
+          </a:fillRef>
+          <a:effectRef idx="1">
+            <a:schemeClr val="accent1"/>
+          </a:effectRef>
+          <a:fontRef idx="minor">
+            <a:schemeClr val="tx1"/>
+          </a:fontRef>
+        </p:style>
+      </p:cxnSp>
+      <p:sp>
+        <p:nvSpPr>
+          <p:cNvPr id="8" name="TextBox 7"/>
+          <p:cNvSpPr txBox="1"/>
+          <p:nvPr/>
+        </p:nvSpPr>
+        <p:spPr>
+          <a:xfrm>
+            <a:off x="548640" y="6492240"/>
+            <a:ext cx="6400800" cy="182880"/>
+          </a:xfrm>
+          <a:prstGeom prst="rect">
+            <a:avLst/>
+          </a:prstGeom>
+          <a:noFill/>
+        </p:spPr>
+        <p:txBody>
+          <a:bodyPr wrap="square" lIns="0" rIns="0" tIns="0" bIns="0" anchor="ctr">
+            <a:spAutoFit/>
+          </a:bodyPr>
+          <a:lstStyle/>
+          <a:p>
+            <a:pPr algn="l">
+              <a:spcAft>
+                <a:spcPts val="200"/>
+              </a:spcAft>
+              <a:defRPr sz="900" b="1">
+                <a:solidFill>
+                  <a:srgbClr val="667D88"/>
+                </a:solidFill>
+                <a:latin typeface="Aptos"/>
+              </a:defRPr>
+            </a:pPr>
+            <a:r>
+              <a:t>HIMANSHUDIGITALTWIN  /  MITS GWALIOR</a:t>
+            </a:r>
+          </a:p>
+        </p:txBody>
+      </p:sp>
+      <p:sp>
+        <p:nvSpPr>
+          <p:cNvPr id="9" name="TextBox 8"/>
+          <p:cNvSpPr txBox="1"/>
+          <p:nvPr/>
+        </p:nvSpPr>
+        <p:spPr>
+          <a:xfrm>
+            <a:off x="10607040" y="6492240"/>
+            <a:ext cx="1060704" cy="182880"/>
+          </a:xfrm>
+          <a:prstGeom prst="rect">
+            <a:avLst/>
+          </a:prstGeom>
+          <a:noFill/>
+        </p:spPr>
+        <p:txBody>
+          <a:bodyPr wrap="square" lIns="0" rIns="0" tIns="0" bIns="0" anchor="ctr">
+            <a:spAutoFit/>
+          </a:bodyPr>
+          <a:lstStyle/>
+          <a:p>
+            <a:pPr algn="r">
+              <a:spcAft>
+                <a:spcPts val="200"/>
+              </a:spcAft>
+              <a:defRPr sz="900" b="1">
+                <a:solidFill>
+                  <a:srgbClr val="667D88"/>
+                </a:solidFill>
+                <a:latin typeface="Aptos"/>
+              </a:defRPr>
+            </a:pPr>
+            <a:r>
+              <a:t>02 / 06</a:t>
+            </a:r>
+          </a:p>
+        </p:txBody>
+      </p:sp>
+      <p:sp>
+        <p:nvSpPr>
+          <p:cNvPr id="10" name="Rounded Rectangle 9"/>
+          <p:cNvSpPr/>
+          <p:nvPr/>
+        </p:nvSpPr>
+        <p:spPr>
+          <a:xfrm>
+            <a:off x="594360" y="2212848"/>
+            <a:ext cx="3657600" cy="3355848"/>
+          </a:xfrm>
+          <a:prstGeom prst="roundRect">
+            <a:avLst>
+              <a:gd name="adj" fmla="val 15000"/>
+            </a:avLst>
+          </a:prstGeom>
+          <a:solidFill>
+            <a:srgbClr val="FFFFFF"/>
+          </a:solidFill>
+          <a:ln>
+            <a:noFill/>
+          </a:ln>
+        </p:spPr>
+        <p:style>
+          <a:lnRef idx="1">
+            <a:schemeClr val="accent1"/>
+          </a:lnRef>
+          <a:fillRef idx="3">
+            <a:schemeClr val="accent1"/>
+          </a:fillRef>
+          <a:effectRef idx="2">
+            <a:schemeClr val="accent1"/>
+          </a:effectRef>
+          <a:fontRef idx="minor">
+            <a:schemeClr val="lt1"/>
+          </a:fontRef>
+        </p:style>
+        <p:txBody>
+          <a:bodyPr rtlCol="0" anchor="ctr"/>
+          <a:lstStyle/>
+          <a:p>
+            <a:pPr algn="ctr"/>
+          </a:p>
+        </p:txBody>
+      </p:sp>
+      <p:sp>
+        <p:nvSpPr>
+          <p:cNvPr id="11" name="TextBox 10"/>
+          <p:cNvSpPr txBox="1"/>
+          <p:nvPr/>
+        </p:nvSpPr>
+        <p:spPr>
+          <a:xfrm>
+            <a:off x="859536" y="2487168"/>
+            <a:ext cx="2560320" cy="301752"/>
+          </a:xfrm>
+          <a:prstGeom prst="rect">
+            <a:avLst/>
+          </a:prstGeom>
+          <a:noFill/>
+        </p:spPr>
+        <p:txBody>
+          <a:bodyPr wrap="square" lIns="0" rIns="0" tIns="0" bIns="0" anchor="ctr">
+            <a:spAutoFit/>
+          </a:bodyPr>
+          <a:lstStyle/>
+          <a:p>
+            <a:pPr algn="l">
+              <a:spcAft>
+                <a:spcPts val="200"/>
+              </a:spcAft>
+              <a:defRPr sz="1200" b="1">
+                <a:solidFill>
+                  <a:srgbClr val="167E78"/>
+                </a:solidFill>
+                <a:latin typeface="Aptos"/>
+              </a:defRPr>
+            </a:pPr>
+            <a:r>
+              <a:t>AT 12:15 PM</a:t>
+            </a:r>
+          </a:p>
+        </p:txBody>
+      </p:sp>
+      <p:sp>
+        <p:nvSpPr>
+          <p:cNvPr id="12" name="TextBox 11"/>
+          <p:cNvSpPr txBox="1"/>
+          <p:nvPr/>
+        </p:nvSpPr>
+        <p:spPr>
+          <a:xfrm>
+            <a:off x="868680" y="2944368"/>
+            <a:ext cx="2770632" cy="978408"/>
+          </a:xfrm>
+          <a:prstGeom prst="rect">
+            <a:avLst/>
+          </a:prstGeom>
+          <a:noFill/>
+        </p:spPr>
+        <p:txBody>
+          <a:bodyPr wrap="square" lIns="0" rIns="0" tIns="0" bIns="0" anchor="ctr">
+            <a:spAutoFit/>
+          </a:bodyPr>
+          <a:lstStyle/>
+          <a:p>
+            <a:pPr algn="l">
+              <a:spcAft>
+                <a:spcPts val="200"/>
+              </a:spcAft>
+              <a:defRPr sz="6300" b="1">
+                <a:solidFill>
+                  <a:srgbClr val="172F3B"/>
+                </a:solidFill>
+                <a:latin typeface="Aptos"/>
+              </a:defRPr>
+            </a:pPr>
+            <a:r>
+              <a:t>144</a:t>
+            </a:r>
+          </a:p>
+        </p:txBody>
+      </p:sp>
+      <p:sp>
+        <p:nvSpPr>
+          <p:cNvPr id="13" name="TextBox 12"/>
+          <p:cNvSpPr txBox="1"/>
+          <p:nvPr/>
+        </p:nvSpPr>
+        <p:spPr>
+          <a:xfrm>
+            <a:off x="877824" y="3950208"/>
+            <a:ext cx="3108960" cy="411480"/>
+          </a:xfrm>
+          <a:prstGeom prst="rect">
+            <a:avLst/>
+          </a:prstGeom>
+          <a:noFill/>
+        </p:spPr>
+        <p:txBody>
+          <a:bodyPr wrap="square" lIns="0" rIns="0" tIns="0" bIns="0" anchor="ctr">
+            <a:spAutoFit/>
+          </a:bodyPr>
+          <a:lstStyle/>
+          <a:p>
+            <a:pPr algn="l">
+              <a:spcAft>
+                <a:spcPts val="200"/>
+              </a:spcAft>
+              <a:defRPr sz="1500" b="0">
+                <a:solidFill>
+                  <a:srgbClr val="667D88"/>
+                </a:solidFill>
+                <a:latin typeface="Aptos"/>
+              </a:defRPr>
+            </a:pPr>
+            <a:r>
+              <a:t>mg/dL  ·  synthetic observed value</a:t>
+            </a:r>
+          </a:p>
+        </p:txBody>
+      </p:sp>
+      <p:cxnSp>
+        <p:nvCxnSpPr>
+          <p:cNvPr id="14" name="Connector 13"/>
+          <p:cNvCxnSpPr/>
+          <p:nvPr/>
+        </p:nvCxnSpPr>
+        <p:spPr>
+          <a:xfrm>
+            <a:off x="877824" y="4663440"/>
+            <a:ext cx="3099815" cy="0"/>
+          </a:xfrm>
+          <a:prstGeom prst="line">
+            <a:avLst/>
+          </a:prstGeom>
+          <a:ln w="17780">
+            <a:solidFill>
+              <a:srgbClr val="D9E4E6"/>
+            </a:solidFill>
+          </a:ln>
+        </p:spPr>
+        <p:style>
+          <a:lnRef idx="2">
+            <a:schemeClr val="accent1"/>
+          </a:lnRef>
+          <a:fillRef idx="0">
+            <a:schemeClr val="accent1"/>
+          </a:fillRef>
+          <a:effectRef idx="1">
+            <a:schemeClr val="accent1"/>
+          </a:effectRef>
+          <a:fontRef idx="minor">
+            <a:schemeClr val="tx1"/>
+          </a:fontRef>
+        </p:style>
+      </p:cxnSp>
+      <p:sp>
+        <p:nvSpPr>
+          <p:cNvPr id="15" name="TextBox 14"/>
+          <p:cNvSpPr txBox="1"/>
+          <p:nvPr/>
+        </p:nvSpPr>
+        <p:spPr>
+          <a:xfrm>
+            <a:off x="877824" y="4764024"/>
+            <a:ext cx="3182112" cy="566928"/>
+          </a:xfrm>
+          <a:prstGeom prst="rect">
+            <a:avLst/>
+          </a:prstGeom>
+          <a:noFill/>
+        </p:spPr>
+        <p:txBody>
+          <a:bodyPr wrap="square" lIns="0" rIns="0" tIns="0" bIns="0" anchor="ctr">
+            <a:spAutoFit/>
+          </a:bodyPr>
+          <a:lstStyle/>
+          <a:p>
+            <a:pPr algn="l">
+              <a:spcAft>
+                <a:spcPts val="200"/>
+              </a:spcAft>
+              <a:defRPr sz="1500" b="1">
+                <a:solidFill>
+                  <a:srgbClr val="172F3B"/>
+                </a:solidFill>
+                <a:latin typeface="Aptos"/>
+              </a:defRPr>
+            </a:pPr>
+            <a:r>
+              <a:t>A reading is evidence —</a:t>
+            </a:r>
+          </a:p>
+          <a:p>
+            <a:pPr algn="l">
+              <a:spcAft>
+                <a:spcPts val="200"/>
+              </a:spcAft>
+              <a:defRPr sz="1500" b="1">
+                <a:solidFill>
+                  <a:srgbClr val="172F3B"/>
+                </a:solidFill>
+                <a:latin typeface="Aptos"/>
+              </a:defRPr>
+            </a:pPr>
+            <a:r>
+              <a:t>not a two-hour prediction.</a:t>
+            </a:r>
+          </a:p>
+        </p:txBody>
+      </p:sp>
+      <p:sp>
+        <p:nvSpPr>
+          <p:cNvPr id="16" name="Rounded Rectangle 15"/>
+          <p:cNvSpPr/>
+          <p:nvPr/>
+        </p:nvSpPr>
+        <p:spPr>
+          <a:xfrm>
+            <a:off x="4453128" y="2212848"/>
+            <a:ext cx="7114032" cy="3355848"/>
+          </a:xfrm>
+          <a:prstGeom prst="roundRect">
+            <a:avLst>
+              <a:gd name="adj" fmla="val 15000"/>
+            </a:avLst>
+          </a:prstGeom>
+          <a:solidFill>
+            <a:srgbClr val="FFFFFF"/>
+          </a:solidFill>
+          <a:ln>
+            <a:noFill/>
+          </a:ln>
+        </p:spPr>
+        <p:style>
+          <a:lnRef idx="1">
+            <a:schemeClr val="accent1"/>
+          </a:lnRef>
+          <a:fillRef idx="3">
+            <a:schemeClr val="accent1"/>
+          </a:fillRef>
+          <a:effectRef idx="2">
+            <a:schemeClr val="accent1"/>
+          </a:effectRef>
+          <a:fontRef idx="minor">
+            <a:schemeClr val="lt1"/>
+          </a:fontRef>
+        </p:style>
+        <p:txBody>
+          <a:bodyPr rtlCol="0" anchor="ctr"/>
+          <a:lstStyle/>
+          <a:p>
+            <a:pPr algn="ctr"/>
+          </a:p>
+        </p:txBody>
+      </p:sp>
+      <p:sp>
+        <p:nvSpPr>
+          <p:cNvPr id="17" name="TextBox 16"/>
+          <p:cNvSpPr txBox="1"/>
+          <p:nvPr/>
+        </p:nvSpPr>
+        <p:spPr>
+          <a:xfrm>
+            <a:off x="4773168" y="2496312"/>
+            <a:ext cx="6400800" cy="310896"/>
+          </a:xfrm>
+          <a:prstGeom prst="rect">
+            <a:avLst/>
+          </a:prstGeom>
+          <a:noFill/>
+        </p:spPr>
+        <p:txBody>
+          <a:bodyPr wrap="square" lIns="0" rIns="0" tIns="0" bIns="0" anchor="ctr">
+            <a:spAutoFit/>
+          </a:bodyPr>
+          <a:lstStyle/>
+          <a:p>
+            <a:pPr algn="l">
+              <a:spcAft>
+                <a:spcPts val="200"/>
+              </a:spcAft>
+              <a:defRPr sz="1200" b="1">
+                <a:solidFill>
+                  <a:srgbClr val="167E78"/>
+                </a:solidFill>
+                <a:latin typeface="Aptos"/>
+              </a:defRPr>
+            </a:pPr>
+            <a:r>
+              <a:t>ILLUSTRATIVE FORECAST FROM THE SAME REPLAY</a:t>
+            </a:r>
+          </a:p>
+        </p:txBody>
+      </p:sp>
+      <p:sp>
+        <p:nvSpPr>
+          <p:cNvPr id="18" name="TextBox 17"/>
+          <p:cNvSpPr txBox="1"/>
+          <p:nvPr/>
+        </p:nvSpPr>
+        <p:spPr>
+          <a:xfrm>
+            <a:off x="4773168" y="3008376"/>
+            <a:ext cx="1444752" cy="292608"/>
+          </a:xfrm>
+          <a:prstGeom prst="rect">
+            <a:avLst/>
+          </a:prstGeom>
+          <a:noFill/>
+        </p:spPr>
+        <p:txBody>
+          <a:bodyPr wrap="square" lIns="0" rIns="0" tIns="0" bIns="0" anchor="ctr">
+            <a:spAutoFit/>
+          </a:bodyPr>
+          <a:lstStyle/>
+          <a:p>
+            <a:pPr algn="l">
+              <a:spcAft>
+                <a:spcPts val="200"/>
+              </a:spcAft>
+              <a:defRPr sz="1300" b="1">
+                <a:solidFill>
+                  <a:srgbClr val="667D88"/>
+                </a:solidFill>
+                <a:latin typeface="Aptos"/>
+              </a:defRPr>
+            </a:pPr>
+            <a:r>
+              <a:t>NOW</a:t>
+            </a:r>
+          </a:p>
+        </p:txBody>
+      </p:sp>
+      <p:sp>
+        <p:nvSpPr>
+          <p:cNvPr id="19" name="TextBox 18"/>
+          <p:cNvSpPr txBox="1"/>
+          <p:nvPr/>
+        </p:nvSpPr>
+        <p:spPr>
+          <a:xfrm>
+            <a:off x="4773168" y="3383280"/>
+            <a:ext cx="1508760" cy="594360"/>
+          </a:xfrm>
+          <a:prstGeom prst="rect">
+            <a:avLst/>
+          </a:prstGeom>
+          <a:noFill/>
+        </p:spPr>
+        <p:txBody>
+          <a:bodyPr wrap="square" lIns="0" rIns="0" tIns="0" bIns="0" anchor="ctr">
+            <a:spAutoFit/>
+          </a:bodyPr>
+          <a:lstStyle/>
+          <a:p>
+            <a:pPr algn="l">
+              <a:spcAft>
+                <a:spcPts val="200"/>
+              </a:spcAft>
+              <a:defRPr sz="2700" b="1">
+                <a:solidFill>
+                  <a:srgbClr val="172F3B"/>
+                </a:solidFill>
+                <a:latin typeface="Aptos"/>
+              </a:defRPr>
+            </a:pPr>
+            <a:r>
+              <a:t>144</a:t>
+            </a:r>
+          </a:p>
+        </p:txBody>
+      </p:sp>
+      <p:cxnSp>
+        <p:nvCxnSpPr>
+          <p:cNvPr id="20" name="Connector 19"/>
+          <p:cNvCxnSpPr/>
+          <p:nvPr/>
+        </p:nvCxnSpPr>
+        <p:spPr>
+          <a:xfrm>
+            <a:off x="6153912" y="3694176"/>
+            <a:ext cx="173736" cy="0"/>
+          </a:xfrm>
+          <a:prstGeom prst="line">
+            <a:avLst/>
+          </a:prstGeom>
+          <a:ln w="25400">
+            <a:solidFill>
+              <a:srgbClr val="167E78"/>
+            </a:solidFill>
+          </a:ln>
+        </p:spPr>
+        <p:style>
+          <a:lnRef idx="2">
+            <a:schemeClr val="accent1"/>
+          </a:lnRef>
+          <a:fillRef idx="0">
+            <a:schemeClr val="accent1"/>
+          </a:fillRef>
+          <a:effectRef idx="1">
+            <a:schemeClr val="accent1"/>
+          </a:effectRef>
+          <a:fontRef idx="minor">
+            <a:schemeClr val="tx1"/>
+          </a:fontRef>
+        </p:style>
+      </p:cxnSp>
+      <p:sp>
+        <p:nvSpPr>
+          <p:cNvPr id="21" name="TextBox 20"/>
+          <p:cNvSpPr txBox="1"/>
+          <p:nvPr/>
+        </p:nvSpPr>
+        <p:spPr>
+          <a:xfrm>
+            <a:off x="6391656" y="3008376"/>
+            <a:ext cx="1444752" cy="292608"/>
+          </a:xfrm>
+          <a:prstGeom prst="rect">
+            <a:avLst/>
+          </a:prstGeom>
+          <a:noFill/>
+        </p:spPr>
+        <p:txBody>
+          <a:bodyPr wrap="square" lIns="0" rIns="0" tIns="0" bIns="0" anchor="ctr">
+            <a:spAutoFit/>
+          </a:bodyPr>
+          <a:lstStyle/>
+          <a:p>
+            <a:pPr algn="l">
+              <a:spcAft>
+                <a:spcPts val="200"/>
+              </a:spcAft>
+              <a:defRPr sz="1300" b="1">
+                <a:solidFill>
+                  <a:srgbClr val="667D88"/>
+                </a:solidFill>
+                <a:latin typeface="Aptos"/>
+              </a:defRPr>
+            </a:pPr>
+            <a:r>
+              <a:t>+30 min</a:t>
+            </a:r>
+          </a:p>
+        </p:txBody>
+      </p:sp>
+      <p:sp>
+        <p:nvSpPr>
+          <p:cNvPr id="22" name="TextBox 21"/>
+          <p:cNvSpPr txBox="1"/>
+          <p:nvPr/>
+        </p:nvSpPr>
+        <p:spPr>
+          <a:xfrm>
+            <a:off x="6391656" y="3383280"/>
+            <a:ext cx="1508760" cy="594360"/>
+          </a:xfrm>
+          <a:prstGeom prst="rect">
+            <a:avLst/>
+          </a:prstGeom>
+          <a:noFill/>
+        </p:spPr>
+        <p:txBody>
+          <a:bodyPr wrap="square" lIns="0" rIns="0" tIns="0" bIns="0" anchor="ctr">
+            <a:spAutoFit/>
+          </a:bodyPr>
+          <a:lstStyle/>
+          <a:p>
+            <a:pPr algn="l">
+              <a:spcAft>
+                <a:spcPts val="200"/>
+              </a:spcAft>
+              <a:defRPr sz="2700" b="1">
+                <a:solidFill>
+                  <a:srgbClr val="172F3B"/>
+                </a:solidFill>
+                <a:latin typeface="Aptos"/>
+              </a:defRPr>
+            </a:pPr>
+            <a:r>
+              <a:t>155.5</a:t>
+            </a:r>
+          </a:p>
+        </p:txBody>
+      </p:sp>
+      <p:cxnSp>
+        <p:nvCxnSpPr>
+          <p:cNvPr id="23" name="Connector 22"/>
+          <p:cNvCxnSpPr/>
+          <p:nvPr/>
+        </p:nvCxnSpPr>
+        <p:spPr>
+          <a:xfrm>
+            <a:off x="7772400" y="3694176"/>
+            <a:ext cx="173736" cy="0"/>
+          </a:xfrm>
+          <a:prstGeom prst="line">
+            <a:avLst/>
+          </a:prstGeom>
+          <a:ln w="25400">
+            <a:solidFill>
+              <a:srgbClr val="167E78"/>
+            </a:solidFill>
+          </a:ln>
+        </p:spPr>
+        <p:style>
+          <a:lnRef idx="2">
+            <a:schemeClr val="accent1"/>
+          </a:lnRef>
+          <a:fillRef idx="0">
+            <a:schemeClr val="accent1"/>
+          </a:fillRef>
+          <a:effectRef idx="1">
+            <a:schemeClr val="accent1"/>
+          </a:effectRef>
+          <a:fontRef idx="minor">
+            <a:schemeClr val="tx1"/>
+          </a:fontRef>
+        </p:style>
+      </p:cxnSp>
+      <p:sp>
+        <p:nvSpPr>
+          <p:cNvPr id="24" name="TextBox 23"/>
+          <p:cNvSpPr txBox="1"/>
+          <p:nvPr/>
+        </p:nvSpPr>
+        <p:spPr>
+          <a:xfrm>
+            <a:off x="8010144" y="3008376"/>
+            <a:ext cx="1444752" cy="292608"/>
+          </a:xfrm>
+          <a:prstGeom prst="rect">
+            <a:avLst/>
+          </a:prstGeom>
+          <a:noFill/>
+        </p:spPr>
+        <p:txBody>
+          <a:bodyPr wrap="square" lIns="0" rIns="0" tIns="0" bIns="0" anchor="ctr">
+            <a:spAutoFit/>
+          </a:bodyPr>
+          <a:lstStyle/>
+          <a:p>
+            <a:pPr algn="l">
+              <a:spcAft>
+                <a:spcPts val="200"/>
+              </a:spcAft>
+              <a:defRPr sz="1300" b="1">
+                <a:solidFill>
+                  <a:srgbClr val="667D88"/>
+                </a:solidFill>
+                <a:latin typeface="Aptos"/>
+              </a:defRPr>
+            </a:pPr>
+            <a:r>
+              <a:t>+60 min</a:t>
+            </a:r>
+          </a:p>
+        </p:txBody>
+      </p:sp>
+      <p:sp>
+        <p:nvSpPr>
+          <p:cNvPr id="25" name="TextBox 24"/>
+          <p:cNvSpPr txBox="1"/>
+          <p:nvPr/>
+        </p:nvSpPr>
+        <p:spPr>
+          <a:xfrm>
+            <a:off x="8010144" y="3383280"/>
+            <a:ext cx="1508760" cy="594360"/>
+          </a:xfrm>
+          <a:prstGeom prst="rect">
+            <a:avLst/>
+          </a:prstGeom>
+          <a:noFill/>
+        </p:spPr>
+        <p:txBody>
+          <a:bodyPr wrap="square" lIns="0" rIns="0" tIns="0" bIns="0" anchor="ctr">
+            <a:spAutoFit/>
+          </a:bodyPr>
+          <a:lstStyle/>
+          <a:p>
+            <a:pPr algn="l">
+              <a:spcAft>
+                <a:spcPts val="200"/>
+              </a:spcAft>
+              <a:defRPr sz="2700" b="1">
+                <a:solidFill>
+                  <a:srgbClr val="172F3B"/>
+                </a:solidFill>
+                <a:latin typeface="Aptos"/>
+              </a:defRPr>
+            </a:pPr>
+            <a:r>
+              <a:t>156.0</a:t>
+            </a:r>
+          </a:p>
+        </p:txBody>
+      </p:sp>
+      <p:cxnSp>
+        <p:nvCxnSpPr>
+          <p:cNvPr id="26" name="Connector 25"/>
+          <p:cNvCxnSpPr/>
+          <p:nvPr/>
+        </p:nvCxnSpPr>
+        <p:spPr>
+          <a:xfrm>
+            <a:off x="9390888" y="3694176"/>
+            <a:ext cx="173736" cy="0"/>
+          </a:xfrm>
+          <a:prstGeom prst="line">
+            <a:avLst/>
+          </a:prstGeom>
+          <a:ln w="25400">
+            <a:solidFill>
+              <a:srgbClr val="167E78"/>
+            </a:solidFill>
+          </a:ln>
+        </p:spPr>
+        <p:style>
+          <a:lnRef idx="2">
+            <a:schemeClr val="accent1"/>
+          </a:lnRef>
+          <a:fillRef idx="0">
+            <a:schemeClr val="accent1"/>
+          </a:fillRef>
+          <a:effectRef idx="1">
+            <a:schemeClr val="accent1"/>
+          </a:effectRef>
+          <a:fontRef idx="minor">
+            <a:schemeClr val="tx1"/>
+          </a:fontRef>
+        </p:style>
+      </p:cxnSp>
+      <p:sp>
+        <p:nvSpPr>
+          <p:cNvPr id="27" name="TextBox 26"/>
+          <p:cNvSpPr txBox="1"/>
+          <p:nvPr/>
+        </p:nvSpPr>
+        <p:spPr>
+          <a:xfrm>
+            <a:off x="9628632" y="3008376"/>
+            <a:ext cx="1444752" cy="292608"/>
+          </a:xfrm>
+          <a:prstGeom prst="rect">
+            <a:avLst/>
+          </a:prstGeom>
+          <a:noFill/>
+        </p:spPr>
+        <p:txBody>
+          <a:bodyPr wrap="square" lIns="0" rIns="0" tIns="0" bIns="0" anchor="ctr">
+            <a:spAutoFit/>
+          </a:bodyPr>
+          <a:lstStyle/>
+          <a:p>
+            <a:pPr algn="l">
+              <a:spcAft>
+                <a:spcPts val="200"/>
+              </a:spcAft>
+              <a:defRPr sz="1300" b="1">
+                <a:solidFill>
+                  <a:srgbClr val="667D88"/>
+                </a:solidFill>
+                <a:latin typeface="Aptos"/>
+              </a:defRPr>
+            </a:pPr>
+            <a:r>
+              <a:t>+120 min</a:t>
+            </a:r>
+          </a:p>
+        </p:txBody>
+      </p:sp>
+      <p:sp>
+        <p:nvSpPr>
+          <p:cNvPr id="28" name="TextBox 27"/>
+          <p:cNvSpPr txBox="1"/>
+          <p:nvPr/>
+        </p:nvSpPr>
+        <p:spPr>
+          <a:xfrm>
+            <a:off x="9628632" y="3383280"/>
+            <a:ext cx="1508760" cy="594360"/>
+          </a:xfrm>
+          <a:prstGeom prst="rect">
+            <a:avLst/>
+          </a:prstGeom>
+          <a:noFill/>
+        </p:spPr>
+        <p:txBody>
+          <a:bodyPr wrap="square" lIns="0" rIns="0" tIns="0" bIns="0" anchor="ctr">
+            <a:spAutoFit/>
+          </a:bodyPr>
+          <a:lstStyle/>
+          <a:p>
+            <a:pPr algn="l">
+              <a:spcAft>
+                <a:spcPts val="200"/>
+              </a:spcAft>
+              <a:defRPr sz="2700" b="1">
+                <a:solidFill>
+                  <a:srgbClr val="172F3B"/>
+                </a:solidFill>
+                <a:latin typeface="Aptos"/>
+              </a:defRPr>
+            </a:pPr>
+            <a:r>
+              <a:t>145.4</a:t>
+            </a:r>
+          </a:p>
+        </p:txBody>
+      </p:sp>
+      <p:cxnSp>
+        <p:nvCxnSpPr>
+          <p:cNvPr id="29" name="Connector 28"/>
+          <p:cNvCxnSpPr/>
+          <p:nvPr/>
+        </p:nvCxnSpPr>
+        <p:spPr>
+          <a:xfrm>
+            <a:off x="4773168" y="4416552"/>
+            <a:ext cx="6419088" cy="0"/>
+          </a:xfrm>
+          <a:prstGeom prst="line">
+            <a:avLst/>
+          </a:prstGeom>
+          <a:ln w="17780">
+            <a:solidFill>
+              <a:srgbClr val="D9E4E6"/>
+            </a:solidFill>
+          </a:ln>
+        </p:spPr>
+        <p:style>
+          <a:lnRef idx="2">
+            <a:schemeClr val="accent1"/>
+          </a:lnRef>
+          <a:fillRef idx="0">
+            <a:schemeClr val="accent1"/>
+          </a:fillRef>
+          <a:effectRef idx="1">
+            <a:schemeClr val="accent1"/>
+          </a:effectRef>
+          <a:fontRef idx="minor">
+            <a:schemeClr val="tx1"/>
+          </a:fontRef>
+        </p:style>
+      </p:cxnSp>
+      <p:sp>
+        <p:nvSpPr>
+          <p:cNvPr id="30" name="TextBox 29"/>
+          <p:cNvSpPr txBox="1"/>
+          <p:nvPr/>
+        </p:nvSpPr>
+        <p:spPr>
+          <a:xfrm>
+            <a:off x="4773168" y="4599432"/>
+            <a:ext cx="6400800" cy="557784"/>
+          </a:xfrm>
+          <a:prstGeom prst="rect">
+            <a:avLst/>
+          </a:prstGeom>
+          <a:noFill/>
+        </p:spPr>
+        <p:txBody>
+          <a:bodyPr wrap="square" lIns="0" rIns="0" tIns="0" bIns="0" anchor="ctr">
+            <a:spAutoFit/>
+          </a:bodyPr>
+          <a:lstStyle/>
+          <a:p>
+            <a:pPr algn="l">
+              <a:spcAft>
+                <a:spcPts val="200"/>
+              </a:spcAft>
+              <a:defRPr sz="1400" b="0">
+                <a:solidFill>
+                  <a:srgbClr val="667D88"/>
+                </a:solidFill>
+                <a:latin typeface="Aptos"/>
+              </a:defRPr>
+            </a:pPr>
+            <a:r>
+              <a:t>Context: 59.7 g recent carbohydrates  ·  heart rate 82 bpm  ·  time aligned CGM</a:t>
+            </a:r>
+          </a:p>
+        </p:txBody>
+      </p:sp>
+      <p:sp>
+        <p:nvSpPr>
+          <p:cNvPr id="31" name="TextBox 30"/>
+          <p:cNvSpPr txBox="1"/>
+          <p:nvPr/>
+        </p:nvSpPr>
+        <p:spPr>
+          <a:xfrm>
+            <a:off x="630936" y="5824728"/>
+            <a:ext cx="10863072" cy="320040"/>
+          </a:xfrm>
+          <a:prstGeom prst="rect">
+            <a:avLst/>
+          </a:prstGeom>
+          <a:noFill/>
+        </p:spPr>
+        <p:txBody>
+          <a:bodyPr wrap="square" lIns="0" rIns="0" tIns="0" bIns="0" anchor="ctr">
+            <a:spAutoFit/>
+          </a:bodyPr>
+          <a:lstStyle/>
+          <a:p>
+            <a:pPr algn="l">
+              <a:spcAft>
+                <a:spcPts val="200"/>
+              </a:spcAft>
+              <a:defRPr sz="1600" b="1">
+                <a:solidFill>
+                  <a:srgbClr val="172F3B"/>
+                </a:solidFill>
+                <a:latin typeface="Aptos"/>
+              </a:defRPr>
+            </a:pPr>
+            <a:r>
+              <a:t>Question for the prototype: can we show useful context without hiding sensor uncertainty?</a:t>
+            </a:r>
+          </a:p>
+        </p:txBody>
+      </p:sp>
     </p:spTree>
   </p:cSld>
   <p:clrMapOvr>
@@ -3177,30 +5480,1619 @@
         <p:nvPr/>
       </p:nvGrpSpPr>
       <p:grpSpPr/>
-      <p:pic>
-        <p:nvPicPr>
-          <p:cNvPr id="2" name="Picture 1" descr="image.png"/>
-          <p:cNvPicPr>
-            <a:picLocks noChangeAspect="1"/>
-          </p:cNvPicPr>
-          <p:nvPr/>
-        </p:nvPicPr>
-        <p:blipFill>
-          <a:blip r:embed="rId2"/>
-          <a:stretch>
-            <a:fillRect/>
-          </a:stretch>
-        </p:blipFill>
+      <p:sp>
+        <p:nvSpPr>
+          <p:cNvPr id="2" name="Rectangle 1"/>
+          <p:cNvSpPr/>
+          <p:nvPr/>
+        </p:nvSpPr>
         <p:spPr>
           <a:xfrm>
             <a:off x="0" y="0"/>
-            <a:ext cx="14630400" cy="8229600"/>
-          </a:xfrm>
-          <a:prstGeom prst="rect">
-            <a:avLst/>
-          </a:prstGeom>
-        </p:spPr>
-      </p:pic>
+            <a:ext cx="12191695" cy="6858000"/>
+          </a:xfrm>
+          <a:prstGeom prst="rect">
+            <a:avLst/>
+          </a:prstGeom>
+          <a:solidFill>
+            <a:srgbClr val="F5F8F7"/>
+          </a:solidFill>
+          <a:ln>
+            <a:noFill/>
+          </a:ln>
+        </p:spPr>
+        <p:style>
+          <a:lnRef idx="1">
+            <a:schemeClr val="accent1"/>
+          </a:lnRef>
+          <a:fillRef idx="3">
+            <a:schemeClr val="accent1"/>
+          </a:fillRef>
+          <a:effectRef idx="2">
+            <a:schemeClr val="accent1"/>
+          </a:effectRef>
+          <a:fontRef idx="minor">
+            <a:schemeClr val="lt1"/>
+          </a:fontRef>
+        </p:style>
+        <p:txBody>
+          <a:bodyPr rtlCol="0" anchor="ctr"/>
+          <a:lstStyle/>
+          <a:p>
+            <a:pPr algn="ctr"/>
+          </a:p>
+        </p:txBody>
+      </p:sp>
+      <p:sp>
+        <p:nvSpPr>
+          <p:cNvPr id="3" name="Rectangle 2"/>
+          <p:cNvSpPr/>
+          <p:nvPr/>
+        </p:nvSpPr>
+        <p:spPr>
+          <a:xfrm>
+            <a:off x="0" y="0"/>
+            <a:ext cx="82296" cy="6858000"/>
+          </a:xfrm>
+          <a:prstGeom prst="rect">
+            <a:avLst/>
+          </a:prstGeom>
+          <a:solidFill>
+            <a:srgbClr val="167E78"/>
+          </a:solidFill>
+          <a:ln>
+            <a:noFill/>
+          </a:ln>
+        </p:spPr>
+        <p:style>
+          <a:lnRef idx="1">
+            <a:schemeClr val="accent1"/>
+          </a:lnRef>
+          <a:fillRef idx="3">
+            <a:schemeClr val="accent1"/>
+          </a:fillRef>
+          <a:effectRef idx="2">
+            <a:schemeClr val="accent1"/>
+          </a:effectRef>
+          <a:fontRef idx="minor">
+            <a:schemeClr val="lt1"/>
+          </a:fontRef>
+        </p:style>
+        <p:txBody>
+          <a:bodyPr rtlCol="0" anchor="ctr"/>
+          <a:lstStyle/>
+          <a:p>
+            <a:pPr algn="ctr"/>
+          </a:p>
+        </p:txBody>
+      </p:sp>
+      <p:sp>
+        <p:nvSpPr>
+          <p:cNvPr id="4" name="TextBox 3"/>
+          <p:cNvSpPr txBox="1"/>
+          <p:nvPr/>
+        </p:nvSpPr>
+        <p:spPr>
+          <a:xfrm>
+            <a:off x="548640" y="310896"/>
+            <a:ext cx="9144000" cy="246888"/>
+          </a:xfrm>
+          <a:prstGeom prst="rect">
+            <a:avLst/>
+          </a:prstGeom>
+          <a:noFill/>
+        </p:spPr>
+        <p:txBody>
+          <a:bodyPr wrap="square" lIns="0" rIns="0" tIns="0" bIns="0" anchor="ctr">
+            <a:spAutoFit/>
+          </a:bodyPr>
+          <a:lstStyle/>
+          <a:p>
+            <a:pPr algn="l">
+              <a:spcAft>
+                <a:spcPts val="200"/>
+              </a:spcAft>
+              <a:defRPr sz="1000" b="1">
+                <a:solidFill>
+                  <a:srgbClr val="167E78"/>
+                </a:solidFill>
+                <a:latin typeface="Aptos"/>
+              </a:defRPr>
+            </a:pPr>
+            <a:r>
+              <a:t>02 / ARCHITECTURE</a:t>
+            </a:r>
+          </a:p>
+        </p:txBody>
+      </p:sp>
+      <p:sp>
+        <p:nvSpPr>
+          <p:cNvPr id="5" name="TextBox 4"/>
+          <p:cNvSpPr txBox="1"/>
+          <p:nvPr/>
+        </p:nvSpPr>
+        <p:spPr>
+          <a:xfrm>
+            <a:off x="548640" y="685800"/>
+            <a:ext cx="10927080" cy="1024128"/>
+          </a:xfrm>
+          <a:prstGeom prst="rect">
+            <a:avLst/>
+          </a:prstGeom>
+          <a:noFill/>
+        </p:spPr>
+        <p:txBody>
+          <a:bodyPr wrap="square" lIns="0" rIns="0" tIns="0" bIns="0" anchor="ctr">
+            <a:spAutoFit/>
+          </a:bodyPr>
+          <a:lstStyle/>
+          <a:p>
+            <a:pPr algn="l">
+              <a:spcAft>
+                <a:spcPts val="200"/>
+              </a:spcAft>
+              <a:defRPr sz="3400" b="1">
+                <a:solidFill>
+                  <a:srgbClr val="172F3B"/>
+                </a:solidFill>
+                <a:latin typeface="Aptos"/>
+              </a:defRPr>
+            </a:pPr>
+            <a:r>
+              <a:t>Synchronize first. Predict only when supported.</a:t>
+            </a:r>
+          </a:p>
+        </p:txBody>
+      </p:sp>
+      <p:sp>
+        <p:nvSpPr>
+          <p:cNvPr id="6" name="TextBox 5"/>
+          <p:cNvSpPr txBox="1"/>
+          <p:nvPr/>
+        </p:nvSpPr>
+        <p:spPr>
+          <a:xfrm>
+            <a:off x="566928" y="1700784"/>
+            <a:ext cx="10881360" cy="411480"/>
+          </a:xfrm>
+          <a:prstGeom prst="rect">
+            <a:avLst/>
+          </a:prstGeom>
+          <a:noFill/>
+        </p:spPr>
+        <p:txBody>
+          <a:bodyPr wrap="square" lIns="0" rIns="0" tIns="0" bIns="0" anchor="ctr">
+            <a:spAutoFit/>
+          </a:bodyPr>
+          <a:lstStyle/>
+          <a:p>
+            <a:pPr algn="l">
+              <a:spcAft>
+                <a:spcPts val="200"/>
+              </a:spcAft>
+              <a:defRPr sz="1500" b="0">
+                <a:solidFill>
+                  <a:srgbClr val="667D88"/>
+                </a:solidFill>
+                <a:latin typeface="Aptos"/>
+              </a:defRPr>
+            </a:pPr>
+            <a:r>
+              <a:t>The judge can trace an observation through an explicit quality decision.</a:t>
+            </a:r>
+          </a:p>
+        </p:txBody>
+      </p:sp>
+      <p:cxnSp>
+        <p:nvCxnSpPr>
+          <p:cNvPr id="7" name="Connector 6"/>
+          <p:cNvCxnSpPr/>
+          <p:nvPr/>
+        </p:nvCxnSpPr>
+        <p:spPr>
+          <a:xfrm>
+            <a:off x="548640" y="6446520"/>
+            <a:ext cx="11109960" cy="0"/>
+          </a:xfrm>
+          <a:prstGeom prst="line">
+            <a:avLst/>
+          </a:prstGeom>
+          <a:ln w="12700">
+            <a:solidFill>
+              <a:srgbClr val="D9E4E6"/>
+            </a:solidFill>
+          </a:ln>
+        </p:spPr>
+        <p:style>
+          <a:lnRef idx="2">
+            <a:schemeClr val="accent1"/>
+          </a:lnRef>
+          <a:fillRef idx="0">
+            <a:schemeClr val="accent1"/>
+          </a:fillRef>
+          <a:effectRef idx="1">
+            <a:schemeClr val="accent1"/>
+          </a:effectRef>
+          <a:fontRef idx="minor">
+            <a:schemeClr val="tx1"/>
+          </a:fontRef>
+        </p:style>
+      </p:cxnSp>
+      <p:sp>
+        <p:nvSpPr>
+          <p:cNvPr id="8" name="TextBox 7"/>
+          <p:cNvSpPr txBox="1"/>
+          <p:nvPr/>
+        </p:nvSpPr>
+        <p:spPr>
+          <a:xfrm>
+            <a:off x="548640" y="6492240"/>
+            <a:ext cx="6400800" cy="182880"/>
+          </a:xfrm>
+          <a:prstGeom prst="rect">
+            <a:avLst/>
+          </a:prstGeom>
+          <a:noFill/>
+        </p:spPr>
+        <p:txBody>
+          <a:bodyPr wrap="square" lIns="0" rIns="0" tIns="0" bIns="0" anchor="ctr">
+            <a:spAutoFit/>
+          </a:bodyPr>
+          <a:lstStyle/>
+          <a:p>
+            <a:pPr algn="l">
+              <a:spcAft>
+                <a:spcPts val="200"/>
+              </a:spcAft>
+              <a:defRPr sz="900" b="1">
+                <a:solidFill>
+                  <a:srgbClr val="667D88"/>
+                </a:solidFill>
+                <a:latin typeface="Aptos"/>
+              </a:defRPr>
+            </a:pPr>
+            <a:r>
+              <a:t>HIMANSHUDIGITALTWIN  /  MITS GWALIOR</a:t>
+            </a:r>
+          </a:p>
+        </p:txBody>
+      </p:sp>
+      <p:sp>
+        <p:nvSpPr>
+          <p:cNvPr id="9" name="TextBox 8"/>
+          <p:cNvSpPr txBox="1"/>
+          <p:nvPr/>
+        </p:nvSpPr>
+        <p:spPr>
+          <a:xfrm>
+            <a:off x="10607040" y="6492240"/>
+            <a:ext cx="1060704" cy="182880"/>
+          </a:xfrm>
+          <a:prstGeom prst="rect">
+            <a:avLst/>
+          </a:prstGeom>
+          <a:noFill/>
+        </p:spPr>
+        <p:txBody>
+          <a:bodyPr wrap="square" lIns="0" rIns="0" tIns="0" bIns="0" anchor="ctr">
+            <a:spAutoFit/>
+          </a:bodyPr>
+          <a:lstStyle/>
+          <a:p>
+            <a:pPr algn="r">
+              <a:spcAft>
+                <a:spcPts val="200"/>
+              </a:spcAft>
+              <a:defRPr sz="900" b="1">
+                <a:solidFill>
+                  <a:srgbClr val="667D88"/>
+                </a:solidFill>
+                <a:latin typeface="Aptos"/>
+              </a:defRPr>
+            </a:pPr>
+            <a:r>
+              <a:t>03 / 06</a:t>
+            </a:r>
+          </a:p>
+        </p:txBody>
+      </p:sp>
+      <p:sp>
+        <p:nvSpPr>
+          <p:cNvPr id="10" name="Rounded Rectangle 9"/>
+          <p:cNvSpPr/>
+          <p:nvPr/>
+        </p:nvSpPr>
+        <p:spPr>
+          <a:xfrm>
+            <a:off x="594360" y="2286000"/>
+            <a:ext cx="2075688" cy="1005840"/>
+          </a:xfrm>
+          <a:prstGeom prst="roundRect">
+            <a:avLst>
+              <a:gd name="adj" fmla="val 15000"/>
+            </a:avLst>
+          </a:prstGeom>
+          <a:solidFill>
+            <a:srgbClr val="FFFFFF"/>
+          </a:solidFill>
+          <a:ln w="12700">
+            <a:solidFill>
+              <a:srgbClr val="D9E4E6"/>
+            </a:solidFill>
+          </a:ln>
+        </p:spPr>
+        <p:style>
+          <a:lnRef idx="1">
+            <a:schemeClr val="accent1"/>
+          </a:lnRef>
+          <a:fillRef idx="3">
+            <a:schemeClr val="accent1"/>
+          </a:fillRef>
+          <a:effectRef idx="2">
+            <a:schemeClr val="accent1"/>
+          </a:effectRef>
+          <a:fontRef idx="minor">
+            <a:schemeClr val="lt1"/>
+          </a:fontRef>
+        </p:style>
+        <p:txBody>
+          <a:bodyPr rtlCol="0" anchor="ctr"/>
+          <a:lstStyle/>
+          <a:p>
+            <a:pPr algn="ctr"/>
+          </a:p>
+        </p:txBody>
+      </p:sp>
+      <p:sp>
+        <p:nvSpPr>
+          <p:cNvPr id="11" name="TextBox 10"/>
+          <p:cNvSpPr txBox="1"/>
+          <p:nvPr/>
+        </p:nvSpPr>
+        <p:spPr>
+          <a:xfrm>
+            <a:off x="731520" y="2459736"/>
+            <a:ext cx="1810512" cy="320040"/>
+          </a:xfrm>
+          <a:prstGeom prst="rect">
+            <a:avLst/>
+          </a:prstGeom>
+          <a:noFill/>
+        </p:spPr>
+        <p:txBody>
+          <a:bodyPr wrap="square" lIns="0" rIns="0" tIns="0" bIns="0" anchor="ctr">
+            <a:spAutoFit/>
+          </a:bodyPr>
+          <a:lstStyle/>
+          <a:p>
+            <a:pPr algn="l">
+              <a:spcAft>
+                <a:spcPts val="200"/>
+              </a:spcAft>
+              <a:defRPr sz="1500" b="1">
+                <a:solidFill>
+                  <a:srgbClr val="172F3B"/>
+                </a:solidFill>
+                <a:latin typeface="Aptos"/>
+              </a:defRPr>
+            </a:pPr>
+            <a:r>
+              <a:t>Patient profile</a:t>
+            </a:r>
+          </a:p>
+        </p:txBody>
+      </p:sp>
+      <p:sp>
+        <p:nvSpPr>
+          <p:cNvPr id="12" name="TextBox 11"/>
+          <p:cNvSpPr txBox="1"/>
+          <p:nvPr/>
+        </p:nvSpPr>
+        <p:spPr>
+          <a:xfrm>
+            <a:off x="731520" y="2834640"/>
+            <a:ext cx="1828800" cy="210312"/>
+          </a:xfrm>
+          <a:prstGeom prst="rect">
+            <a:avLst/>
+          </a:prstGeom>
+          <a:noFill/>
+        </p:spPr>
+        <p:txBody>
+          <a:bodyPr wrap="square" lIns="0" rIns="0" tIns="0" bIns="0" anchor="ctr">
+            <a:spAutoFit/>
+          </a:bodyPr>
+          <a:lstStyle/>
+          <a:p>
+            <a:pPr algn="l">
+              <a:spcAft>
+                <a:spcPts val="200"/>
+              </a:spcAft>
+              <a:defRPr sz="1100" b="0">
+                <a:solidFill>
+                  <a:srgbClr val="667D88"/>
+                </a:solidFill>
+                <a:latin typeface="Aptos"/>
+              </a:defRPr>
+            </a:pPr>
+            <a:r>
+              <a:t>Age · BMI · HbA1c</a:t>
+            </a:r>
+          </a:p>
+        </p:txBody>
+      </p:sp>
+      <p:sp>
+        <p:nvSpPr>
+          <p:cNvPr id="13" name="Rounded Rectangle 12"/>
+          <p:cNvSpPr/>
+          <p:nvPr/>
+        </p:nvSpPr>
+        <p:spPr>
+          <a:xfrm>
+            <a:off x="2843784" y="2286000"/>
+            <a:ext cx="2075688" cy="1005840"/>
+          </a:xfrm>
+          <a:prstGeom prst="roundRect">
+            <a:avLst>
+              <a:gd name="adj" fmla="val 15000"/>
+            </a:avLst>
+          </a:prstGeom>
+          <a:solidFill>
+            <a:srgbClr val="FFFFFF"/>
+          </a:solidFill>
+          <a:ln w="12700">
+            <a:solidFill>
+              <a:srgbClr val="D9E4E6"/>
+            </a:solidFill>
+          </a:ln>
+        </p:spPr>
+        <p:style>
+          <a:lnRef idx="1">
+            <a:schemeClr val="accent1"/>
+          </a:lnRef>
+          <a:fillRef idx="3">
+            <a:schemeClr val="accent1"/>
+          </a:fillRef>
+          <a:effectRef idx="2">
+            <a:schemeClr val="accent1"/>
+          </a:effectRef>
+          <a:fontRef idx="minor">
+            <a:schemeClr val="lt1"/>
+          </a:fontRef>
+        </p:style>
+        <p:txBody>
+          <a:bodyPr rtlCol="0" anchor="ctr"/>
+          <a:lstStyle/>
+          <a:p>
+            <a:pPr algn="ctr"/>
+          </a:p>
+        </p:txBody>
+      </p:sp>
+      <p:sp>
+        <p:nvSpPr>
+          <p:cNvPr id="14" name="TextBox 13"/>
+          <p:cNvSpPr txBox="1"/>
+          <p:nvPr/>
+        </p:nvSpPr>
+        <p:spPr>
+          <a:xfrm>
+            <a:off x="2980944" y="2459736"/>
+            <a:ext cx="1810512" cy="320040"/>
+          </a:xfrm>
+          <a:prstGeom prst="rect">
+            <a:avLst/>
+          </a:prstGeom>
+          <a:noFill/>
+        </p:spPr>
+        <p:txBody>
+          <a:bodyPr wrap="square" lIns="0" rIns="0" tIns="0" bIns="0" anchor="ctr">
+            <a:spAutoFit/>
+          </a:bodyPr>
+          <a:lstStyle/>
+          <a:p>
+            <a:pPr algn="l">
+              <a:spcAft>
+                <a:spcPts val="200"/>
+              </a:spcAft>
+              <a:defRPr sz="1500" b="1">
+                <a:solidFill>
+                  <a:srgbClr val="172F3B"/>
+                </a:solidFill>
+                <a:latin typeface="Aptos"/>
+              </a:defRPr>
+            </a:pPr>
+            <a:r>
+              <a:t>CGM observations</a:t>
+            </a:r>
+          </a:p>
+        </p:txBody>
+      </p:sp>
+      <p:sp>
+        <p:nvSpPr>
+          <p:cNvPr id="15" name="TextBox 14"/>
+          <p:cNvSpPr txBox="1"/>
+          <p:nvPr/>
+        </p:nvSpPr>
+        <p:spPr>
+          <a:xfrm>
+            <a:off x="2980944" y="2834640"/>
+            <a:ext cx="1828800" cy="210312"/>
+          </a:xfrm>
+          <a:prstGeom prst="rect">
+            <a:avLst/>
+          </a:prstGeom>
+          <a:noFill/>
+        </p:spPr>
+        <p:txBody>
+          <a:bodyPr wrap="square" lIns="0" rIns="0" tIns="0" bIns="0" anchor="ctr">
+            <a:spAutoFit/>
+          </a:bodyPr>
+          <a:lstStyle/>
+          <a:p>
+            <a:pPr algn="l">
+              <a:spcAft>
+                <a:spcPts val="200"/>
+              </a:spcAft>
+              <a:defRPr sz="1100" b="0">
+                <a:solidFill>
+                  <a:srgbClr val="667D88"/>
+                </a:solidFill>
+                <a:latin typeface="Aptos"/>
+              </a:defRPr>
+            </a:pPr>
+            <a:r>
+              <a:t>Value · timestamp</a:t>
+            </a:r>
+          </a:p>
+        </p:txBody>
+      </p:sp>
+      <p:sp>
+        <p:nvSpPr>
+          <p:cNvPr id="16" name="Rounded Rectangle 15"/>
+          <p:cNvSpPr/>
+          <p:nvPr/>
+        </p:nvSpPr>
+        <p:spPr>
+          <a:xfrm>
+            <a:off x="5093208" y="2286000"/>
+            <a:ext cx="2075688" cy="1005840"/>
+          </a:xfrm>
+          <a:prstGeom prst="roundRect">
+            <a:avLst>
+              <a:gd name="adj" fmla="val 15000"/>
+            </a:avLst>
+          </a:prstGeom>
+          <a:solidFill>
+            <a:srgbClr val="FFFFFF"/>
+          </a:solidFill>
+          <a:ln w="12700">
+            <a:solidFill>
+              <a:srgbClr val="D9E4E6"/>
+            </a:solidFill>
+          </a:ln>
+        </p:spPr>
+        <p:style>
+          <a:lnRef idx="1">
+            <a:schemeClr val="accent1"/>
+          </a:lnRef>
+          <a:fillRef idx="3">
+            <a:schemeClr val="accent1"/>
+          </a:fillRef>
+          <a:effectRef idx="2">
+            <a:schemeClr val="accent1"/>
+          </a:effectRef>
+          <a:fontRef idx="minor">
+            <a:schemeClr val="lt1"/>
+          </a:fontRef>
+        </p:style>
+        <p:txBody>
+          <a:bodyPr rtlCol="0" anchor="ctr"/>
+          <a:lstStyle/>
+          <a:p>
+            <a:pPr algn="ctr"/>
+          </a:p>
+        </p:txBody>
+      </p:sp>
+      <p:sp>
+        <p:nvSpPr>
+          <p:cNvPr id="17" name="TextBox 16"/>
+          <p:cNvSpPr txBox="1"/>
+          <p:nvPr/>
+        </p:nvSpPr>
+        <p:spPr>
+          <a:xfrm>
+            <a:off x="5230368" y="2459736"/>
+            <a:ext cx="1810512" cy="320040"/>
+          </a:xfrm>
+          <a:prstGeom prst="rect">
+            <a:avLst/>
+          </a:prstGeom>
+          <a:noFill/>
+        </p:spPr>
+        <p:txBody>
+          <a:bodyPr wrap="square" lIns="0" rIns="0" tIns="0" bIns="0" anchor="ctr">
+            <a:spAutoFit/>
+          </a:bodyPr>
+          <a:lstStyle/>
+          <a:p>
+            <a:pPr algn="l">
+              <a:spcAft>
+                <a:spcPts val="200"/>
+              </a:spcAft>
+              <a:defRPr sz="1500" b="1">
+                <a:solidFill>
+                  <a:srgbClr val="172F3B"/>
+                </a:solidFill>
+                <a:latin typeface="Aptos"/>
+              </a:defRPr>
+            </a:pPr>
+            <a:r>
+              <a:t>Meal + activity</a:t>
+            </a:r>
+          </a:p>
+        </p:txBody>
+      </p:sp>
+      <p:sp>
+        <p:nvSpPr>
+          <p:cNvPr id="18" name="TextBox 17"/>
+          <p:cNvSpPr txBox="1"/>
+          <p:nvPr/>
+        </p:nvSpPr>
+        <p:spPr>
+          <a:xfrm>
+            <a:off x="5230368" y="2834640"/>
+            <a:ext cx="1828800" cy="210312"/>
+          </a:xfrm>
+          <a:prstGeom prst="rect">
+            <a:avLst/>
+          </a:prstGeom>
+          <a:noFill/>
+        </p:spPr>
+        <p:txBody>
+          <a:bodyPr wrap="square" lIns="0" rIns="0" tIns="0" bIns="0" anchor="ctr">
+            <a:spAutoFit/>
+          </a:bodyPr>
+          <a:lstStyle/>
+          <a:p>
+            <a:pPr algn="l">
+              <a:spcAft>
+                <a:spcPts val="200"/>
+              </a:spcAft>
+              <a:defRPr sz="1100" b="0">
+                <a:solidFill>
+                  <a:srgbClr val="667D88"/>
+                </a:solidFill>
+                <a:latin typeface="Aptos"/>
+              </a:defRPr>
+            </a:pPr>
+            <a:r>
+              <a:t>Carbs · movement</a:t>
+            </a:r>
+          </a:p>
+        </p:txBody>
+      </p:sp>
+      <p:sp>
+        <p:nvSpPr>
+          <p:cNvPr id="19" name="Rounded Rectangle 18"/>
+          <p:cNvSpPr/>
+          <p:nvPr/>
+        </p:nvSpPr>
+        <p:spPr>
+          <a:xfrm>
+            <a:off x="1591056" y="3703320"/>
+            <a:ext cx="3703320" cy="932688"/>
+          </a:xfrm>
+          <a:prstGeom prst="roundRect">
+            <a:avLst>
+              <a:gd name="adj" fmla="val 15000"/>
+            </a:avLst>
+          </a:prstGeom>
+          <a:solidFill>
+            <a:srgbClr val="E6F1EF"/>
+          </a:solidFill>
+          <a:ln>
+            <a:noFill/>
+          </a:ln>
+        </p:spPr>
+        <p:style>
+          <a:lnRef idx="1">
+            <a:schemeClr val="accent1"/>
+          </a:lnRef>
+          <a:fillRef idx="3">
+            <a:schemeClr val="accent1"/>
+          </a:fillRef>
+          <a:effectRef idx="2">
+            <a:schemeClr val="accent1"/>
+          </a:effectRef>
+          <a:fontRef idx="minor">
+            <a:schemeClr val="lt1"/>
+          </a:fontRef>
+        </p:style>
+        <p:txBody>
+          <a:bodyPr rtlCol="0" anchor="ctr"/>
+          <a:lstStyle/>
+          <a:p>
+            <a:pPr algn="ctr"/>
+          </a:p>
+        </p:txBody>
+      </p:sp>
+      <p:sp>
+        <p:nvSpPr>
+          <p:cNvPr id="20" name="TextBox 19"/>
+          <p:cNvSpPr txBox="1"/>
+          <p:nvPr/>
+        </p:nvSpPr>
+        <p:spPr>
+          <a:xfrm>
+            <a:off x="1792224" y="3895344"/>
+            <a:ext cx="3337560" cy="283464"/>
+          </a:xfrm>
+          <a:prstGeom prst="rect">
+            <a:avLst/>
+          </a:prstGeom>
+          <a:noFill/>
+        </p:spPr>
+        <p:txBody>
+          <a:bodyPr wrap="square" lIns="0" rIns="0" tIns="0" bIns="0" anchor="ctr">
+            <a:spAutoFit/>
+          </a:bodyPr>
+          <a:lstStyle/>
+          <a:p>
+            <a:pPr algn="l">
+              <a:spcAft>
+                <a:spcPts val="200"/>
+              </a:spcAft>
+              <a:defRPr sz="1800" b="1">
+                <a:solidFill>
+                  <a:srgbClr val="172F3B"/>
+                </a:solidFill>
+                <a:latin typeface="Aptos"/>
+              </a:defRPr>
+            </a:pPr>
+            <a:r>
+              <a:t>Versioned patient state</a:t>
+            </a:r>
+          </a:p>
+        </p:txBody>
+      </p:sp>
+      <p:sp>
+        <p:nvSpPr>
+          <p:cNvPr id="21" name="TextBox 20"/>
+          <p:cNvSpPr txBox="1"/>
+          <p:nvPr/>
+        </p:nvSpPr>
+        <p:spPr>
+          <a:xfrm>
+            <a:off x="1792224" y="4261104"/>
+            <a:ext cx="3337560" cy="228600"/>
+          </a:xfrm>
+          <a:prstGeom prst="rect">
+            <a:avLst/>
+          </a:prstGeom>
+          <a:noFill/>
+        </p:spPr>
+        <p:txBody>
+          <a:bodyPr wrap="square" lIns="0" rIns="0" tIns="0" bIns="0" anchor="ctr">
+            <a:spAutoFit/>
+          </a:bodyPr>
+          <a:lstStyle/>
+          <a:p>
+            <a:pPr algn="l">
+              <a:spcAft>
+                <a:spcPts val="200"/>
+              </a:spcAft>
+              <a:defRPr sz="1100" b="0">
+                <a:solidFill>
+                  <a:srgbClr val="667D88"/>
+                </a:solidFill>
+                <a:latin typeface="Aptos"/>
+              </a:defRPr>
+            </a:pPr>
+            <a:r>
+              <a:t>Timestamp alignment + replay history</a:t>
+            </a:r>
+          </a:p>
+        </p:txBody>
+      </p:sp>
+      <p:cxnSp>
+        <p:nvCxnSpPr>
+          <p:cNvPr id="22" name="Connector 21"/>
+          <p:cNvCxnSpPr/>
+          <p:nvPr/>
+        </p:nvCxnSpPr>
+        <p:spPr>
+          <a:xfrm>
+            <a:off x="1618488" y="3300984"/>
+            <a:ext cx="0" cy="182880"/>
+          </a:xfrm>
+          <a:prstGeom prst="line">
+            <a:avLst/>
+          </a:prstGeom>
+          <a:ln w="20320">
+            <a:solidFill>
+              <a:srgbClr val="167E78"/>
+            </a:solidFill>
+          </a:ln>
+        </p:spPr>
+        <p:style>
+          <a:lnRef idx="2">
+            <a:schemeClr val="accent1"/>
+          </a:lnRef>
+          <a:fillRef idx="0">
+            <a:schemeClr val="accent1"/>
+          </a:fillRef>
+          <a:effectRef idx="1">
+            <a:schemeClr val="accent1"/>
+          </a:effectRef>
+          <a:fontRef idx="minor">
+            <a:schemeClr val="tx1"/>
+          </a:fontRef>
+        </p:style>
+      </p:cxnSp>
+      <p:cxnSp>
+        <p:nvCxnSpPr>
+          <p:cNvPr id="23" name="Connector 22"/>
+          <p:cNvCxnSpPr/>
+          <p:nvPr/>
+        </p:nvCxnSpPr>
+        <p:spPr>
+          <a:xfrm>
+            <a:off x="3867912" y="3300984"/>
+            <a:ext cx="0" cy="182880"/>
+          </a:xfrm>
+          <a:prstGeom prst="line">
+            <a:avLst/>
+          </a:prstGeom>
+          <a:ln w="20320">
+            <a:solidFill>
+              <a:srgbClr val="167E78"/>
+            </a:solidFill>
+          </a:ln>
+        </p:spPr>
+        <p:style>
+          <a:lnRef idx="2">
+            <a:schemeClr val="accent1"/>
+          </a:lnRef>
+          <a:fillRef idx="0">
+            <a:schemeClr val="accent1"/>
+          </a:fillRef>
+          <a:effectRef idx="1">
+            <a:schemeClr val="accent1"/>
+          </a:effectRef>
+          <a:fontRef idx="minor">
+            <a:schemeClr val="tx1"/>
+          </a:fontRef>
+        </p:style>
+      </p:cxnSp>
+      <p:cxnSp>
+        <p:nvCxnSpPr>
+          <p:cNvPr id="24" name="Connector 23"/>
+          <p:cNvCxnSpPr/>
+          <p:nvPr/>
+        </p:nvCxnSpPr>
+        <p:spPr>
+          <a:xfrm>
+            <a:off x="6108192" y="3300984"/>
+            <a:ext cx="0" cy="182880"/>
+          </a:xfrm>
+          <a:prstGeom prst="line">
+            <a:avLst/>
+          </a:prstGeom>
+          <a:ln w="20320">
+            <a:solidFill>
+              <a:srgbClr val="167E78"/>
+            </a:solidFill>
+          </a:ln>
+        </p:spPr>
+        <p:style>
+          <a:lnRef idx="2">
+            <a:schemeClr val="accent1"/>
+          </a:lnRef>
+          <a:fillRef idx="0">
+            <a:schemeClr val="accent1"/>
+          </a:fillRef>
+          <a:effectRef idx="1">
+            <a:schemeClr val="accent1"/>
+          </a:effectRef>
+          <a:fontRef idx="minor">
+            <a:schemeClr val="tx1"/>
+          </a:fontRef>
+        </p:style>
+      </p:cxnSp>
+      <p:cxnSp>
+        <p:nvCxnSpPr>
+          <p:cNvPr id="25" name="Connector 24"/>
+          <p:cNvCxnSpPr/>
+          <p:nvPr/>
+        </p:nvCxnSpPr>
+        <p:spPr>
+          <a:xfrm>
+            <a:off x="1618488" y="3483864"/>
+            <a:ext cx="2249424" cy="0"/>
+          </a:xfrm>
+          <a:prstGeom prst="line">
+            <a:avLst/>
+          </a:prstGeom>
+          <a:ln w="17780">
+            <a:solidFill>
+              <a:srgbClr val="167E78"/>
+            </a:solidFill>
+          </a:ln>
+        </p:spPr>
+        <p:style>
+          <a:lnRef idx="2">
+            <a:schemeClr val="accent1"/>
+          </a:lnRef>
+          <a:fillRef idx="0">
+            <a:schemeClr val="accent1"/>
+          </a:fillRef>
+          <a:effectRef idx="1">
+            <a:schemeClr val="accent1"/>
+          </a:effectRef>
+          <a:fontRef idx="minor">
+            <a:schemeClr val="tx1"/>
+          </a:fontRef>
+        </p:style>
+      </p:cxnSp>
+      <p:cxnSp>
+        <p:nvCxnSpPr>
+          <p:cNvPr id="26" name="Connector 25"/>
+          <p:cNvCxnSpPr/>
+          <p:nvPr/>
+        </p:nvCxnSpPr>
+        <p:spPr>
+          <a:xfrm>
+            <a:off x="3867912" y="3483864"/>
+            <a:ext cx="0" cy="219456"/>
+          </a:xfrm>
+          <a:prstGeom prst="line">
+            <a:avLst/>
+          </a:prstGeom>
+          <a:ln w="17780">
+            <a:solidFill>
+              <a:srgbClr val="167E78"/>
+            </a:solidFill>
+          </a:ln>
+        </p:spPr>
+        <p:style>
+          <a:lnRef idx="2">
+            <a:schemeClr val="accent1"/>
+          </a:lnRef>
+          <a:fillRef idx="0">
+            <a:schemeClr val="accent1"/>
+          </a:fillRef>
+          <a:effectRef idx="1">
+            <a:schemeClr val="accent1"/>
+          </a:effectRef>
+          <a:fontRef idx="minor">
+            <a:schemeClr val="tx1"/>
+          </a:fontRef>
+        </p:style>
+      </p:cxnSp>
+      <p:cxnSp>
+        <p:nvCxnSpPr>
+          <p:cNvPr id="27" name="Connector 26"/>
+          <p:cNvCxnSpPr/>
+          <p:nvPr/>
+        </p:nvCxnSpPr>
+        <p:spPr>
+          <a:xfrm>
+            <a:off x="5294376" y="4178808"/>
+            <a:ext cx="603504" cy="0"/>
+          </a:xfrm>
+          <a:prstGeom prst="line">
+            <a:avLst/>
+          </a:prstGeom>
+          <a:ln w="25400">
+            <a:solidFill>
+              <a:srgbClr val="167E78"/>
+            </a:solidFill>
+          </a:ln>
+        </p:spPr>
+        <p:style>
+          <a:lnRef idx="2">
+            <a:schemeClr val="accent1"/>
+          </a:lnRef>
+          <a:fillRef idx="0">
+            <a:schemeClr val="accent1"/>
+          </a:fillRef>
+          <a:effectRef idx="1">
+            <a:schemeClr val="accent1"/>
+          </a:effectRef>
+          <a:fontRef idx="minor">
+            <a:schemeClr val="tx1"/>
+          </a:fontRef>
+        </p:style>
+      </p:cxnSp>
+      <p:sp>
+        <p:nvSpPr>
+          <p:cNvPr id="28" name="Rounded Rectangle 27"/>
+          <p:cNvSpPr/>
+          <p:nvPr/>
+        </p:nvSpPr>
+        <p:spPr>
+          <a:xfrm>
+            <a:off x="5897880" y="3675887"/>
+            <a:ext cx="2221992" cy="1005840"/>
+          </a:xfrm>
+          <a:prstGeom prst="roundRect">
+            <a:avLst>
+              <a:gd name="adj" fmla="val 15000"/>
+            </a:avLst>
+          </a:prstGeom>
+          <a:solidFill>
+            <a:srgbClr val="E8F2F1"/>
+          </a:solidFill>
+          <a:ln w="12700">
+            <a:solidFill>
+              <a:srgbClr val="167E78"/>
+            </a:solidFill>
+          </a:ln>
+        </p:spPr>
+        <p:style>
+          <a:lnRef idx="1">
+            <a:schemeClr val="accent1"/>
+          </a:lnRef>
+          <a:fillRef idx="3">
+            <a:schemeClr val="accent1"/>
+          </a:fillRef>
+          <a:effectRef idx="2">
+            <a:schemeClr val="accent1"/>
+          </a:effectRef>
+          <a:fontRef idx="minor">
+            <a:schemeClr val="lt1"/>
+          </a:fontRef>
+        </p:style>
+        <p:txBody>
+          <a:bodyPr rtlCol="0" anchor="ctr"/>
+          <a:lstStyle/>
+          <a:p>
+            <a:pPr algn="ctr"/>
+          </a:p>
+        </p:txBody>
+      </p:sp>
+      <p:sp>
+        <p:nvSpPr>
+          <p:cNvPr id="29" name="TextBox 28"/>
+          <p:cNvSpPr txBox="1"/>
+          <p:nvPr/>
+        </p:nvSpPr>
+        <p:spPr>
+          <a:xfrm>
+            <a:off x="6080760" y="3822191"/>
+            <a:ext cx="1828800" cy="256032"/>
+          </a:xfrm>
+          <a:prstGeom prst="rect">
+            <a:avLst/>
+          </a:prstGeom>
+          <a:noFill/>
+        </p:spPr>
+        <p:txBody>
+          <a:bodyPr wrap="square" lIns="0" rIns="0" tIns="0" bIns="0" anchor="ctr">
+            <a:spAutoFit/>
+          </a:bodyPr>
+          <a:lstStyle/>
+          <a:p>
+            <a:pPr algn="l">
+              <a:spcAft>
+                <a:spcPts val="200"/>
+              </a:spcAft>
+              <a:defRPr sz="1100" b="1">
+                <a:solidFill>
+                  <a:srgbClr val="167E78"/>
+                </a:solidFill>
+                <a:latin typeface="Aptos"/>
+              </a:defRPr>
+            </a:pPr>
+            <a:r>
+              <a:t>DATA QUALITY</a:t>
+            </a:r>
+          </a:p>
+        </p:txBody>
+      </p:sp>
+      <p:sp>
+        <p:nvSpPr>
+          <p:cNvPr id="30" name="TextBox 29"/>
+          <p:cNvSpPr txBox="1"/>
+          <p:nvPr/>
+        </p:nvSpPr>
+        <p:spPr>
+          <a:xfrm>
+            <a:off x="6080760" y="4151376"/>
+            <a:ext cx="1883664" cy="310896"/>
+          </a:xfrm>
+          <a:prstGeom prst="rect">
+            <a:avLst/>
+          </a:prstGeom>
+          <a:noFill/>
+        </p:spPr>
+        <p:txBody>
+          <a:bodyPr wrap="square" lIns="0" rIns="0" tIns="0" bIns="0" anchor="ctr">
+            <a:spAutoFit/>
+          </a:bodyPr>
+          <a:lstStyle/>
+          <a:p>
+            <a:pPr algn="l">
+              <a:spcAft>
+                <a:spcPts val="200"/>
+              </a:spcAft>
+              <a:defRPr sz="1700" b="1">
+                <a:solidFill>
+                  <a:srgbClr val="172F3B"/>
+                </a:solidFill>
+                <a:latin typeface="Aptos"/>
+              </a:defRPr>
+            </a:pPr>
+            <a:r>
+              <a:t>Fresh enough?</a:t>
+            </a:r>
+          </a:p>
+        </p:txBody>
+      </p:sp>
+      <p:cxnSp>
+        <p:nvCxnSpPr>
+          <p:cNvPr id="31" name="Connector 30"/>
+          <p:cNvCxnSpPr/>
+          <p:nvPr/>
+        </p:nvCxnSpPr>
+        <p:spPr>
+          <a:xfrm flipV="1">
+            <a:off x="8129016" y="2980944"/>
+            <a:ext cx="493776" cy="978408"/>
+          </a:xfrm>
+          <a:prstGeom prst="line">
+            <a:avLst/>
+          </a:prstGeom>
+          <a:ln w="25400">
+            <a:solidFill>
+              <a:srgbClr val="167E78"/>
+            </a:solidFill>
+          </a:ln>
+        </p:spPr>
+        <p:style>
+          <a:lnRef idx="2">
+            <a:schemeClr val="accent1"/>
+          </a:lnRef>
+          <a:fillRef idx="0">
+            <a:schemeClr val="accent1"/>
+          </a:fillRef>
+          <a:effectRef idx="1">
+            <a:schemeClr val="accent1"/>
+          </a:effectRef>
+          <a:fontRef idx="minor">
+            <a:schemeClr val="tx1"/>
+          </a:fontRef>
+        </p:style>
+      </p:cxnSp>
+      <p:cxnSp>
+        <p:nvCxnSpPr>
+          <p:cNvPr id="32" name="Connector 31"/>
+          <p:cNvCxnSpPr/>
+          <p:nvPr/>
+        </p:nvCxnSpPr>
+        <p:spPr>
+          <a:xfrm>
+            <a:off x="8129016" y="4398264"/>
+            <a:ext cx="493776" cy="740664"/>
+          </a:xfrm>
+          <a:prstGeom prst="line">
+            <a:avLst/>
+          </a:prstGeom>
+          <a:ln w="25400">
+            <a:solidFill>
+              <a:srgbClr val="B46F4B"/>
+            </a:solidFill>
+          </a:ln>
+        </p:spPr>
+        <p:style>
+          <a:lnRef idx="2">
+            <a:schemeClr val="accent1"/>
+          </a:lnRef>
+          <a:fillRef idx="0">
+            <a:schemeClr val="accent1"/>
+          </a:fillRef>
+          <a:effectRef idx="1">
+            <a:schemeClr val="accent1"/>
+          </a:effectRef>
+          <a:fontRef idx="minor">
+            <a:schemeClr val="tx1"/>
+          </a:fontRef>
+        </p:style>
+      </p:cxnSp>
+      <p:sp>
+        <p:nvSpPr>
+          <p:cNvPr id="33" name="Rounded Rectangle 32"/>
+          <p:cNvSpPr/>
+          <p:nvPr/>
+        </p:nvSpPr>
+        <p:spPr>
+          <a:xfrm>
+            <a:off x="8631936" y="2523744"/>
+            <a:ext cx="2816352" cy="987552"/>
+          </a:xfrm>
+          <a:prstGeom prst="roundRect">
+            <a:avLst>
+              <a:gd name="adj" fmla="val 15000"/>
+            </a:avLst>
+          </a:prstGeom>
+          <a:solidFill>
+            <a:srgbClr val="E4F1EC"/>
+          </a:solidFill>
+          <a:ln>
+            <a:noFill/>
+          </a:ln>
+        </p:spPr>
+        <p:style>
+          <a:lnRef idx="1">
+            <a:schemeClr val="accent1"/>
+          </a:lnRef>
+          <a:fillRef idx="3">
+            <a:schemeClr val="accent1"/>
+          </a:fillRef>
+          <a:effectRef idx="2">
+            <a:schemeClr val="accent1"/>
+          </a:effectRef>
+          <a:fontRef idx="minor">
+            <a:schemeClr val="lt1"/>
+          </a:fontRef>
+        </p:style>
+        <p:txBody>
+          <a:bodyPr rtlCol="0" anchor="ctr"/>
+          <a:lstStyle/>
+          <a:p>
+            <a:pPr algn="ctr"/>
+          </a:p>
+        </p:txBody>
+      </p:sp>
+      <p:sp>
+        <p:nvSpPr>
+          <p:cNvPr id="34" name="TextBox 33"/>
+          <p:cNvSpPr txBox="1"/>
+          <p:nvPr/>
+        </p:nvSpPr>
+        <p:spPr>
+          <a:xfrm>
+            <a:off x="8796528" y="2651760"/>
+            <a:ext cx="2560320" cy="219456"/>
+          </a:xfrm>
+          <a:prstGeom prst="rect">
+            <a:avLst/>
+          </a:prstGeom>
+          <a:noFill/>
+        </p:spPr>
+        <p:txBody>
+          <a:bodyPr wrap="square" lIns="0" rIns="0" tIns="0" bIns="0" anchor="ctr">
+            <a:spAutoFit/>
+          </a:bodyPr>
+          <a:lstStyle/>
+          <a:p>
+            <a:pPr algn="l">
+              <a:spcAft>
+                <a:spcPts val="200"/>
+              </a:spcAft>
+              <a:defRPr sz="1100" b="1">
+                <a:solidFill>
+                  <a:srgbClr val="167E78"/>
+                </a:solidFill>
+                <a:latin typeface="Aptos"/>
+              </a:defRPr>
+            </a:pPr>
+            <a:r>
+              <a:t>VALID / SUPPORTED</a:t>
+            </a:r>
+          </a:p>
+        </p:txBody>
+      </p:sp>
+      <p:sp>
+        <p:nvSpPr>
+          <p:cNvPr id="35" name="TextBox 34"/>
+          <p:cNvSpPr txBox="1"/>
+          <p:nvPr/>
+        </p:nvSpPr>
+        <p:spPr>
+          <a:xfrm>
+            <a:off x="8796528" y="2953512"/>
+            <a:ext cx="2560320" cy="283464"/>
+          </a:xfrm>
+          <a:prstGeom prst="rect">
+            <a:avLst/>
+          </a:prstGeom>
+          <a:noFill/>
+        </p:spPr>
+        <p:txBody>
+          <a:bodyPr wrap="square" lIns="0" rIns="0" tIns="0" bIns="0" anchor="ctr">
+            <a:spAutoFit/>
+          </a:bodyPr>
+          <a:lstStyle/>
+          <a:p>
+            <a:pPr algn="l">
+              <a:spcAft>
+                <a:spcPts val="200"/>
+              </a:spcAft>
+              <a:defRPr sz="1700" b="1">
+                <a:solidFill>
+                  <a:srgbClr val="172F3B"/>
+                </a:solidFill>
+                <a:latin typeface="Aptos"/>
+              </a:defRPr>
+            </a:pPr>
+            <a:r>
+              <a:t>30 / 60 / 120 min</a:t>
+            </a:r>
+          </a:p>
+        </p:txBody>
+      </p:sp>
+      <p:sp>
+        <p:nvSpPr>
+          <p:cNvPr id="36" name="Rounded Rectangle 35"/>
+          <p:cNvSpPr/>
+          <p:nvPr/>
+        </p:nvSpPr>
+        <p:spPr>
+          <a:xfrm>
+            <a:off x="8631936" y="4690872"/>
+            <a:ext cx="2816352" cy="987552"/>
+          </a:xfrm>
+          <a:prstGeom prst="roundRect">
+            <a:avLst>
+              <a:gd name="adj" fmla="val 15000"/>
+            </a:avLst>
+          </a:prstGeom>
+          <a:solidFill>
+            <a:srgbClr val="F6EAE3"/>
+          </a:solidFill>
+          <a:ln>
+            <a:noFill/>
+          </a:ln>
+        </p:spPr>
+        <p:style>
+          <a:lnRef idx="1">
+            <a:schemeClr val="accent1"/>
+          </a:lnRef>
+          <a:fillRef idx="3">
+            <a:schemeClr val="accent1"/>
+          </a:fillRef>
+          <a:effectRef idx="2">
+            <a:schemeClr val="accent1"/>
+          </a:effectRef>
+          <a:fontRef idx="minor">
+            <a:schemeClr val="lt1"/>
+          </a:fontRef>
+        </p:style>
+        <p:txBody>
+          <a:bodyPr rtlCol="0" anchor="ctr"/>
+          <a:lstStyle/>
+          <a:p>
+            <a:pPr algn="ctr"/>
+          </a:p>
+        </p:txBody>
+      </p:sp>
+      <p:sp>
+        <p:nvSpPr>
+          <p:cNvPr id="37" name="TextBox 36"/>
+          <p:cNvSpPr txBox="1"/>
+          <p:nvPr/>
+        </p:nvSpPr>
+        <p:spPr>
+          <a:xfrm>
+            <a:off x="8796528" y="4809744"/>
+            <a:ext cx="2560320" cy="228600"/>
+          </a:xfrm>
+          <a:prstGeom prst="rect">
+            <a:avLst/>
+          </a:prstGeom>
+          <a:noFill/>
+        </p:spPr>
+        <p:txBody>
+          <a:bodyPr wrap="square" lIns="0" rIns="0" tIns="0" bIns="0" anchor="ctr">
+            <a:spAutoFit/>
+          </a:bodyPr>
+          <a:lstStyle/>
+          <a:p>
+            <a:pPr algn="l">
+              <a:spcAft>
+                <a:spcPts val="200"/>
+              </a:spcAft>
+              <a:defRPr sz="1100" b="1">
+                <a:solidFill>
+                  <a:srgbClr val="B46F4B"/>
+                </a:solidFill>
+                <a:latin typeface="Aptos"/>
+              </a:defRPr>
+            </a:pPr>
+            <a:r>
+              <a:t>SENSOR TOO STALE</a:t>
+            </a:r>
+          </a:p>
+        </p:txBody>
+      </p:sp>
+      <p:sp>
+        <p:nvSpPr>
+          <p:cNvPr id="38" name="TextBox 37"/>
+          <p:cNvSpPr txBox="1"/>
+          <p:nvPr/>
+        </p:nvSpPr>
+        <p:spPr>
+          <a:xfrm>
+            <a:off x="8796528" y="5102352"/>
+            <a:ext cx="2551176" cy="301752"/>
+          </a:xfrm>
+          <a:prstGeom prst="rect">
+            <a:avLst/>
+          </a:prstGeom>
+          <a:noFill/>
+        </p:spPr>
+        <p:txBody>
+          <a:bodyPr wrap="square" lIns="0" rIns="0" tIns="0" bIns="0" anchor="ctr">
+            <a:spAutoFit/>
+          </a:bodyPr>
+          <a:lstStyle/>
+          <a:p>
+            <a:pPr algn="l">
+              <a:spcAft>
+                <a:spcPts val="200"/>
+              </a:spcAft>
+              <a:defRPr sz="1500" b="1">
+                <a:solidFill>
+                  <a:srgbClr val="172F3B"/>
+                </a:solidFill>
+                <a:latin typeface="Aptos"/>
+              </a:defRPr>
+            </a:pPr>
+            <a:r>
+              <a:t>Withhold forecast + risk</a:t>
+            </a:r>
+          </a:p>
+        </p:txBody>
+      </p:sp>
+      <p:cxnSp>
+        <p:nvCxnSpPr>
+          <p:cNvPr id="39" name="Connector 38"/>
+          <p:cNvCxnSpPr/>
+          <p:nvPr/>
+        </p:nvCxnSpPr>
+        <p:spPr>
+          <a:xfrm flipH="1">
+            <a:off x="2185416" y="5907024"/>
+            <a:ext cx="6409944" cy="0"/>
+          </a:xfrm>
+          <a:prstGeom prst="line">
+            <a:avLst/>
+          </a:prstGeom>
+          <a:ln w="12700">
+            <a:solidFill>
+              <a:srgbClr val="A6BCC2"/>
+            </a:solidFill>
+          </a:ln>
+        </p:spPr>
+        <p:style>
+          <a:lnRef idx="2">
+            <a:schemeClr val="accent1"/>
+          </a:lnRef>
+          <a:fillRef idx="0">
+            <a:schemeClr val="accent1"/>
+          </a:fillRef>
+          <a:effectRef idx="1">
+            <a:schemeClr val="accent1"/>
+          </a:effectRef>
+          <a:fontRef idx="minor">
+            <a:schemeClr val="tx1"/>
+          </a:fontRef>
+        </p:style>
+      </p:cxnSp>
+      <p:cxnSp>
+        <p:nvCxnSpPr>
+          <p:cNvPr id="40" name="Connector 39"/>
+          <p:cNvCxnSpPr/>
+          <p:nvPr/>
+        </p:nvCxnSpPr>
+        <p:spPr>
+          <a:xfrm flipV="1">
+            <a:off x="2185416" y="4645152"/>
+            <a:ext cx="0" cy="1261872"/>
+          </a:xfrm>
+          <a:prstGeom prst="line">
+            <a:avLst/>
+          </a:prstGeom>
+          <a:ln w="12700">
+            <a:solidFill>
+              <a:srgbClr val="A6BCC2"/>
+            </a:solidFill>
+          </a:ln>
+        </p:spPr>
+        <p:style>
+          <a:lnRef idx="2">
+            <a:schemeClr val="accent1"/>
+          </a:lnRef>
+          <a:fillRef idx="0">
+            <a:schemeClr val="accent1"/>
+          </a:fillRef>
+          <a:effectRef idx="1">
+            <a:schemeClr val="accent1"/>
+          </a:effectRef>
+          <a:fontRef idx="minor">
+            <a:schemeClr val="tx1"/>
+          </a:fontRef>
+        </p:style>
+      </p:cxnSp>
+      <p:sp>
+        <p:nvSpPr>
+          <p:cNvPr id="41" name="TextBox 40"/>
+          <p:cNvSpPr txBox="1"/>
+          <p:nvPr/>
+        </p:nvSpPr>
+        <p:spPr>
+          <a:xfrm>
+            <a:off x="2505456" y="5669280"/>
+            <a:ext cx="5870448" cy="201168"/>
+          </a:xfrm>
+          <a:prstGeom prst="rect">
+            <a:avLst/>
+          </a:prstGeom>
+          <a:noFill/>
+        </p:spPr>
+        <p:txBody>
+          <a:bodyPr wrap="square" lIns="0" rIns="0" tIns="0" bIns="0" anchor="ctr">
+            <a:spAutoFit/>
+          </a:bodyPr>
+          <a:lstStyle/>
+          <a:p>
+            <a:pPr algn="l">
+              <a:spcAft>
+                <a:spcPts val="200"/>
+              </a:spcAft>
+              <a:defRPr sz="1100" b="0">
+                <a:solidFill>
+                  <a:srgbClr val="667D88"/>
+                </a:solidFill>
+                <a:latin typeface="Aptos"/>
+              </a:defRPr>
+            </a:pPr>
+            <a:r>
+              <a:t>Later valid observations are compared with earlier forecasts (synthetic verification)</a:t>
+            </a:r>
+          </a:p>
+        </p:txBody>
+      </p:sp>
+      <p:sp>
+        <p:nvSpPr>
+          <p:cNvPr id="42" name="TextBox 41"/>
+          <p:cNvSpPr txBox="1"/>
+          <p:nvPr/>
+        </p:nvSpPr>
+        <p:spPr>
+          <a:xfrm>
+            <a:off x="603504" y="6153912"/>
+            <a:ext cx="10241280" cy="219456"/>
+          </a:xfrm>
+          <a:prstGeom prst="rect">
+            <a:avLst/>
+          </a:prstGeom>
+          <a:noFill/>
+        </p:spPr>
+        <p:txBody>
+          <a:bodyPr wrap="square" lIns="0" rIns="0" tIns="0" bIns="0" anchor="ctr">
+            <a:spAutoFit/>
+          </a:bodyPr>
+          <a:lstStyle/>
+          <a:p>
+            <a:pPr algn="l">
+              <a:spcAft>
+                <a:spcPts val="200"/>
+              </a:spcAft>
+              <a:defRPr sz="1100" b="0">
+                <a:solidFill>
+                  <a:srgbClr val="667D88"/>
+                </a:solidFill>
+                <a:latin typeface="Aptos"/>
+              </a:defRPr>
+            </a:pPr>
+            <a:r>
+              <a:t>Python · FastAPI · HTML/CSS/JS  /  scikit-learn research pipeline is separate</a:t>
+            </a:r>
+          </a:p>
+        </p:txBody>
+      </p:sp>
     </p:spTree>
   </p:cSld>
   <p:clrMapOvr>
@@ -3219,30 +7111,1687 @@
         <p:nvPr/>
       </p:nvGrpSpPr>
       <p:grpSpPr/>
-      <p:pic>
-        <p:nvPicPr>
-          <p:cNvPr id="2" name="Picture 1" descr="image.png"/>
-          <p:cNvPicPr>
-            <a:picLocks noChangeAspect="1"/>
-          </p:cNvPicPr>
-          <p:nvPr/>
-        </p:nvPicPr>
-        <p:blipFill>
-          <a:blip r:embed="rId2"/>
-          <a:stretch>
-            <a:fillRect/>
-          </a:stretch>
-        </p:blipFill>
+      <p:sp>
+        <p:nvSpPr>
+          <p:cNvPr id="2" name="Rectangle 1"/>
+          <p:cNvSpPr/>
+          <p:nvPr/>
+        </p:nvSpPr>
         <p:spPr>
           <a:xfrm>
             <a:off x="0" y="0"/>
-            <a:ext cx="14630400" cy="8229600"/>
-          </a:xfrm>
-          <a:prstGeom prst="rect">
-            <a:avLst/>
-          </a:prstGeom>
-        </p:spPr>
-      </p:pic>
+            <a:ext cx="12191695" cy="6858000"/>
+          </a:xfrm>
+          <a:prstGeom prst="rect">
+            <a:avLst/>
+          </a:prstGeom>
+          <a:solidFill>
+            <a:srgbClr val="F5F8F7"/>
+          </a:solidFill>
+          <a:ln>
+            <a:noFill/>
+          </a:ln>
+        </p:spPr>
+        <p:style>
+          <a:lnRef idx="1">
+            <a:schemeClr val="accent1"/>
+          </a:lnRef>
+          <a:fillRef idx="3">
+            <a:schemeClr val="accent1"/>
+          </a:fillRef>
+          <a:effectRef idx="2">
+            <a:schemeClr val="accent1"/>
+          </a:effectRef>
+          <a:fontRef idx="minor">
+            <a:schemeClr val="lt1"/>
+          </a:fontRef>
+        </p:style>
+        <p:txBody>
+          <a:bodyPr rtlCol="0" anchor="ctr"/>
+          <a:lstStyle/>
+          <a:p>
+            <a:pPr algn="ctr"/>
+          </a:p>
+        </p:txBody>
+      </p:sp>
+      <p:sp>
+        <p:nvSpPr>
+          <p:cNvPr id="3" name="Rectangle 2"/>
+          <p:cNvSpPr/>
+          <p:nvPr/>
+        </p:nvSpPr>
+        <p:spPr>
+          <a:xfrm>
+            <a:off x="0" y="0"/>
+            <a:ext cx="82296" cy="6858000"/>
+          </a:xfrm>
+          <a:prstGeom prst="rect">
+            <a:avLst/>
+          </a:prstGeom>
+          <a:solidFill>
+            <a:srgbClr val="167E78"/>
+          </a:solidFill>
+          <a:ln>
+            <a:noFill/>
+          </a:ln>
+        </p:spPr>
+        <p:style>
+          <a:lnRef idx="1">
+            <a:schemeClr val="accent1"/>
+          </a:lnRef>
+          <a:fillRef idx="3">
+            <a:schemeClr val="accent1"/>
+          </a:fillRef>
+          <a:effectRef idx="2">
+            <a:schemeClr val="accent1"/>
+          </a:effectRef>
+          <a:fontRef idx="minor">
+            <a:schemeClr val="lt1"/>
+          </a:fontRef>
+        </p:style>
+        <p:txBody>
+          <a:bodyPr rtlCol="0" anchor="ctr"/>
+          <a:lstStyle/>
+          <a:p>
+            <a:pPr algn="ctr"/>
+          </a:p>
+        </p:txBody>
+      </p:sp>
+      <p:sp>
+        <p:nvSpPr>
+          <p:cNvPr id="4" name="TextBox 3"/>
+          <p:cNvSpPr txBox="1"/>
+          <p:nvPr/>
+        </p:nvSpPr>
+        <p:spPr>
+          <a:xfrm>
+            <a:off x="548640" y="310896"/>
+            <a:ext cx="9144000" cy="246888"/>
+          </a:xfrm>
+          <a:prstGeom prst="rect">
+            <a:avLst/>
+          </a:prstGeom>
+          <a:noFill/>
+        </p:spPr>
+        <p:txBody>
+          <a:bodyPr wrap="square" lIns="0" rIns="0" tIns="0" bIns="0" anchor="ctr">
+            <a:spAutoFit/>
+          </a:bodyPr>
+          <a:lstStyle/>
+          <a:p>
+            <a:pPr algn="l">
+              <a:spcAft>
+                <a:spcPts val="200"/>
+              </a:spcAft>
+              <a:defRPr sz="1000" b="1">
+                <a:solidFill>
+                  <a:srgbClr val="167E78"/>
+                </a:solidFill>
+                <a:latin typeface="Aptos"/>
+              </a:defRPr>
+            </a:pPr>
+            <a:r>
+              <a:t>03 / DEMONSTRATION</a:t>
+            </a:r>
+          </a:p>
+        </p:txBody>
+      </p:sp>
+      <p:sp>
+        <p:nvSpPr>
+          <p:cNvPr id="5" name="TextBox 4"/>
+          <p:cNvSpPr txBox="1"/>
+          <p:nvPr/>
+        </p:nvSpPr>
+        <p:spPr>
+          <a:xfrm>
+            <a:off x="548640" y="685800"/>
+            <a:ext cx="10927080" cy="1024128"/>
+          </a:xfrm>
+          <a:prstGeom prst="rect">
+            <a:avLst/>
+          </a:prstGeom>
+          <a:noFill/>
+        </p:spPr>
+        <p:txBody>
+          <a:bodyPr wrap="square" lIns="0" rIns="0" tIns="0" bIns="0" anchor="ctr">
+            <a:spAutoFit/>
+          </a:bodyPr>
+          <a:lstStyle/>
+          <a:p>
+            <a:pPr algn="l">
+              <a:spcAft>
+                <a:spcPts val="200"/>
+              </a:spcAft>
+              <a:defRPr sz="3400" b="1">
+                <a:solidFill>
+                  <a:srgbClr val="172F3B"/>
+                </a:solidFill>
+                <a:latin typeface="Aptos"/>
+              </a:defRPr>
+            </a:pPr>
+            <a:r>
+              <a:t>Six checkpoints. One reproducible synthetic patient.</a:t>
+            </a:r>
+          </a:p>
+        </p:txBody>
+      </p:sp>
+      <p:sp>
+        <p:nvSpPr>
+          <p:cNvPr id="6" name="TextBox 5"/>
+          <p:cNvSpPr txBox="1"/>
+          <p:nvPr/>
+        </p:nvSpPr>
+        <p:spPr>
+          <a:xfrm>
+            <a:off x="566928" y="1700784"/>
+            <a:ext cx="10881360" cy="411480"/>
+          </a:xfrm>
+          <a:prstGeom prst="rect">
+            <a:avLst/>
+          </a:prstGeom>
+          <a:noFill/>
+        </p:spPr>
+        <p:txBody>
+          <a:bodyPr wrap="square" lIns="0" rIns="0" tIns="0" bIns="0" anchor="ctr">
+            <a:spAutoFit/>
+          </a:bodyPr>
+          <a:lstStyle/>
+          <a:p>
+            <a:pPr algn="l">
+              <a:spcAft>
+                <a:spcPts val="200"/>
+              </a:spcAft>
+              <a:defRPr sz="1500" b="0">
+                <a:solidFill>
+                  <a:srgbClr val="667D88"/>
+                </a:solidFill>
+                <a:latin typeface="Aptos"/>
+              </a:defRPr>
+            </a:pPr>
+            <a:r>
+              <a:t>The default FastAPI dashboard lets judges jump directly to each state.</a:t>
+            </a:r>
+          </a:p>
+        </p:txBody>
+      </p:sp>
+      <p:cxnSp>
+        <p:nvCxnSpPr>
+          <p:cNvPr id="7" name="Connector 6"/>
+          <p:cNvCxnSpPr/>
+          <p:nvPr/>
+        </p:nvCxnSpPr>
+        <p:spPr>
+          <a:xfrm>
+            <a:off x="548640" y="6446520"/>
+            <a:ext cx="11109960" cy="0"/>
+          </a:xfrm>
+          <a:prstGeom prst="line">
+            <a:avLst/>
+          </a:prstGeom>
+          <a:ln w="12700">
+            <a:solidFill>
+              <a:srgbClr val="D9E4E6"/>
+            </a:solidFill>
+          </a:ln>
+        </p:spPr>
+        <p:style>
+          <a:lnRef idx="2">
+            <a:schemeClr val="accent1"/>
+          </a:lnRef>
+          <a:fillRef idx="0">
+            <a:schemeClr val="accent1"/>
+          </a:fillRef>
+          <a:effectRef idx="1">
+            <a:schemeClr val="accent1"/>
+          </a:effectRef>
+          <a:fontRef idx="minor">
+            <a:schemeClr val="tx1"/>
+          </a:fontRef>
+        </p:style>
+      </p:cxnSp>
+      <p:sp>
+        <p:nvSpPr>
+          <p:cNvPr id="8" name="TextBox 7"/>
+          <p:cNvSpPr txBox="1"/>
+          <p:nvPr/>
+        </p:nvSpPr>
+        <p:spPr>
+          <a:xfrm>
+            <a:off x="548640" y="6492240"/>
+            <a:ext cx="6400800" cy="182880"/>
+          </a:xfrm>
+          <a:prstGeom prst="rect">
+            <a:avLst/>
+          </a:prstGeom>
+          <a:noFill/>
+        </p:spPr>
+        <p:txBody>
+          <a:bodyPr wrap="square" lIns="0" rIns="0" tIns="0" bIns="0" anchor="ctr">
+            <a:spAutoFit/>
+          </a:bodyPr>
+          <a:lstStyle/>
+          <a:p>
+            <a:pPr algn="l">
+              <a:spcAft>
+                <a:spcPts val="200"/>
+              </a:spcAft>
+              <a:defRPr sz="900" b="1">
+                <a:solidFill>
+                  <a:srgbClr val="667D88"/>
+                </a:solidFill>
+                <a:latin typeface="Aptos"/>
+              </a:defRPr>
+            </a:pPr>
+            <a:r>
+              <a:t>HIMANSHUDIGITALTWIN  /  MITS GWALIOR</a:t>
+            </a:r>
+          </a:p>
+        </p:txBody>
+      </p:sp>
+      <p:sp>
+        <p:nvSpPr>
+          <p:cNvPr id="9" name="TextBox 8"/>
+          <p:cNvSpPr txBox="1"/>
+          <p:nvPr/>
+        </p:nvSpPr>
+        <p:spPr>
+          <a:xfrm>
+            <a:off x="10607040" y="6492240"/>
+            <a:ext cx="1060704" cy="182880"/>
+          </a:xfrm>
+          <a:prstGeom prst="rect">
+            <a:avLst/>
+          </a:prstGeom>
+          <a:noFill/>
+        </p:spPr>
+        <p:txBody>
+          <a:bodyPr wrap="square" lIns="0" rIns="0" tIns="0" bIns="0" anchor="ctr">
+            <a:spAutoFit/>
+          </a:bodyPr>
+          <a:lstStyle/>
+          <a:p>
+            <a:pPr algn="r">
+              <a:spcAft>
+                <a:spcPts val="200"/>
+              </a:spcAft>
+              <a:defRPr sz="900" b="1">
+                <a:solidFill>
+                  <a:srgbClr val="667D88"/>
+                </a:solidFill>
+                <a:latin typeface="Aptos"/>
+              </a:defRPr>
+            </a:pPr>
+            <a:r>
+              <a:t>04 / 06</a:t>
+            </a:r>
+          </a:p>
+        </p:txBody>
+      </p:sp>
+      <p:sp>
+        <p:nvSpPr>
+          <p:cNvPr id="10" name="Rounded Rectangle 9"/>
+          <p:cNvSpPr/>
+          <p:nvPr/>
+        </p:nvSpPr>
+        <p:spPr>
+          <a:xfrm>
+            <a:off x="603504" y="2240280"/>
+            <a:ext cx="3584448" cy="1261872"/>
+          </a:xfrm>
+          <a:prstGeom prst="roundRect">
+            <a:avLst>
+              <a:gd name="adj" fmla="val 15000"/>
+            </a:avLst>
+          </a:prstGeom>
+          <a:solidFill>
+            <a:srgbClr val="FFFFFF"/>
+          </a:solidFill>
+          <a:ln w="12700">
+            <a:solidFill>
+              <a:srgbClr val="D9E4E6"/>
+            </a:solidFill>
+          </a:ln>
+        </p:spPr>
+        <p:style>
+          <a:lnRef idx="1">
+            <a:schemeClr val="accent1"/>
+          </a:lnRef>
+          <a:fillRef idx="3">
+            <a:schemeClr val="accent1"/>
+          </a:fillRef>
+          <a:effectRef idx="2">
+            <a:schemeClr val="accent1"/>
+          </a:effectRef>
+          <a:fontRef idx="minor">
+            <a:schemeClr val="lt1"/>
+          </a:fontRef>
+        </p:style>
+        <p:txBody>
+          <a:bodyPr rtlCol="0" anchor="ctr"/>
+          <a:lstStyle/>
+          <a:p>
+            <a:pPr algn="ctr"/>
+          </a:p>
+        </p:txBody>
+      </p:sp>
+      <p:sp>
+        <p:nvSpPr>
+          <p:cNvPr id="11" name="Rectangle 10"/>
+          <p:cNvSpPr/>
+          <p:nvPr/>
+        </p:nvSpPr>
+        <p:spPr>
+          <a:xfrm>
+            <a:off x="603504" y="2240280"/>
+            <a:ext cx="50292" cy="1261872"/>
+          </a:xfrm>
+          <a:prstGeom prst="rect">
+            <a:avLst/>
+          </a:prstGeom>
+          <a:solidFill>
+            <a:srgbClr val="167E78"/>
+          </a:solidFill>
+          <a:ln>
+            <a:noFill/>
+          </a:ln>
+        </p:spPr>
+        <p:style>
+          <a:lnRef idx="1">
+            <a:schemeClr val="accent1"/>
+          </a:lnRef>
+          <a:fillRef idx="3">
+            <a:schemeClr val="accent1"/>
+          </a:fillRef>
+          <a:effectRef idx="2">
+            <a:schemeClr val="accent1"/>
+          </a:effectRef>
+          <a:fontRef idx="minor">
+            <a:schemeClr val="lt1"/>
+          </a:fontRef>
+        </p:style>
+        <p:txBody>
+          <a:bodyPr rtlCol="0" anchor="ctr"/>
+          <a:lstStyle/>
+          <a:p>
+            <a:pPr algn="ctr"/>
+          </a:p>
+        </p:txBody>
+      </p:sp>
+      <p:sp>
+        <p:nvSpPr>
+          <p:cNvPr id="12" name="TextBox 11"/>
+          <p:cNvSpPr txBox="1"/>
+          <p:nvPr/>
+        </p:nvSpPr>
+        <p:spPr>
+          <a:xfrm>
+            <a:off x="804672" y="2395728"/>
+            <a:ext cx="502920" cy="365760"/>
+          </a:xfrm>
+          <a:prstGeom prst="rect">
+            <a:avLst/>
+          </a:prstGeom>
+          <a:noFill/>
+        </p:spPr>
+        <p:txBody>
+          <a:bodyPr wrap="square" lIns="0" rIns="0" tIns="0" bIns="0" anchor="ctr">
+            <a:spAutoFit/>
+          </a:bodyPr>
+          <a:lstStyle/>
+          <a:p>
+            <a:pPr algn="l">
+              <a:spcAft>
+                <a:spcPts val="200"/>
+              </a:spcAft>
+              <a:defRPr sz="2300" b="1">
+                <a:solidFill>
+                  <a:srgbClr val="167E78"/>
+                </a:solidFill>
+                <a:latin typeface="Aptos"/>
+              </a:defRPr>
+            </a:pPr>
+            <a:r>
+              <a:t>01</a:t>
+            </a:r>
+          </a:p>
+        </p:txBody>
+      </p:sp>
+      <p:sp>
+        <p:nvSpPr>
+          <p:cNvPr id="13" name="TextBox 12"/>
+          <p:cNvSpPr txBox="1"/>
+          <p:nvPr/>
+        </p:nvSpPr>
+        <p:spPr>
+          <a:xfrm>
+            <a:off x="1362456" y="2377440"/>
+            <a:ext cx="2596896" cy="338328"/>
+          </a:xfrm>
+          <a:prstGeom prst="rect">
+            <a:avLst/>
+          </a:prstGeom>
+          <a:noFill/>
+        </p:spPr>
+        <p:txBody>
+          <a:bodyPr wrap="square" lIns="0" rIns="0" tIns="0" bIns="0" anchor="ctr">
+            <a:spAutoFit/>
+          </a:bodyPr>
+          <a:lstStyle/>
+          <a:p>
+            <a:pPr algn="l">
+              <a:spcAft>
+                <a:spcPts val="200"/>
+              </a:spcAft>
+              <a:defRPr sz="1600" b="1">
+                <a:solidFill>
+                  <a:srgbClr val="172F3B"/>
+                </a:solidFill>
+                <a:latin typeface="Aptos"/>
+              </a:defRPr>
+            </a:pPr>
+            <a:r>
+              <a:t>BASELINE</a:t>
+            </a:r>
+          </a:p>
+        </p:txBody>
+      </p:sp>
+      <p:sp>
+        <p:nvSpPr>
+          <p:cNvPr id="14" name="TextBox 13"/>
+          <p:cNvSpPr txBox="1"/>
+          <p:nvPr/>
+        </p:nvSpPr>
+        <p:spPr>
+          <a:xfrm>
+            <a:off x="1371600" y="2807208"/>
+            <a:ext cx="2633472" cy="320040"/>
+          </a:xfrm>
+          <a:prstGeom prst="rect">
+            <a:avLst/>
+          </a:prstGeom>
+          <a:noFill/>
+        </p:spPr>
+        <p:txBody>
+          <a:bodyPr wrap="square" lIns="0" rIns="0" tIns="0" bIns="0" anchor="ctr">
+            <a:spAutoFit/>
+          </a:bodyPr>
+          <a:lstStyle/>
+          <a:p>
+            <a:pPr algn="l">
+              <a:spcAft>
+                <a:spcPts val="200"/>
+              </a:spcAft>
+              <a:defRPr sz="1300" b="0">
+                <a:solidFill>
+                  <a:srgbClr val="667D88"/>
+                </a:solidFill>
+                <a:latin typeface="Aptos"/>
+              </a:defRPr>
+            </a:pPr>
+            <a:r>
+              <a:t>Profile + first valid CGM</a:t>
+            </a:r>
+          </a:p>
+        </p:txBody>
+      </p:sp>
+      <p:sp>
+        <p:nvSpPr>
+          <p:cNvPr id="15" name="Rounded Rectangle 14"/>
+          <p:cNvSpPr/>
+          <p:nvPr/>
+        </p:nvSpPr>
+        <p:spPr>
+          <a:xfrm>
+            <a:off x="4425696" y="2240280"/>
+            <a:ext cx="3584448" cy="1261872"/>
+          </a:xfrm>
+          <a:prstGeom prst="roundRect">
+            <a:avLst>
+              <a:gd name="adj" fmla="val 15000"/>
+            </a:avLst>
+          </a:prstGeom>
+          <a:solidFill>
+            <a:srgbClr val="FFFFFF"/>
+          </a:solidFill>
+          <a:ln w="12700">
+            <a:solidFill>
+              <a:srgbClr val="D9E4E6"/>
+            </a:solidFill>
+          </a:ln>
+        </p:spPr>
+        <p:style>
+          <a:lnRef idx="1">
+            <a:schemeClr val="accent1"/>
+          </a:lnRef>
+          <a:fillRef idx="3">
+            <a:schemeClr val="accent1"/>
+          </a:fillRef>
+          <a:effectRef idx="2">
+            <a:schemeClr val="accent1"/>
+          </a:effectRef>
+          <a:fontRef idx="minor">
+            <a:schemeClr val="lt1"/>
+          </a:fontRef>
+        </p:style>
+        <p:txBody>
+          <a:bodyPr rtlCol="0" anchor="ctr"/>
+          <a:lstStyle/>
+          <a:p>
+            <a:pPr algn="ctr"/>
+          </a:p>
+        </p:txBody>
+      </p:sp>
+      <p:sp>
+        <p:nvSpPr>
+          <p:cNvPr id="16" name="Rectangle 15"/>
+          <p:cNvSpPr/>
+          <p:nvPr/>
+        </p:nvSpPr>
+        <p:spPr>
+          <a:xfrm>
+            <a:off x="4425696" y="2240280"/>
+            <a:ext cx="50292" cy="1261872"/>
+          </a:xfrm>
+          <a:prstGeom prst="rect">
+            <a:avLst/>
+          </a:prstGeom>
+          <a:solidFill>
+            <a:srgbClr val="167E78"/>
+          </a:solidFill>
+          <a:ln>
+            <a:noFill/>
+          </a:ln>
+        </p:spPr>
+        <p:style>
+          <a:lnRef idx="1">
+            <a:schemeClr val="accent1"/>
+          </a:lnRef>
+          <a:fillRef idx="3">
+            <a:schemeClr val="accent1"/>
+          </a:fillRef>
+          <a:effectRef idx="2">
+            <a:schemeClr val="accent1"/>
+          </a:effectRef>
+          <a:fontRef idx="minor">
+            <a:schemeClr val="lt1"/>
+          </a:fontRef>
+        </p:style>
+        <p:txBody>
+          <a:bodyPr rtlCol="0" anchor="ctr"/>
+          <a:lstStyle/>
+          <a:p>
+            <a:pPr algn="ctr"/>
+          </a:p>
+        </p:txBody>
+      </p:sp>
+      <p:sp>
+        <p:nvSpPr>
+          <p:cNvPr id="17" name="TextBox 16"/>
+          <p:cNvSpPr txBox="1"/>
+          <p:nvPr/>
+        </p:nvSpPr>
+        <p:spPr>
+          <a:xfrm>
+            <a:off x="4626864" y="2395728"/>
+            <a:ext cx="502920" cy="365760"/>
+          </a:xfrm>
+          <a:prstGeom prst="rect">
+            <a:avLst/>
+          </a:prstGeom>
+          <a:noFill/>
+        </p:spPr>
+        <p:txBody>
+          <a:bodyPr wrap="square" lIns="0" rIns="0" tIns="0" bIns="0" anchor="ctr">
+            <a:spAutoFit/>
+          </a:bodyPr>
+          <a:lstStyle/>
+          <a:p>
+            <a:pPr algn="l">
+              <a:spcAft>
+                <a:spcPts val="200"/>
+              </a:spcAft>
+              <a:defRPr sz="2300" b="1">
+                <a:solidFill>
+                  <a:srgbClr val="167E78"/>
+                </a:solidFill>
+                <a:latin typeface="Aptos"/>
+              </a:defRPr>
+            </a:pPr>
+            <a:r>
+              <a:t>02</a:t>
+            </a:r>
+          </a:p>
+        </p:txBody>
+      </p:sp>
+      <p:sp>
+        <p:nvSpPr>
+          <p:cNvPr id="18" name="TextBox 17"/>
+          <p:cNvSpPr txBox="1"/>
+          <p:nvPr/>
+        </p:nvSpPr>
+        <p:spPr>
+          <a:xfrm>
+            <a:off x="5184648" y="2377440"/>
+            <a:ext cx="2596896" cy="338328"/>
+          </a:xfrm>
+          <a:prstGeom prst="rect">
+            <a:avLst/>
+          </a:prstGeom>
+          <a:noFill/>
+        </p:spPr>
+        <p:txBody>
+          <a:bodyPr wrap="square" lIns="0" rIns="0" tIns="0" bIns="0" anchor="ctr">
+            <a:spAutoFit/>
+          </a:bodyPr>
+          <a:lstStyle/>
+          <a:p>
+            <a:pPr algn="l">
+              <a:spcAft>
+                <a:spcPts val="200"/>
+              </a:spcAft>
+              <a:defRPr sz="1600" b="1">
+                <a:solidFill>
+                  <a:srgbClr val="172F3B"/>
+                </a:solidFill>
+                <a:latin typeface="Aptos"/>
+              </a:defRPr>
+            </a:pPr>
+            <a:r>
+              <a:t>BREAKFAST</a:t>
+            </a:r>
+          </a:p>
+        </p:txBody>
+      </p:sp>
+      <p:sp>
+        <p:nvSpPr>
+          <p:cNvPr id="19" name="TextBox 18"/>
+          <p:cNvSpPr txBox="1"/>
+          <p:nvPr/>
+        </p:nvSpPr>
+        <p:spPr>
+          <a:xfrm>
+            <a:off x="5193792" y="2807208"/>
+            <a:ext cx="2633472" cy="320040"/>
+          </a:xfrm>
+          <a:prstGeom prst="rect">
+            <a:avLst/>
+          </a:prstGeom>
+          <a:noFill/>
+        </p:spPr>
+        <p:txBody>
+          <a:bodyPr wrap="square" lIns="0" rIns="0" tIns="0" bIns="0" anchor="ctr">
+            <a:spAutoFit/>
+          </a:bodyPr>
+          <a:lstStyle/>
+          <a:p>
+            <a:pPr algn="l">
+              <a:spcAft>
+                <a:spcPts val="200"/>
+              </a:spcAft>
+              <a:defRPr sz="1300" b="0">
+                <a:solidFill>
+                  <a:srgbClr val="667D88"/>
+                </a:solidFill>
+                <a:latin typeface="Aptos"/>
+              </a:defRPr>
+            </a:pPr>
+            <a:r>
+              <a:t>Meal context changes</a:t>
+            </a:r>
+          </a:p>
+        </p:txBody>
+      </p:sp>
+      <p:sp>
+        <p:nvSpPr>
+          <p:cNvPr id="20" name="Rounded Rectangle 19"/>
+          <p:cNvSpPr/>
+          <p:nvPr/>
+        </p:nvSpPr>
+        <p:spPr>
+          <a:xfrm>
+            <a:off x="8247888" y="2240280"/>
+            <a:ext cx="3584448" cy="1261872"/>
+          </a:xfrm>
+          <a:prstGeom prst="roundRect">
+            <a:avLst>
+              <a:gd name="adj" fmla="val 15000"/>
+            </a:avLst>
+          </a:prstGeom>
+          <a:solidFill>
+            <a:srgbClr val="FFFFFF"/>
+          </a:solidFill>
+          <a:ln w="12700">
+            <a:solidFill>
+              <a:srgbClr val="D9E4E6"/>
+            </a:solidFill>
+          </a:ln>
+        </p:spPr>
+        <p:style>
+          <a:lnRef idx="1">
+            <a:schemeClr val="accent1"/>
+          </a:lnRef>
+          <a:fillRef idx="3">
+            <a:schemeClr val="accent1"/>
+          </a:fillRef>
+          <a:effectRef idx="2">
+            <a:schemeClr val="accent1"/>
+          </a:effectRef>
+          <a:fontRef idx="minor">
+            <a:schemeClr val="lt1"/>
+          </a:fontRef>
+        </p:style>
+        <p:txBody>
+          <a:bodyPr rtlCol="0" anchor="ctr"/>
+          <a:lstStyle/>
+          <a:p>
+            <a:pPr algn="ctr"/>
+          </a:p>
+        </p:txBody>
+      </p:sp>
+      <p:sp>
+        <p:nvSpPr>
+          <p:cNvPr id="21" name="Rectangle 20"/>
+          <p:cNvSpPr/>
+          <p:nvPr/>
+        </p:nvSpPr>
+        <p:spPr>
+          <a:xfrm>
+            <a:off x="8247888" y="2240280"/>
+            <a:ext cx="50292" cy="1261872"/>
+          </a:xfrm>
+          <a:prstGeom prst="rect">
+            <a:avLst/>
+          </a:prstGeom>
+          <a:solidFill>
+            <a:srgbClr val="167E78"/>
+          </a:solidFill>
+          <a:ln>
+            <a:noFill/>
+          </a:ln>
+        </p:spPr>
+        <p:style>
+          <a:lnRef idx="1">
+            <a:schemeClr val="accent1"/>
+          </a:lnRef>
+          <a:fillRef idx="3">
+            <a:schemeClr val="accent1"/>
+          </a:fillRef>
+          <a:effectRef idx="2">
+            <a:schemeClr val="accent1"/>
+          </a:effectRef>
+          <a:fontRef idx="minor">
+            <a:schemeClr val="lt1"/>
+          </a:fontRef>
+        </p:style>
+        <p:txBody>
+          <a:bodyPr rtlCol="0" anchor="ctr"/>
+          <a:lstStyle/>
+          <a:p>
+            <a:pPr algn="ctr"/>
+          </a:p>
+        </p:txBody>
+      </p:sp>
+      <p:sp>
+        <p:nvSpPr>
+          <p:cNvPr id="22" name="TextBox 21"/>
+          <p:cNvSpPr txBox="1"/>
+          <p:nvPr/>
+        </p:nvSpPr>
+        <p:spPr>
+          <a:xfrm>
+            <a:off x="8449056" y="2395728"/>
+            <a:ext cx="502920" cy="365760"/>
+          </a:xfrm>
+          <a:prstGeom prst="rect">
+            <a:avLst/>
+          </a:prstGeom>
+          <a:noFill/>
+        </p:spPr>
+        <p:txBody>
+          <a:bodyPr wrap="square" lIns="0" rIns="0" tIns="0" bIns="0" anchor="ctr">
+            <a:spAutoFit/>
+          </a:bodyPr>
+          <a:lstStyle/>
+          <a:p>
+            <a:pPr algn="l">
+              <a:spcAft>
+                <a:spcPts val="200"/>
+              </a:spcAft>
+              <a:defRPr sz="2300" b="1">
+                <a:solidFill>
+                  <a:srgbClr val="167E78"/>
+                </a:solidFill>
+                <a:latin typeface="Aptos"/>
+              </a:defRPr>
+            </a:pPr>
+            <a:r>
+              <a:t>03</a:t>
+            </a:r>
+          </a:p>
+        </p:txBody>
+      </p:sp>
+      <p:sp>
+        <p:nvSpPr>
+          <p:cNvPr id="23" name="TextBox 22"/>
+          <p:cNvSpPr txBox="1"/>
+          <p:nvPr/>
+        </p:nvSpPr>
+        <p:spPr>
+          <a:xfrm>
+            <a:off x="9006840" y="2377440"/>
+            <a:ext cx="2596896" cy="338328"/>
+          </a:xfrm>
+          <a:prstGeom prst="rect">
+            <a:avLst/>
+          </a:prstGeom>
+          <a:noFill/>
+        </p:spPr>
+        <p:txBody>
+          <a:bodyPr wrap="square" lIns="0" rIns="0" tIns="0" bIns="0" anchor="ctr">
+            <a:spAutoFit/>
+          </a:bodyPr>
+          <a:lstStyle/>
+          <a:p>
+            <a:pPr algn="l">
+              <a:spcAft>
+                <a:spcPts val="200"/>
+              </a:spcAft>
+              <a:defRPr sz="1600" b="1">
+                <a:solidFill>
+                  <a:srgbClr val="172F3B"/>
+                </a:solidFill>
+                <a:latin typeface="Aptos"/>
+              </a:defRPr>
+            </a:pPr>
+            <a:r>
+              <a:t>LUNCH</a:t>
+            </a:r>
+          </a:p>
+        </p:txBody>
+      </p:sp>
+      <p:sp>
+        <p:nvSpPr>
+          <p:cNvPr id="24" name="TextBox 23"/>
+          <p:cNvSpPr txBox="1"/>
+          <p:nvPr/>
+        </p:nvSpPr>
+        <p:spPr>
+          <a:xfrm>
+            <a:off x="9015984" y="2807208"/>
+            <a:ext cx="2633472" cy="320040"/>
+          </a:xfrm>
+          <a:prstGeom prst="rect">
+            <a:avLst/>
+          </a:prstGeom>
+          <a:noFill/>
+        </p:spPr>
+        <p:txBody>
+          <a:bodyPr wrap="square" lIns="0" rIns="0" tIns="0" bIns="0" anchor="ctr">
+            <a:spAutoFit/>
+          </a:bodyPr>
+          <a:lstStyle/>
+          <a:p>
+            <a:pPr algn="l">
+              <a:spcAft>
+                <a:spcPts val="200"/>
+              </a:spcAft>
+              <a:defRPr sz="1300" b="0">
+                <a:solidFill>
+                  <a:srgbClr val="667D88"/>
+                </a:solidFill>
+                <a:latin typeface="Aptos"/>
+              </a:defRPr>
+            </a:pPr>
+            <a:r>
+              <a:t>Forecast trajectory</a:t>
+            </a:r>
+          </a:p>
+        </p:txBody>
+      </p:sp>
+      <p:sp>
+        <p:nvSpPr>
+          <p:cNvPr id="25" name="Rounded Rectangle 24"/>
+          <p:cNvSpPr/>
+          <p:nvPr/>
+        </p:nvSpPr>
+        <p:spPr>
+          <a:xfrm>
+            <a:off x="603504" y="3694176"/>
+            <a:ext cx="3584448" cy="1261872"/>
+          </a:xfrm>
+          <a:prstGeom prst="roundRect">
+            <a:avLst>
+              <a:gd name="adj" fmla="val 15000"/>
+            </a:avLst>
+          </a:prstGeom>
+          <a:solidFill>
+            <a:srgbClr val="FFFFFF"/>
+          </a:solidFill>
+          <a:ln w="12700">
+            <a:solidFill>
+              <a:srgbClr val="D9E4E6"/>
+            </a:solidFill>
+          </a:ln>
+        </p:spPr>
+        <p:style>
+          <a:lnRef idx="1">
+            <a:schemeClr val="accent1"/>
+          </a:lnRef>
+          <a:fillRef idx="3">
+            <a:schemeClr val="accent1"/>
+          </a:fillRef>
+          <a:effectRef idx="2">
+            <a:schemeClr val="accent1"/>
+          </a:effectRef>
+          <a:fontRef idx="minor">
+            <a:schemeClr val="lt1"/>
+          </a:fontRef>
+        </p:style>
+        <p:txBody>
+          <a:bodyPr rtlCol="0" anchor="ctr"/>
+          <a:lstStyle/>
+          <a:p>
+            <a:pPr algn="ctr"/>
+          </a:p>
+        </p:txBody>
+      </p:sp>
+      <p:sp>
+        <p:nvSpPr>
+          <p:cNvPr id="26" name="Rectangle 25"/>
+          <p:cNvSpPr/>
+          <p:nvPr/>
+        </p:nvSpPr>
+        <p:spPr>
+          <a:xfrm>
+            <a:off x="603504" y="3694176"/>
+            <a:ext cx="50292" cy="1261872"/>
+          </a:xfrm>
+          <a:prstGeom prst="rect">
+            <a:avLst/>
+          </a:prstGeom>
+          <a:solidFill>
+            <a:srgbClr val="167E78"/>
+          </a:solidFill>
+          <a:ln>
+            <a:noFill/>
+          </a:ln>
+        </p:spPr>
+        <p:style>
+          <a:lnRef idx="1">
+            <a:schemeClr val="accent1"/>
+          </a:lnRef>
+          <a:fillRef idx="3">
+            <a:schemeClr val="accent1"/>
+          </a:fillRef>
+          <a:effectRef idx="2">
+            <a:schemeClr val="accent1"/>
+          </a:effectRef>
+          <a:fontRef idx="minor">
+            <a:schemeClr val="lt1"/>
+          </a:fontRef>
+        </p:style>
+        <p:txBody>
+          <a:bodyPr rtlCol="0" anchor="ctr"/>
+          <a:lstStyle/>
+          <a:p>
+            <a:pPr algn="ctr"/>
+          </a:p>
+        </p:txBody>
+      </p:sp>
+      <p:sp>
+        <p:nvSpPr>
+          <p:cNvPr id="27" name="TextBox 26"/>
+          <p:cNvSpPr txBox="1"/>
+          <p:nvPr/>
+        </p:nvSpPr>
+        <p:spPr>
+          <a:xfrm>
+            <a:off x="804672" y="3849624"/>
+            <a:ext cx="502920" cy="365760"/>
+          </a:xfrm>
+          <a:prstGeom prst="rect">
+            <a:avLst/>
+          </a:prstGeom>
+          <a:noFill/>
+        </p:spPr>
+        <p:txBody>
+          <a:bodyPr wrap="square" lIns="0" rIns="0" tIns="0" bIns="0" anchor="ctr">
+            <a:spAutoFit/>
+          </a:bodyPr>
+          <a:lstStyle/>
+          <a:p>
+            <a:pPr algn="l">
+              <a:spcAft>
+                <a:spcPts val="200"/>
+              </a:spcAft>
+              <a:defRPr sz="2300" b="1">
+                <a:solidFill>
+                  <a:srgbClr val="167E78"/>
+                </a:solidFill>
+                <a:latin typeface="Aptos"/>
+              </a:defRPr>
+            </a:pPr>
+            <a:r>
+              <a:t>04</a:t>
+            </a:r>
+          </a:p>
+        </p:txBody>
+      </p:sp>
+      <p:sp>
+        <p:nvSpPr>
+          <p:cNvPr id="28" name="TextBox 27"/>
+          <p:cNvSpPr txBox="1"/>
+          <p:nvPr/>
+        </p:nvSpPr>
+        <p:spPr>
+          <a:xfrm>
+            <a:off x="1362456" y="3831336"/>
+            <a:ext cx="2596896" cy="338328"/>
+          </a:xfrm>
+          <a:prstGeom prst="rect">
+            <a:avLst/>
+          </a:prstGeom>
+          <a:noFill/>
+        </p:spPr>
+        <p:txBody>
+          <a:bodyPr wrap="square" lIns="0" rIns="0" tIns="0" bIns="0" anchor="ctr">
+            <a:spAutoFit/>
+          </a:bodyPr>
+          <a:lstStyle/>
+          <a:p>
+            <a:pPr algn="l">
+              <a:spcAft>
+                <a:spcPts val="200"/>
+              </a:spcAft>
+              <a:defRPr sz="1600" b="1">
+                <a:solidFill>
+                  <a:srgbClr val="172F3B"/>
+                </a:solidFill>
+                <a:latin typeface="Aptos"/>
+              </a:defRPr>
+            </a:pPr>
+            <a:r>
+              <a:t>VERIFICATION</a:t>
+            </a:r>
+          </a:p>
+        </p:txBody>
+      </p:sp>
+      <p:sp>
+        <p:nvSpPr>
+          <p:cNvPr id="29" name="TextBox 28"/>
+          <p:cNvSpPr txBox="1"/>
+          <p:nvPr/>
+        </p:nvSpPr>
+        <p:spPr>
+          <a:xfrm>
+            <a:off x="1371600" y="4261104"/>
+            <a:ext cx="2633472" cy="320040"/>
+          </a:xfrm>
+          <a:prstGeom prst="rect">
+            <a:avLst/>
+          </a:prstGeom>
+          <a:noFill/>
+        </p:spPr>
+        <p:txBody>
+          <a:bodyPr wrap="square" lIns="0" rIns="0" tIns="0" bIns="0" anchor="ctr">
+            <a:spAutoFit/>
+          </a:bodyPr>
+          <a:lstStyle/>
+          <a:p>
+            <a:pPr algn="l">
+              <a:spcAft>
+                <a:spcPts val="200"/>
+              </a:spcAft>
+              <a:defRPr sz="1300" b="0">
+                <a:solidFill>
+                  <a:srgbClr val="667D88"/>
+                </a:solidFill>
+                <a:latin typeface="Aptos"/>
+              </a:defRPr>
+            </a:pPr>
+            <a:r>
+              <a:t>Earlier forecasts resolved</a:t>
+            </a:r>
+          </a:p>
+        </p:txBody>
+      </p:sp>
+      <p:sp>
+        <p:nvSpPr>
+          <p:cNvPr id="30" name="Rounded Rectangle 29"/>
+          <p:cNvSpPr/>
+          <p:nvPr/>
+        </p:nvSpPr>
+        <p:spPr>
+          <a:xfrm>
+            <a:off x="4425696" y="3694176"/>
+            <a:ext cx="3584448" cy="1261872"/>
+          </a:xfrm>
+          <a:prstGeom prst="roundRect">
+            <a:avLst>
+              <a:gd name="adj" fmla="val 15000"/>
+            </a:avLst>
+          </a:prstGeom>
+          <a:solidFill>
+            <a:srgbClr val="FFFFFF"/>
+          </a:solidFill>
+          <a:ln w="12700">
+            <a:solidFill>
+              <a:srgbClr val="D9E4E6"/>
+            </a:solidFill>
+          </a:ln>
+        </p:spPr>
+        <p:style>
+          <a:lnRef idx="1">
+            <a:schemeClr val="accent1"/>
+          </a:lnRef>
+          <a:fillRef idx="3">
+            <a:schemeClr val="accent1"/>
+          </a:fillRef>
+          <a:effectRef idx="2">
+            <a:schemeClr val="accent1"/>
+          </a:effectRef>
+          <a:fontRef idx="minor">
+            <a:schemeClr val="lt1"/>
+          </a:fontRef>
+        </p:style>
+        <p:txBody>
+          <a:bodyPr rtlCol="0" anchor="ctr"/>
+          <a:lstStyle/>
+          <a:p>
+            <a:pPr algn="ctr"/>
+          </a:p>
+        </p:txBody>
+      </p:sp>
+      <p:sp>
+        <p:nvSpPr>
+          <p:cNvPr id="31" name="Rectangle 30"/>
+          <p:cNvSpPr/>
+          <p:nvPr/>
+        </p:nvSpPr>
+        <p:spPr>
+          <a:xfrm>
+            <a:off x="4425696" y="3694176"/>
+            <a:ext cx="50292" cy="1261872"/>
+          </a:xfrm>
+          <a:prstGeom prst="rect">
+            <a:avLst/>
+          </a:prstGeom>
+          <a:solidFill>
+            <a:srgbClr val="B46F4B"/>
+          </a:solidFill>
+          <a:ln>
+            <a:noFill/>
+          </a:ln>
+        </p:spPr>
+        <p:style>
+          <a:lnRef idx="1">
+            <a:schemeClr val="accent1"/>
+          </a:lnRef>
+          <a:fillRef idx="3">
+            <a:schemeClr val="accent1"/>
+          </a:fillRef>
+          <a:effectRef idx="2">
+            <a:schemeClr val="accent1"/>
+          </a:effectRef>
+          <a:fontRef idx="minor">
+            <a:schemeClr val="lt1"/>
+          </a:fontRef>
+        </p:style>
+        <p:txBody>
+          <a:bodyPr rtlCol="0" anchor="ctr"/>
+          <a:lstStyle/>
+          <a:p>
+            <a:pPr algn="ctr"/>
+          </a:p>
+        </p:txBody>
+      </p:sp>
+      <p:sp>
+        <p:nvSpPr>
+          <p:cNvPr id="32" name="TextBox 31"/>
+          <p:cNvSpPr txBox="1"/>
+          <p:nvPr/>
+        </p:nvSpPr>
+        <p:spPr>
+          <a:xfrm>
+            <a:off x="4626864" y="3849624"/>
+            <a:ext cx="502920" cy="365760"/>
+          </a:xfrm>
+          <a:prstGeom prst="rect">
+            <a:avLst/>
+          </a:prstGeom>
+          <a:noFill/>
+        </p:spPr>
+        <p:txBody>
+          <a:bodyPr wrap="square" lIns="0" rIns="0" tIns="0" bIns="0" anchor="ctr">
+            <a:spAutoFit/>
+          </a:bodyPr>
+          <a:lstStyle/>
+          <a:p>
+            <a:pPr algn="l">
+              <a:spcAft>
+                <a:spcPts val="200"/>
+              </a:spcAft>
+              <a:defRPr sz="2300" b="1">
+                <a:solidFill>
+                  <a:srgbClr val="B46F4B"/>
+                </a:solidFill>
+                <a:latin typeface="Aptos"/>
+              </a:defRPr>
+            </a:pPr>
+            <a:r>
+              <a:t>05</a:t>
+            </a:r>
+          </a:p>
+        </p:txBody>
+      </p:sp>
+      <p:sp>
+        <p:nvSpPr>
+          <p:cNvPr id="33" name="TextBox 32"/>
+          <p:cNvSpPr txBox="1"/>
+          <p:nvPr/>
+        </p:nvSpPr>
+        <p:spPr>
+          <a:xfrm>
+            <a:off x="5184648" y="3831336"/>
+            <a:ext cx="2596896" cy="338328"/>
+          </a:xfrm>
+          <a:prstGeom prst="rect">
+            <a:avLst/>
+          </a:prstGeom>
+          <a:noFill/>
+        </p:spPr>
+        <p:txBody>
+          <a:bodyPr wrap="square" lIns="0" rIns="0" tIns="0" bIns="0" anchor="ctr">
+            <a:spAutoFit/>
+          </a:bodyPr>
+          <a:lstStyle/>
+          <a:p>
+            <a:pPr algn="l">
+              <a:spcAft>
+                <a:spcPts val="200"/>
+              </a:spcAft>
+              <a:defRPr sz="1600" b="1">
+                <a:solidFill>
+                  <a:srgbClr val="172F3B"/>
+                </a:solidFill>
+                <a:latin typeface="Aptos"/>
+              </a:defRPr>
+            </a:pPr>
+            <a:r>
+              <a:t>SENSOR GAP</a:t>
+            </a:r>
+          </a:p>
+        </p:txBody>
+      </p:sp>
+      <p:sp>
+        <p:nvSpPr>
+          <p:cNvPr id="34" name="TextBox 33"/>
+          <p:cNvSpPr txBox="1"/>
+          <p:nvPr/>
+        </p:nvSpPr>
+        <p:spPr>
+          <a:xfrm>
+            <a:off x="5193792" y="4261104"/>
+            <a:ext cx="2633472" cy="320040"/>
+          </a:xfrm>
+          <a:prstGeom prst="rect">
+            <a:avLst/>
+          </a:prstGeom>
+          <a:noFill/>
+        </p:spPr>
+        <p:txBody>
+          <a:bodyPr wrap="square" lIns="0" rIns="0" tIns="0" bIns="0" anchor="ctr">
+            <a:spAutoFit/>
+          </a:bodyPr>
+          <a:lstStyle/>
+          <a:p>
+            <a:pPr algn="l">
+              <a:spcAft>
+                <a:spcPts val="200"/>
+              </a:spcAft>
+              <a:defRPr sz="1300" b="0">
+                <a:solidFill>
+                  <a:srgbClr val="667D88"/>
+                </a:solidFill>
+                <a:latin typeface="Aptos"/>
+              </a:defRPr>
+            </a:pPr>
+            <a:r>
+              <a:t>Abstention, no risk</a:t>
+            </a:r>
+          </a:p>
+        </p:txBody>
+      </p:sp>
+      <p:sp>
+        <p:nvSpPr>
+          <p:cNvPr id="35" name="Rounded Rectangle 34"/>
+          <p:cNvSpPr/>
+          <p:nvPr/>
+        </p:nvSpPr>
+        <p:spPr>
+          <a:xfrm>
+            <a:off x="8247888" y="3694176"/>
+            <a:ext cx="3584448" cy="1261872"/>
+          </a:xfrm>
+          <a:prstGeom prst="roundRect">
+            <a:avLst>
+              <a:gd name="adj" fmla="val 15000"/>
+            </a:avLst>
+          </a:prstGeom>
+          <a:solidFill>
+            <a:srgbClr val="FFFFFF"/>
+          </a:solidFill>
+          <a:ln w="12700">
+            <a:solidFill>
+              <a:srgbClr val="D9E4E6"/>
+            </a:solidFill>
+          </a:ln>
+        </p:spPr>
+        <p:style>
+          <a:lnRef idx="1">
+            <a:schemeClr val="accent1"/>
+          </a:lnRef>
+          <a:fillRef idx="3">
+            <a:schemeClr val="accent1"/>
+          </a:fillRef>
+          <a:effectRef idx="2">
+            <a:schemeClr val="accent1"/>
+          </a:effectRef>
+          <a:fontRef idx="minor">
+            <a:schemeClr val="lt1"/>
+          </a:fontRef>
+        </p:style>
+        <p:txBody>
+          <a:bodyPr rtlCol="0" anchor="ctr"/>
+          <a:lstStyle/>
+          <a:p>
+            <a:pPr algn="ctr"/>
+          </a:p>
+        </p:txBody>
+      </p:sp>
+      <p:sp>
+        <p:nvSpPr>
+          <p:cNvPr id="36" name="Rectangle 35"/>
+          <p:cNvSpPr/>
+          <p:nvPr/>
+        </p:nvSpPr>
+        <p:spPr>
+          <a:xfrm>
+            <a:off x="8247888" y="3694176"/>
+            <a:ext cx="50292" cy="1261872"/>
+          </a:xfrm>
+          <a:prstGeom prst="rect">
+            <a:avLst/>
+          </a:prstGeom>
+          <a:solidFill>
+            <a:srgbClr val="167E78"/>
+          </a:solidFill>
+          <a:ln>
+            <a:noFill/>
+          </a:ln>
+        </p:spPr>
+        <p:style>
+          <a:lnRef idx="1">
+            <a:schemeClr val="accent1"/>
+          </a:lnRef>
+          <a:fillRef idx="3">
+            <a:schemeClr val="accent1"/>
+          </a:fillRef>
+          <a:effectRef idx="2">
+            <a:schemeClr val="accent1"/>
+          </a:effectRef>
+          <a:fontRef idx="minor">
+            <a:schemeClr val="lt1"/>
+          </a:fontRef>
+        </p:style>
+        <p:txBody>
+          <a:bodyPr rtlCol="0" anchor="ctr"/>
+          <a:lstStyle/>
+          <a:p>
+            <a:pPr algn="ctr"/>
+          </a:p>
+        </p:txBody>
+      </p:sp>
+      <p:sp>
+        <p:nvSpPr>
+          <p:cNvPr id="37" name="TextBox 36"/>
+          <p:cNvSpPr txBox="1"/>
+          <p:nvPr/>
+        </p:nvSpPr>
+        <p:spPr>
+          <a:xfrm>
+            <a:off x="8449056" y="3849624"/>
+            <a:ext cx="502920" cy="365760"/>
+          </a:xfrm>
+          <a:prstGeom prst="rect">
+            <a:avLst/>
+          </a:prstGeom>
+          <a:noFill/>
+        </p:spPr>
+        <p:txBody>
+          <a:bodyPr wrap="square" lIns="0" rIns="0" tIns="0" bIns="0" anchor="ctr">
+            <a:spAutoFit/>
+          </a:bodyPr>
+          <a:lstStyle/>
+          <a:p>
+            <a:pPr algn="l">
+              <a:spcAft>
+                <a:spcPts val="200"/>
+              </a:spcAft>
+              <a:defRPr sz="2300" b="1">
+                <a:solidFill>
+                  <a:srgbClr val="167E78"/>
+                </a:solidFill>
+                <a:latin typeface="Aptos"/>
+              </a:defRPr>
+            </a:pPr>
+            <a:r>
+              <a:t>06</a:t>
+            </a:r>
+          </a:p>
+        </p:txBody>
+      </p:sp>
+      <p:sp>
+        <p:nvSpPr>
+          <p:cNvPr id="38" name="TextBox 37"/>
+          <p:cNvSpPr txBox="1"/>
+          <p:nvPr/>
+        </p:nvSpPr>
+        <p:spPr>
+          <a:xfrm>
+            <a:off x="9006840" y="3831336"/>
+            <a:ext cx="2596896" cy="338328"/>
+          </a:xfrm>
+          <a:prstGeom prst="rect">
+            <a:avLst/>
+          </a:prstGeom>
+          <a:noFill/>
+        </p:spPr>
+        <p:txBody>
+          <a:bodyPr wrap="square" lIns="0" rIns="0" tIns="0" bIns="0" anchor="ctr">
+            <a:spAutoFit/>
+          </a:bodyPr>
+          <a:lstStyle/>
+          <a:p>
+            <a:pPr algn="l">
+              <a:spcAft>
+                <a:spcPts val="200"/>
+              </a:spcAft>
+              <a:defRPr sz="1600" b="1">
+                <a:solidFill>
+                  <a:srgbClr val="172F3B"/>
+                </a:solidFill>
+                <a:latin typeface="Aptos"/>
+              </a:defRPr>
+            </a:pPr>
+            <a:r>
+              <a:t>RECOVERY</a:t>
+            </a:r>
+          </a:p>
+        </p:txBody>
+      </p:sp>
+      <p:sp>
+        <p:nvSpPr>
+          <p:cNvPr id="39" name="TextBox 38"/>
+          <p:cNvSpPr txBox="1"/>
+          <p:nvPr/>
+        </p:nvSpPr>
+        <p:spPr>
+          <a:xfrm>
+            <a:off x="9015984" y="4261104"/>
+            <a:ext cx="2633472" cy="320040"/>
+          </a:xfrm>
+          <a:prstGeom prst="rect">
+            <a:avLst/>
+          </a:prstGeom>
+          <a:noFill/>
+        </p:spPr>
+        <p:txBody>
+          <a:bodyPr wrap="square" lIns="0" rIns="0" tIns="0" bIns="0" anchor="ctr">
+            <a:spAutoFit/>
+          </a:bodyPr>
+          <a:lstStyle/>
+          <a:p>
+            <a:pPr algn="l">
+              <a:spcAft>
+                <a:spcPts val="200"/>
+              </a:spcAft>
+              <a:defRPr sz="1300" b="0">
+                <a:solidFill>
+                  <a:srgbClr val="667D88"/>
+                </a:solidFill>
+                <a:latin typeface="Aptos"/>
+              </a:defRPr>
+            </a:pPr>
+            <a:r>
+              <a:t>Fresh signal returns</a:t>
+            </a:r>
+          </a:p>
+        </p:txBody>
+      </p:sp>
+      <p:sp>
+        <p:nvSpPr>
+          <p:cNvPr id="40" name="Rounded Rectangle 39"/>
+          <p:cNvSpPr/>
+          <p:nvPr/>
+        </p:nvSpPr>
+        <p:spPr>
+          <a:xfrm>
+            <a:off x="603504" y="5367528"/>
+            <a:ext cx="11219688" cy="740664"/>
+          </a:xfrm>
+          <a:prstGeom prst="roundRect">
+            <a:avLst>
+              <a:gd name="adj" fmla="val 15000"/>
+            </a:avLst>
+          </a:prstGeom>
+          <a:solidFill>
+            <a:srgbClr val="152C3C"/>
+          </a:solidFill>
+          <a:ln>
+            <a:noFill/>
+          </a:ln>
+        </p:spPr>
+        <p:style>
+          <a:lnRef idx="1">
+            <a:schemeClr val="accent1"/>
+          </a:lnRef>
+          <a:fillRef idx="3">
+            <a:schemeClr val="accent1"/>
+          </a:fillRef>
+          <a:effectRef idx="2">
+            <a:schemeClr val="accent1"/>
+          </a:effectRef>
+          <a:fontRef idx="minor">
+            <a:schemeClr val="lt1"/>
+          </a:fontRef>
+        </p:style>
+        <p:txBody>
+          <a:bodyPr rtlCol="0" anchor="ctr"/>
+          <a:lstStyle/>
+          <a:p>
+            <a:pPr algn="ctr"/>
+          </a:p>
+        </p:txBody>
+      </p:sp>
+      <p:sp>
+        <p:nvSpPr>
+          <p:cNvPr id="41" name="TextBox 40"/>
+          <p:cNvSpPr txBox="1"/>
+          <p:nvPr/>
+        </p:nvSpPr>
+        <p:spPr>
+          <a:xfrm>
+            <a:off x="832104" y="5532120"/>
+            <a:ext cx="1371600" cy="228600"/>
+          </a:xfrm>
+          <a:prstGeom prst="rect">
+            <a:avLst/>
+          </a:prstGeom>
+          <a:noFill/>
+        </p:spPr>
+        <p:txBody>
+          <a:bodyPr wrap="square" lIns="0" rIns="0" tIns="0" bIns="0" anchor="ctr">
+            <a:spAutoFit/>
+          </a:bodyPr>
+          <a:lstStyle/>
+          <a:p>
+            <a:pPr algn="l">
+              <a:spcAft>
+                <a:spcPts val="200"/>
+              </a:spcAft>
+              <a:defRPr sz="1100" b="1">
+                <a:solidFill>
+                  <a:srgbClr val="A5DCCB"/>
+                </a:solidFill>
+                <a:latin typeface="Aptos"/>
+              </a:defRPr>
+            </a:pPr>
+            <a:r>
+              <a:t>JUDGE ACTION</a:t>
+            </a:r>
+          </a:p>
+        </p:txBody>
+      </p:sp>
+      <p:sp>
+        <p:nvSpPr>
+          <p:cNvPr id="42" name="TextBox 41"/>
+          <p:cNvSpPr txBox="1"/>
+          <p:nvPr/>
+        </p:nvSpPr>
+        <p:spPr>
+          <a:xfrm>
+            <a:off x="2221992" y="5477256"/>
+            <a:ext cx="9235440" cy="365760"/>
+          </a:xfrm>
+          <a:prstGeom prst="rect">
+            <a:avLst/>
+          </a:prstGeom>
+          <a:noFill/>
+        </p:spPr>
+        <p:txBody>
+          <a:bodyPr wrap="square" lIns="0" rIns="0" tIns="0" bIns="0" anchor="ctr">
+            <a:spAutoFit/>
+          </a:bodyPr>
+          <a:lstStyle/>
+          <a:p>
+            <a:pPr algn="l">
+              <a:spcAft>
+                <a:spcPts val="200"/>
+              </a:spcAft>
+              <a:defRPr sz="1700" b="0">
+                <a:solidFill>
+                  <a:srgbClr val="FFFFFF"/>
+                </a:solidFill>
+                <a:latin typeface="Aptos"/>
+              </a:defRPr>
+            </a:pPr>
+            <a:r>
+              <a:t>Run FastAPI → open localhost:8000 → Guided judge demo → choose chapter</a:t>
+            </a:r>
+          </a:p>
+        </p:txBody>
+      </p:sp>
     </p:spTree>
   </p:cSld>
   <p:clrMapOvr>
@@ -3261,30 +8810,872 @@
         <p:nvPr/>
       </p:nvGrpSpPr>
       <p:grpSpPr/>
-      <p:pic>
-        <p:nvPicPr>
-          <p:cNvPr id="2" name="Picture 1" descr="image.png"/>
-          <p:cNvPicPr>
-            <a:picLocks noChangeAspect="1"/>
-          </p:cNvPicPr>
-          <p:nvPr/>
-        </p:nvPicPr>
-        <p:blipFill>
-          <a:blip r:embed="rId2"/>
-          <a:stretch>
-            <a:fillRect/>
-          </a:stretch>
-        </p:blipFill>
+      <p:sp>
+        <p:nvSpPr>
+          <p:cNvPr id="2" name="Rectangle 1"/>
+          <p:cNvSpPr/>
+          <p:nvPr/>
+        </p:nvSpPr>
         <p:spPr>
           <a:xfrm>
             <a:off x="0" y="0"/>
-            <a:ext cx="14630400" cy="8229600"/>
-          </a:xfrm>
-          <a:prstGeom prst="rect">
-            <a:avLst/>
-          </a:prstGeom>
-        </p:spPr>
-      </p:pic>
+            <a:ext cx="12191695" cy="6858000"/>
+          </a:xfrm>
+          <a:prstGeom prst="rect">
+            <a:avLst/>
+          </a:prstGeom>
+          <a:solidFill>
+            <a:srgbClr val="F5F8F7"/>
+          </a:solidFill>
+          <a:ln>
+            <a:noFill/>
+          </a:ln>
+        </p:spPr>
+        <p:style>
+          <a:lnRef idx="1">
+            <a:schemeClr val="accent1"/>
+          </a:lnRef>
+          <a:fillRef idx="3">
+            <a:schemeClr val="accent1"/>
+          </a:fillRef>
+          <a:effectRef idx="2">
+            <a:schemeClr val="accent1"/>
+          </a:effectRef>
+          <a:fontRef idx="minor">
+            <a:schemeClr val="lt1"/>
+          </a:fontRef>
+        </p:style>
+        <p:txBody>
+          <a:bodyPr rtlCol="0" anchor="ctr"/>
+          <a:lstStyle/>
+          <a:p>
+            <a:pPr algn="ctr"/>
+          </a:p>
+        </p:txBody>
+      </p:sp>
+      <p:sp>
+        <p:nvSpPr>
+          <p:cNvPr id="3" name="Rectangle 2"/>
+          <p:cNvSpPr/>
+          <p:nvPr/>
+        </p:nvSpPr>
+        <p:spPr>
+          <a:xfrm>
+            <a:off x="0" y="0"/>
+            <a:ext cx="82296" cy="6858000"/>
+          </a:xfrm>
+          <a:prstGeom prst="rect">
+            <a:avLst/>
+          </a:prstGeom>
+          <a:solidFill>
+            <a:srgbClr val="167E78"/>
+          </a:solidFill>
+          <a:ln>
+            <a:noFill/>
+          </a:ln>
+        </p:spPr>
+        <p:style>
+          <a:lnRef idx="1">
+            <a:schemeClr val="accent1"/>
+          </a:lnRef>
+          <a:fillRef idx="3">
+            <a:schemeClr val="accent1"/>
+          </a:fillRef>
+          <a:effectRef idx="2">
+            <a:schemeClr val="accent1"/>
+          </a:effectRef>
+          <a:fontRef idx="minor">
+            <a:schemeClr val="lt1"/>
+          </a:fontRef>
+        </p:style>
+        <p:txBody>
+          <a:bodyPr rtlCol="0" anchor="ctr"/>
+          <a:lstStyle/>
+          <a:p>
+            <a:pPr algn="ctr"/>
+          </a:p>
+        </p:txBody>
+      </p:sp>
+      <p:sp>
+        <p:nvSpPr>
+          <p:cNvPr id="4" name="TextBox 3"/>
+          <p:cNvSpPr txBox="1"/>
+          <p:nvPr/>
+        </p:nvSpPr>
+        <p:spPr>
+          <a:xfrm>
+            <a:off x="548640" y="310896"/>
+            <a:ext cx="9144000" cy="246888"/>
+          </a:xfrm>
+          <a:prstGeom prst="rect">
+            <a:avLst/>
+          </a:prstGeom>
+          <a:noFill/>
+        </p:spPr>
+        <p:txBody>
+          <a:bodyPr wrap="square" lIns="0" rIns="0" tIns="0" bIns="0" anchor="ctr">
+            <a:spAutoFit/>
+          </a:bodyPr>
+          <a:lstStyle/>
+          <a:p>
+            <a:pPr algn="l">
+              <a:spcAft>
+                <a:spcPts val="200"/>
+              </a:spcAft>
+              <a:defRPr sz="1000" b="1">
+                <a:solidFill>
+                  <a:srgbClr val="167E78"/>
+                </a:solidFill>
+                <a:latin typeface="Aptos"/>
+              </a:defRPr>
+            </a:pPr>
+            <a:r>
+              <a:t>04 / SENSOR INTEGRITY</a:t>
+            </a:r>
+          </a:p>
+        </p:txBody>
+      </p:sp>
+      <p:sp>
+        <p:nvSpPr>
+          <p:cNvPr id="5" name="TextBox 4"/>
+          <p:cNvSpPr txBox="1"/>
+          <p:nvPr/>
+        </p:nvSpPr>
+        <p:spPr>
+          <a:xfrm>
+            <a:off x="548640" y="685800"/>
+            <a:ext cx="10927080" cy="1024128"/>
+          </a:xfrm>
+          <a:prstGeom prst="rect">
+            <a:avLst/>
+          </a:prstGeom>
+          <a:noFill/>
+        </p:spPr>
+        <p:txBody>
+          <a:bodyPr wrap="square" lIns="0" rIns="0" tIns="0" bIns="0" anchor="ctr">
+            <a:spAutoFit/>
+          </a:bodyPr>
+          <a:lstStyle/>
+          <a:p>
+            <a:pPr algn="l">
+              <a:spcAft>
+                <a:spcPts val="200"/>
+              </a:spcAft>
+              <a:defRPr sz="3400" b="1">
+                <a:solidFill>
+                  <a:srgbClr val="172F3B"/>
+                </a:solidFill>
+                <a:latin typeface="Aptos"/>
+              </a:defRPr>
+            </a:pPr>
+            <a:r>
+              <a:t>When the signal fails, the interface must say so.</a:t>
+            </a:r>
+          </a:p>
+        </p:txBody>
+      </p:sp>
+      <p:sp>
+        <p:nvSpPr>
+          <p:cNvPr id="6" name="TextBox 5"/>
+          <p:cNvSpPr txBox="1"/>
+          <p:nvPr/>
+        </p:nvSpPr>
+        <p:spPr>
+          <a:xfrm>
+            <a:off x="566928" y="1700784"/>
+            <a:ext cx="10881360" cy="411480"/>
+          </a:xfrm>
+          <a:prstGeom prst="rect">
+            <a:avLst/>
+          </a:prstGeom>
+          <a:noFill/>
+        </p:spPr>
+        <p:txBody>
+          <a:bodyPr wrap="square" lIns="0" rIns="0" tIns="0" bIns="0" anchor="ctr">
+            <a:spAutoFit/>
+          </a:bodyPr>
+          <a:lstStyle/>
+          <a:p>
+            <a:pPr algn="l">
+              <a:spcAft>
+                <a:spcPts val="200"/>
+              </a:spcAft>
+              <a:defRPr sz="1500" b="0">
+                <a:solidFill>
+                  <a:srgbClr val="667D88"/>
+                </a:solidFill>
+                <a:latin typeface="Aptos"/>
+              </a:defRPr>
+            </a:pPr>
+            <a:r>
+              <a:t>The demo includes a deliberately missing/stale glucose segment.</a:t>
+            </a:r>
+          </a:p>
+        </p:txBody>
+      </p:sp>
+      <p:cxnSp>
+        <p:nvCxnSpPr>
+          <p:cNvPr id="7" name="Connector 6"/>
+          <p:cNvCxnSpPr/>
+          <p:nvPr/>
+        </p:nvCxnSpPr>
+        <p:spPr>
+          <a:xfrm>
+            <a:off x="548640" y="6446520"/>
+            <a:ext cx="11109960" cy="0"/>
+          </a:xfrm>
+          <a:prstGeom prst="line">
+            <a:avLst/>
+          </a:prstGeom>
+          <a:ln w="12700">
+            <a:solidFill>
+              <a:srgbClr val="D9E4E6"/>
+            </a:solidFill>
+          </a:ln>
+        </p:spPr>
+        <p:style>
+          <a:lnRef idx="2">
+            <a:schemeClr val="accent1"/>
+          </a:lnRef>
+          <a:fillRef idx="0">
+            <a:schemeClr val="accent1"/>
+          </a:fillRef>
+          <a:effectRef idx="1">
+            <a:schemeClr val="accent1"/>
+          </a:effectRef>
+          <a:fontRef idx="minor">
+            <a:schemeClr val="tx1"/>
+          </a:fontRef>
+        </p:style>
+      </p:cxnSp>
+      <p:sp>
+        <p:nvSpPr>
+          <p:cNvPr id="8" name="TextBox 7"/>
+          <p:cNvSpPr txBox="1"/>
+          <p:nvPr/>
+        </p:nvSpPr>
+        <p:spPr>
+          <a:xfrm>
+            <a:off x="548640" y="6492240"/>
+            <a:ext cx="6400800" cy="182880"/>
+          </a:xfrm>
+          <a:prstGeom prst="rect">
+            <a:avLst/>
+          </a:prstGeom>
+          <a:noFill/>
+        </p:spPr>
+        <p:txBody>
+          <a:bodyPr wrap="square" lIns="0" rIns="0" tIns="0" bIns="0" anchor="ctr">
+            <a:spAutoFit/>
+          </a:bodyPr>
+          <a:lstStyle/>
+          <a:p>
+            <a:pPr algn="l">
+              <a:spcAft>
+                <a:spcPts val="200"/>
+              </a:spcAft>
+              <a:defRPr sz="900" b="1">
+                <a:solidFill>
+                  <a:srgbClr val="667D88"/>
+                </a:solidFill>
+                <a:latin typeface="Aptos"/>
+              </a:defRPr>
+            </a:pPr>
+            <a:r>
+              <a:t>HIMANSHUDIGITALTWIN  /  MITS GWALIOR</a:t>
+            </a:r>
+          </a:p>
+        </p:txBody>
+      </p:sp>
+      <p:sp>
+        <p:nvSpPr>
+          <p:cNvPr id="9" name="TextBox 8"/>
+          <p:cNvSpPr txBox="1"/>
+          <p:nvPr/>
+        </p:nvSpPr>
+        <p:spPr>
+          <a:xfrm>
+            <a:off x="10607040" y="6492240"/>
+            <a:ext cx="1060704" cy="182880"/>
+          </a:xfrm>
+          <a:prstGeom prst="rect">
+            <a:avLst/>
+          </a:prstGeom>
+          <a:noFill/>
+        </p:spPr>
+        <p:txBody>
+          <a:bodyPr wrap="square" lIns="0" rIns="0" tIns="0" bIns="0" anchor="ctr">
+            <a:spAutoFit/>
+          </a:bodyPr>
+          <a:lstStyle/>
+          <a:p>
+            <a:pPr algn="r">
+              <a:spcAft>
+                <a:spcPts val="200"/>
+              </a:spcAft>
+              <a:defRPr sz="900" b="1">
+                <a:solidFill>
+                  <a:srgbClr val="667D88"/>
+                </a:solidFill>
+                <a:latin typeface="Aptos"/>
+              </a:defRPr>
+            </a:pPr>
+            <a:r>
+              <a:t>05 / 06</a:t>
+            </a:r>
+          </a:p>
+        </p:txBody>
+      </p:sp>
+      <p:sp>
+        <p:nvSpPr>
+          <p:cNvPr id="10" name="Rounded Rectangle 9"/>
+          <p:cNvSpPr/>
+          <p:nvPr/>
+        </p:nvSpPr>
+        <p:spPr>
+          <a:xfrm>
+            <a:off x="612648" y="2203704"/>
+            <a:ext cx="5230368" cy="3072384"/>
+          </a:xfrm>
+          <a:prstGeom prst="roundRect">
+            <a:avLst>
+              <a:gd name="adj" fmla="val 15000"/>
+            </a:avLst>
+          </a:prstGeom>
+          <a:solidFill>
+            <a:srgbClr val="E7F3EF"/>
+          </a:solidFill>
+          <a:ln>
+            <a:noFill/>
+          </a:ln>
+        </p:spPr>
+        <p:style>
+          <a:lnRef idx="1">
+            <a:schemeClr val="accent1"/>
+          </a:lnRef>
+          <a:fillRef idx="3">
+            <a:schemeClr val="accent1"/>
+          </a:fillRef>
+          <a:effectRef idx="2">
+            <a:schemeClr val="accent1"/>
+          </a:effectRef>
+          <a:fontRef idx="minor">
+            <a:schemeClr val="lt1"/>
+          </a:fontRef>
+        </p:style>
+        <p:txBody>
+          <a:bodyPr rtlCol="0" anchor="ctr"/>
+          <a:lstStyle/>
+          <a:p>
+            <a:pPr algn="ctr"/>
+          </a:p>
+        </p:txBody>
+      </p:sp>
+      <p:sp>
+        <p:nvSpPr>
+          <p:cNvPr id="11" name="TextBox 10"/>
+          <p:cNvSpPr txBox="1"/>
+          <p:nvPr/>
+        </p:nvSpPr>
+        <p:spPr>
+          <a:xfrm>
+            <a:off x="932688" y="2514600"/>
+            <a:ext cx="4389120" cy="329184"/>
+          </a:xfrm>
+          <a:prstGeom prst="rect">
+            <a:avLst/>
+          </a:prstGeom>
+          <a:noFill/>
+        </p:spPr>
+        <p:txBody>
+          <a:bodyPr wrap="square" lIns="0" rIns="0" tIns="0" bIns="0" anchor="ctr">
+            <a:spAutoFit/>
+          </a:bodyPr>
+          <a:lstStyle/>
+          <a:p>
+            <a:pPr algn="l">
+              <a:spcAft>
+                <a:spcPts val="200"/>
+              </a:spcAft>
+              <a:defRPr sz="1400" b="1">
+                <a:solidFill>
+                  <a:srgbClr val="167E78"/>
+                </a:solidFill>
+                <a:latin typeface="Aptos"/>
+              </a:defRPr>
+            </a:pPr>
+            <a:r>
+              <a:t>VALID OBSERVATION</a:t>
+            </a:r>
+          </a:p>
+        </p:txBody>
+      </p:sp>
+      <p:sp>
+        <p:nvSpPr>
+          <p:cNvPr id="12" name="TextBox 11"/>
+          <p:cNvSpPr txBox="1"/>
+          <p:nvPr/>
+        </p:nvSpPr>
+        <p:spPr>
+          <a:xfrm>
+            <a:off x="941832" y="3063240"/>
+            <a:ext cx="2788920" cy="905256"/>
+          </a:xfrm>
+          <a:prstGeom prst="rect">
+            <a:avLst/>
+          </a:prstGeom>
+          <a:noFill/>
+        </p:spPr>
+        <p:txBody>
+          <a:bodyPr wrap="square" lIns="0" rIns="0" tIns="0" bIns="0" anchor="ctr">
+            <a:spAutoFit/>
+          </a:bodyPr>
+          <a:lstStyle/>
+          <a:p>
+            <a:pPr algn="l">
+              <a:spcAft>
+                <a:spcPts val="200"/>
+              </a:spcAft>
+              <a:defRPr sz="6100" b="1">
+                <a:solidFill>
+                  <a:srgbClr val="172F3B"/>
+                </a:solidFill>
+                <a:latin typeface="Aptos"/>
+              </a:defRPr>
+            </a:pPr>
+            <a:r>
+              <a:t>144</a:t>
+            </a:r>
+          </a:p>
+        </p:txBody>
+      </p:sp>
+      <p:sp>
+        <p:nvSpPr>
+          <p:cNvPr id="13" name="TextBox 12"/>
+          <p:cNvSpPr txBox="1"/>
+          <p:nvPr/>
+        </p:nvSpPr>
+        <p:spPr>
+          <a:xfrm>
+            <a:off x="3639312" y="3429000"/>
+            <a:ext cx="1371600" cy="265176"/>
+          </a:xfrm>
+          <a:prstGeom prst="rect">
+            <a:avLst/>
+          </a:prstGeom>
+          <a:noFill/>
+        </p:spPr>
+        <p:txBody>
+          <a:bodyPr wrap="square" lIns="0" rIns="0" tIns="0" bIns="0" anchor="ctr">
+            <a:spAutoFit/>
+          </a:bodyPr>
+          <a:lstStyle/>
+          <a:p>
+            <a:pPr algn="l">
+              <a:spcAft>
+                <a:spcPts val="200"/>
+              </a:spcAft>
+              <a:defRPr sz="1600" b="0">
+                <a:solidFill>
+                  <a:srgbClr val="667D88"/>
+                </a:solidFill>
+                <a:latin typeface="Aptos"/>
+              </a:defRPr>
+            </a:pPr>
+            <a:r>
+              <a:t>mg/dL</a:t>
+            </a:r>
+          </a:p>
+        </p:txBody>
+      </p:sp>
+      <p:cxnSp>
+        <p:nvCxnSpPr>
+          <p:cNvPr id="14" name="Connector 13"/>
+          <p:cNvCxnSpPr/>
+          <p:nvPr/>
+        </p:nvCxnSpPr>
+        <p:spPr>
+          <a:xfrm>
+            <a:off x="932688" y="4315968"/>
+            <a:ext cx="4526280" cy="0"/>
+          </a:xfrm>
+          <a:prstGeom prst="line">
+            <a:avLst/>
+          </a:prstGeom>
+          <a:ln w="17780">
+            <a:solidFill>
+              <a:srgbClr val="BDD3CD"/>
+            </a:solidFill>
+          </a:ln>
+        </p:spPr>
+        <p:style>
+          <a:lnRef idx="2">
+            <a:schemeClr val="accent1"/>
+          </a:lnRef>
+          <a:fillRef idx="0">
+            <a:schemeClr val="accent1"/>
+          </a:fillRef>
+          <a:effectRef idx="1">
+            <a:schemeClr val="accent1"/>
+          </a:effectRef>
+          <a:fontRef idx="minor">
+            <a:schemeClr val="tx1"/>
+          </a:fontRef>
+        </p:style>
+      </p:cxnSp>
+      <p:sp>
+        <p:nvSpPr>
+          <p:cNvPr id="15" name="TextBox 14"/>
+          <p:cNvSpPr txBox="1"/>
+          <p:nvPr/>
+        </p:nvSpPr>
+        <p:spPr>
+          <a:xfrm>
+            <a:off x="941832" y="4471416"/>
+            <a:ext cx="4297680" cy="310896"/>
+          </a:xfrm>
+          <a:prstGeom prst="rect">
+            <a:avLst/>
+          </a:prstGeom>
+          <a:noFill/>
+        </p:spPr>
+        <p:txBody>
+          <a:bodyPr wrap="square" lIns="0" rIns="0" tIns="0" bIns="0" anchor="ctr">
+            <a:spAutoFit/>
+          </a:bodyPr>
+          <a:lstStyle/>
+          <a:p>
+            <a:pPr algn="l">
+              <a:spcAft>
+                <a:spcPts val="200"/>
+              </a:spcAft>
+              <a:defRPr sz="2200" b="1">
+                <a:solidFill>
+                  <a:srgbClr val="167E78"/>
+                </a:solidFill>
+                <a:latin typeface="Aptos"/>
+              </a:defRPr>
+            </a:pPr>
+            <a:r>
+              <a:t>Forecast available</a:t>
+            </a:r>
+          </a:p>
+        </p:txBody>
+      </p:sp>
+      <p:sp>
+        <p:nvSpPr>
+          <p:cNvPr id="16" name="TextBox 15"/>
+          <p:cNvSpPr txBox="1"/>
+          <p:nvPr/>
+        </p:nvSpPr>
+        <p:spPr>
+          <a:xfrm>
+            <a:off x="941832" y="4855464"/>
+            <a:ext cx="4389120" cy="237744"/>
+          </a:xfrm>
+          <a:prstGeom prst="rect">
+            <a:avLst/>
+          </a:prstGeom>
+          <a:noFill/>
+        </p:spPr>
+        <p:txBody>
+          <a:bodyPr wrap="square" lIns="0" rIns="0" tIns="0" bIns="0" anchor="ctr">
+            <a:spAutoFit/>
+          </a:bodyPr>
+          <a:lstStyle/>
+          <a:p>
+            <a:pPr algn="l">
+              <a:spcAft>
+                <a:spcPts val="200"/>
+              </a:spcAft>
+              <a:defRPr sz="1200" b="0">
+                <a:solidFill>
+                  <a:srgbClr val="667D88"/>
+                </a:solidFill>
+                <a:latin typeface="Aptos"/>
+              </a:defRPr>
+            </a:pPr>
+            <a:r>
+              <a:t>Synthetic example at 12:15 PM</a:t>
+            </a:r>
+          </a:p>
+        </p:txBody>
+      </p:sp>
+      <p:sp>
+        <p:nvSpPr>
+          <p:cNvPr id="17" name="Rounded Rectangle 16"/>
+          <p:cNvSpPr/>
+          <p:nvPr/>
+        </p:nvSpPr>
+        <p:spPr>
+          <a:xfrm>
+            <a:off x="6035040" y="2203704"/>
+            <a:ext cx="5532120" cy="3072384"/>
+          </a:xfrm>
+          <a:prstGeom prst="roundRect">
+            <a:avLst>
+              <a:gd name="adj" fmla="val 15000"/>
+            </a:avLst>
+          </a:prstGeom>
+          <a:solidFill>
+            <a:srgbClr val="F7EDE7"/>
+          </a:solidFill>
+          <a:ln>
+            <a:noFill/>
+          </a:ln>
+        </p:spPr>
+        <p:style>
+          <a:lnRef idx="1">
+            <a:schemeClr val="accent1"/>
+          </a:lnRef>
+          <a:fillRef idx="3">
+            <a:schemeClr val="accent1"/>
+          </a:fillRef>
+          <a:effectRef idx="2">
+            <a:schemeClr val="accent1"/>
+          </a:effectRef>
+          <a:fontRef idx="minor">
+            <a:schemeClr val="lt1"/>
+          </a:fontRef>
+        </p:style>
+        <p:txBody>
+          <a:bodyPr rtlCol="0" anchor="ctr"/>
+          <a:lstStyle/>
+          <a:p>
+            <a:pPr algn="ctr"/>
+          </a:p>
+        </p:txBody>
+      </p:sp>
+      <p:sp>
+        <p:nvSpPr>
+          <p:cNvPr id="18" name="TextBox 17"/>
+          <p:cNvSpPr txBox="1"/>
+          <p:nvPr/>
+        </p:nvSpPr>
+        <p:spPr>
+          <a:xfrm>
+            <a:off x="6355080" y="2514600"/>
+            <a:ext cx="4572000" cy="338328"/>
+          </a:xfrm>
+          <a:prstGeom prst="rect">
+            <a:avLst/>
+          </a:prstGeom>
+          <a:noFill/>
+        </p:spPr>
+        <p:txBody>
+          <a:bodyPr wrap="square" lIns="0" rIns="0" tIns="0" bIns="0" anchor="ctr">
+            <a:spAutoFit/>
+          </a:bodyPr>
+          <a:lstStyle/>
+          <a:p>
+            <a:pPr algn="l">
+              <a:spcAft>
+                <a:spcPts val="200"/>
+              </a:spcAft>
+              <a:defRPr sz="1400" b="1">
+                <a:solidFill>
+                  <a:srgbClr val="B46F4B"/>
+                </a:solidFill>
+                <a:latin typeface="Aptos"/>
+              </a:defRPr>
+            </a:pPr>
+            <a:r>
+              <a:t>STALE SENSOR / 14:25</a:t>
+            </a:r>
+          </a:p>
+        </p:txBody>
+      </p:sp>
+      <p:sp>
+        <p:nvSpPr>
+          <p:cNvPr id="19" name="TextBox 18"/>
+          <p:cNvSpPr txBox="1"/>
+          <p:nvPr/>
+        </p:nvSpPr>
+        <p:spPr>
+          <a:xfrm>
+            <a:off x="6364224" y="3154680"/>
+            <a:ext cx="4846320" cy="740664"/>
+          </a:xfrm>
+          <a:prstGeom prst="rect">
+            <a:avLst/>
+          </a:prstGeom>
+          <a:noFill/>
+        </p:spPr>
+        <p:txBody>
+          <a:bodyPr wrap="square" lIns="0" rIns="0" tIns="0" bIns="0" anchor="ctr">
+            <a:spAutoFit/>
+          </a:bodyPr>
+          <a:lstStyle/>
+          <a:p>
+            <a:pPr algn="l">
+              <a:spcAft>
+                <a:spcPts val="200"/>
+              </a:spcAft>
+              <a:defRPr sz="3800" b="1">
+                <a:solidFill>
+                  <a:srgbClr val="172F3B"/>
+                </a:solidFill>
+                <a:latin typeface="Aptos"/>
+              </a:defRPr>
+            </a:pPr>
+            <a:r>
+              <a:t>WITHHELD</a:t>
+            </a:r>
+          </a:p>
+        </p:txBody>
+      </p:sp>
+      <p:cxnSp>
+        <p:nvCxnSpPr>
+          <p:cNvPr id="20" name="Connector 19"/>
+          <p:cNvCxnSpPr/>
+          <p:nvPr/>
+        </p:nvCxnSpPr>
+        <p:spPr>
+          <a:xfrm>
+            <a:off x="6373368" y="4315968"/>
+            <a:ext cx="4754880" cy="0"/>
+          </a:xfrm>
+          <a:prstGeom prst="line">
+            <a:avLst/>
+          </a:prstGeom>
+          <a:ln w="17780">
+            <a:solidFill>
+              <a:srgbClr val="DDC7B8"/>
+            </a:solidFill>
+          </a:ln>
+        </p:spPr>
+        <p:style>
+          <a:lnRef idx="2">
+            <a:schemeClr val="accent1"/>
+          </a:lnRef>
+          <a:fillRef idx="0">
+            <a:schemeClr val="accent1"/>
+          </a:fillRef>
+          <a:effectRef idx="1">
+            <a:schemeClr val="accent1"/>
+          </a:effectRef>
+          <a:fontRef idx="minor">
+            <a:schemeClr val="tx1"/>
+          </a:fontRef>
+        </p:style>
+      </p:cxnSp>
+      <p:sp>
+        <p:nvSpPr>
+          <p:cNvPr id="21" name="TextBox 20"/>
+          <p:cNvSpPr txBox="1"/>
+          <p:nvPr/>
+        </p:nvSpPr>
+        <p:spPr>
+          <a:xfrm>
+            <a:off x="6373368" y="4471416"/>
+            <a:ext cx="4626864" cy="685800"/>
+          </a:xfrm>
+          <a:prstGeom prst="rect">
+            <a:avLst/>
+          </a:prstGeom>
+          <a:noFill/>
+        </p:spPr>
+        <p:txBody>
+          <a:bodyPr wrap="square" lIns="0" rIns="0" tIns="0" bIns="0" anchor="ctr">
+            <a:spAutoFit/>
+          </a:bodyPr>
+          <a:lstStyle/>
+          <a:p>
+            <a:pPr algn="l">
+              <a:spcAft>
+                <a:spcPts val="200"/>
+              </a:spcAft>
+              <a:defRPr sz="1800" b="1">
+                <a:solidFill>
+                  <a:srgbClr val="B46F4B"/>
+                </a:solidFill>
+                <a:latin typeface="Aptos"/>
+              </a:defRPr>
+            </a:pPr>
+            <a:r>
+              <a:t>No verified glucose  ·  No forecast  ·  No risk</a:t>
+            </a:r>
+          </a:p>
+        </p:txBody>
+      </p:sp>
+      <p:sp>
+        <p:nvSpPr>
+          <p:cNvPr id="22" name="TextBox 21"/>
+          <p:cNvSpPr txBox="1"/>
+          <p:nvPr/>
+        </p:nvSpPr>
+        <p:spPr>
+          <a:xfrm>
+            <a:off x="749808" y="5495544"/>
+            <a:ext cx="10744200" cy="365760"/>
+          </a:xfrm>
+          <a:prstGeom prst="rect">
+            <a:avLst/>
+          </a:prstGeom>
+          <a:noFill/>
+        </p:spPr>
+        <p:txBody>
+          <a:bodyPr wrap="square" lIns="0" rIns="0" tIns="0" bIns="0" anchor="ctr">
+            <a:spAutoFit/>
+          </a:bodyPr>
+          <a:lstStyle/>
+          <a:p>
+            <a:pPr algn="l">
+              <a:spcAft>
+                <a:spcPts val="200"/>
+              </a:spcAft>
+              <a:defRPr sz="1500" b="0">
+                <a:solidFill>
+                  <a:srgbClr val="172F3B"/>
+                </a:solidFill>
+                <a:latin typeface="Aptos"/>
+              </a:defRPr>
+            </a:pPr>
+            <a:r>
+              <a:t>Up to 15 minutes: model may use the last valid reading for a provisional estimate.</a:t>
+            </a:r>
+          </a:p>
+        </p:txBody>
+      </p:sp>
+      <p:sp>
+        <p:nvSpPr>
+          <p:cNvPr id="23" name="TextBox 22"/>
+          <p:cNvSpPr txBox="1"/>
+          <p:nvPr/>
+        </p:nvSpPr>
+        <p:spPr>
+          <a:xfrm>
+            <a:off x="749808" y="5897880"/>
+            <a:ext cx="10744200" cy="310896"/>
+          </a:xfrm>
+          <a:prstGeom prst="rect">
+            <a:avLst/>
+          </a:prstGeom>
+          <a:noFill/>
+        </p:spPr>
+        <p:txBody>
+          <a:bodyPr wrap="square" lIns="0" rIns="0" tIns="0" bIns="0" anchor="ctr">
+            <a:spAutoFit/>
+          </a:bodyPr>
+          <a:lstStyle/>
+          <a:p>
+            <a:pPr algn="l">
+              <a:spcAft>
+                <a:spcPts val="200"/>
+              </a:spcAft>
+              <a:defRPr sz="1400" b="0">
+                <a:solidFill>
+                  <a:srgbClr val="667D88"/>
+                </a:solidFill>
+                <a:latin typeface="Aptos"/>
+              </a:defRPr>
+            </a:pPr>
+            <a:r>
+              <a:t>Beyond the freshness rule: no estimate is shown. Imputed values are never drawn as measured CGM.</a:t>
+            </a:r>
+          </a:p>
+        </p:txBody>
+      </p:sp>
     </p:spTree>
   </p:cSld>
   <p:clrMapOvr>
@@ -3303,30 +9694,1283 @@
         <p:nvPr/>
       </p:nvGrpSpPr>
       <p:grpSpPr/>
-      <p:pic>
-        <p:nvPicPr>
-          <p:cNvPr id="2" name="Picture 1" descr="image.png"/>
-          <p:cNvPicPr>
-            <a:picLocks noChangeAspect="1"/>
-          </p:cNvPicPr>
-          <p:nvPr/>
-        </p:nvPicPr>
-        <p:blipFill>
-          <a:blip r:embed="rId2"/>
-          <a:stretch>
-            <a:fillRect/>
-          </a:stretch>
-        </p:blipFill>
+      <p:sp>
+        <p:nvSpPr>
+          <p:cNvPr id="2" name="Rectangle 1"/>
+          <p:cNvSpPr/>
+          <p:nvPr/>
+        </p:nvSpPr>
         <p:spPr>
           <a:xfrm>
             <a:off x="0" y="0"/>
-            <a:ext cx="14630400" cy="8229600"/>
-          </a:xfrm>
-          <a:prstGeom prst="rect">
-            <a:avLst/>
-          </a:prstGeom>
-        </p:spPr>
-      </p:pic>
+            <a:ext cx="12191695" cy="6858000"/>
+          </a:xfrm>
+          <a:prstGeom prst="rect">
+            <a:avLst/>
+          </a:prstGeom>
+          <a:solidFill>
+            <a:srgbClr val="F5F8F7"/>
+          </a:solidFill>
+          <a:ln>
+            <a:noFill/>
+          </a:ln>
+        </p:spPr>
+        <p:style>
+          <a:lnRef idx="1">
+            <a:schemeClr val="accent1"/>
+          </a:lnRef>
+          <a:fillRef idx="3">
+            <a:schemeClr val="accent1"/>
+          </a:fillRef>
+          <a:effectRef idx="2">
+            <a:schemeClr val="accent1"/>
+          </a:effectRef>
+          <a:fontRef idx="minor">
+            <a:schemeClr val="lt1"/>
+          </a:fontRef>
+        </p:style>
+        <p:txBody>
+          <a:bodyPr rtlCol="0" anchor="ctr"/>
+          <a:lstStyle/>
+          <a:p>
+            <a:pPr algn="ctr"/>
+          </a:p>
+        </p:txBody>
+      </p:sp>
+      <p:sp>
+        <p:nvSpPr>
+          <p:cNvPr id="3" name="Rectangle 2"/>
+          <p:cNvSpPr/>
+          <p:nvPr/>
+        </p:nvSpPr>
+        <p:spPr>
+          <a:xfrm>
+            <a:off x="0" y="0"/>
+            <a:ext cx="82296" cy="6858000"/>
+          </a:xfrm>
+          <a:prstGeom prst="rect">
+            <a:avLst/>
+          </a:prstGeom>
+          <a:solidFill>
+            <a:srgbClr val="167E78"/>
+          </a:solidFill>
+          <a:ln>
+            <a:noFill/>
+          </a:ln>
+        </p:spPr>
+        <p:style>
+          <a:lnRef idx="1">
+            <a:schemeClr val="accent1"/>
+          </a:lnRef>
+          <a:fillRef idx="3">
+            <a:schemeClr val="accent1"/>
+          </a:fillRef>
+          <a:effectRef idx="2">
+            <a:schemeClr val="accent1"/>
+          </a:effectRef>
+          <a:fontRef idx="minor">
+            <a:schemeClr val="lt1"/>
+          </a:fontRef>
+        </p:style>
+        <p:txBody>
+          <a:bodyPr rtlCol="0" anchor="ctr"/>
+          <a:lstStyle/>
+          <a:p>
+            <a:pPr algn="ctr"/>
+          </a:p>
+        </p:txBody>
+      </p:sp>
+      <p:sp>
+        <p:nvSpPr>
+          <p:cNvPr id="4" name="TextBox 3"/>
+          <p:cNvSpPr txBox="1"/>
+          <p:nvPr/>
+        </p:nvSpPr>
+        <p:spPr>
+          <a:xfrm>
+            <a:off x="548640" y="310896"/>
+            <a:ext cx="9144000" cy="246888"/>
+          </a:xfrm>
+          <a:prstGeom prst="rect">
+            <a:avLst/>
+          </a:prstGeom>
+          <a:noFill/>
+        </p:spPr>
+        <p:txBody>
+          <a:bodyPr wrap="square" lIns="0" rIns="0" tIns="0" bIns="0" anchor="ctr">
+            <a:spAutoFit/>
+          </a:bodyPr>
+          <a:lstStyle/>
+          <a:p>
+            <a:pPr algn="l">
+              <a:spcAft>
+                <a:spcPts val="200"/>
+              </a:spcAft>
+              <a:defRPr sz="1000" b="1">
+                <a:solidFill>
+                  <a:srgbClr val="167E78"/>
+                </a:solidFill>
+                <a:latin typeface="Aptos"/>
+              </a:defRPr>
+            </a:pPr>
+            <a:r>
+              <a:t>05 / EVIDENCE AND LIMITS</a:t>
+            </a:r>
+          </a:p>
+        </p:txBody>
+      </p:sp>
+      <p:sp>
+        <p:nvSpPr>
+          <p:cNvPr id="5" name="TextBox 4"/>
+          <p:cNvSpPr txBox="1"/>
+          <p:nvPr/>
+        </p:nvSpPr>
+        <p:spPr>
+          <a:xfrm>
+            <a:off x="548640" y="685800"/>
+            <a:ext cx="10927080" cy="1024128"/>
+          </a:xfrm>
+          <a:prstGeom prst="rect">
+            <a:avLst/>
+          </a:prstGeom>
+          <a:noFill/>
+        </p:spPr>
+        <p:txBody>
+          <a:bodyPr wrap="square" lIns="0" rIns="0" tIns="0" bIns="0" anchor="ctr">
+            <a:spAutoFit/>
+          </a:bodyPr>
+          <a:lstStyle/>
+          <a:p>
+            <a:pPr algn="l">
+              <a:spcAft>
+                <a:spcPts val="200"/>
+              </a:spcAft>
+              <a:defRPr sz="3400" b="1">
+                <a:solidFill>
+                  <a:srgbClr val="172F3B"/>
+                </a:solidFill>
+                <a:latin typeface="Aptos"/>
+              </a:defRPr>
+            </a:pPr>
+            <a:r>
+              <a:t>A measured research signal. Not a deployed clinical model.</a:t>
+            </a:r>
+          </a:p>
+        </p:txBody>
+      </p:sp>
+      <p:sp>
+        <p:nvSpPr>
+          <p:cNvPr id="6" name="TextBox 5"/>
+          <p:cNvSpPr txBox="1"/>
+          <p:nvPr/>
+        </p:nvSpPr>
+        <p:spPr>
+          <a:xfrm>
+            <a:off x="566928" y="1700784"/>
+            <a:ext cx="10881360" cy="411480"/>
+          </a:xfrm>
+          <a:prstGeom prst="rect">
+            <a:avLst/>
+          </a:prstGeom>
+          <a:noFill/>
+        </p:spPr>
+        <p:txBody>
+          <a:bodyPr wrap="square" lIns="0" rIns="0" tIns="0" bIns="0" anchor="ctr">
+            <a:spAutoFit/>
+          </a:bodyPr>
+          <a:lstStyle/>
+          <a:p>
+            <a:pPr algn="l">
+              <a:spcAft>
+                <a:spcPts val="200"/>
+              </a:spcAft>
+              <a:defRPr sz="1500" b="0">
+                <a:solidFill>
+                  <a:srgbClr val="667D88"/>
+                </a:solidFill>
+                <a:latin typeface="Aptos"/>
+              </a:defRPr>
+            </a:pPr>
+            <a:r>
+              <a:t>Independent CGMacros study, patient-grouped holdout; lower MAE is better.</a:t>
+            </a:r>
+          </a:p>
+        </p:txBody>
+      </p:sp>
+      <p:cxnSp>
+        <p:nvCxnSpPr>
+          <p:cNvPr id="7" name="Connector 6"/>
+          <p:cNvCxnSpPr/>
+          <p:nvPr/>
+        </p:nvCxnSpPr>
+        <p:spPr>
+          <a:xfrm>
+            <a:off x="548640" y="6446520"/>
+            <a:ext cx="11109960" cy="0"/>
+          </a:xfrm>
+          <a:prstGeom prst="line">
+            <a:avLst/>
+          </a:prstGeom>
+          <a:ln w="12700">
+            <a:solidFill>
+              <a:srgbClr val="D9E4E6"/>
+            </a:solidFill>
+          </a:ln>
+        </p:spPr>
+        <p:style>
+          <a:lnRef idx="2">
+            <a:schemeClr val="accent1"/>
+          </a:lnRef>
+          <a:fillRef idx="0">
+            <a:schemeClr val="accent1"/>
+          </a:fillRef>
+          <a:effectRef idx="1">
+            <a:schemeClr val="accent1"/>
+          </a:effectRef>
+          <a:fontRef idx="minor">
+            <a:schemeClr val="tx1"/>
+          </a:fontRef>
+        </p:style>
+      </p:cxnSp>
+      <p:sp>
+        <p:nvSpPr>
+          <p:cNvPr id="8" name="TextBox 7"/>
+          <p:cNvSpPr txBox="1"/>
+          <p:nvPr/>
+        </p:nvSpPr>
+        <p:spPr>
+          <a:xfrm>
+            <a:off x="548640" y="6492240"/>
+            <a:ext cx="6400800" cy="182880"/>
+          </a:xfrm>
+          <a:prstGeom prst="rect">
+            <a:avLst/>
+          </a:prstGeom>
+          <a:noFill/>
+        </p:spPr>
+        <p:txBody>
+          <a:bodyPr wrap="square" lIns="0" rIns="0" tIns="0" bIns="0" anchor="ctr">
+            <a:spAutoFit/>
+          </a:bodyPr>
+          <a:lstStyle/>
+          <a:p>
+            <a:pPr algn="l">
+              <a:spcAft>
+                <a:spcPts val="200"/>
+              </a:spcAft>
+              <a:defRPr sz="900" b="1">
+                <a:solidFill>
+                  <a:srgbClr val="667D88"/>
+                </a:solidFill>
+                <a:latin typeface="Aptos"/>
+              </a:defRPr>
+            </a:pPr>
+            <a:r>
+              <a:t>HIMANSHUDIGITALTWIN  /  MITS GWALIOR</a:t>
+            </a:r>
+          </a:p>
+        </p:txBody>
+      </p:sp>
+      <p:sp>
+        <p:nvSpPr>
+          <p:cNvPr id="9" name="TextBox 8"/>
+          <p:cNvSpPr txBox="1"/>
+          <p:nvPr/>
+        </p:nvSpPr>
+        <p:spPr>
+          <a:xfrm>
+            <a:off x="10607040" y="6492240"/>
+            <a:ext cx="1060704" cy="182880"/>
+          </a:xfrm>
+          <a:prstGeom prst="rect">
+            <a:avLst/>
+          </a:prstGeom>
+          <a:noFill/>
+        </p:spPr>
+        <p:txBody>
+          <a:bodyPr wrap="square" lIns="0" rIns="0" tIns="0" bIns="0" anchor="ctr">
+            <a:spAutoFit/>
+          </a:bodyPr>
+          <a:lstStyle/>
+          <a:p>
+            <a:pPr algn="r">
+              <a:spcAft>
+                <a:spcPts val="200"/>
+              </a:spcAft>
+              <a:defRPr sz="900" b="1">
+                <a:solidFill>
+                  <a:srgbClr val="667D88"/>
+                </a:solidFill>
+                <a:latin typeface="Aptos"/>
+              </a:defRPr>
+            </a:pPr>
+            <a:r>
+              <a:t>06 / 06</a:t>
+            </a:r>
+          </a:p>
+        </p:txBody>
+      </p:sp>
+      <p:sp>
+        <p:nvSpPr>
+          <p:cNvPr id="10" name="Rounded Rectangle 9"/>
+          <p:cNvSpPr/>
+          <p:nvPr/>
+        </p:nvSpPr>
+        <p:spPr>
+          <a:xfrm>
+            <a:off x="594360" y="2157984"/>
+            <a:ext cx="6812280" cy="3602736"/>
+          </a:xfrm>
+          <a:prstGeom prst="roundRect">
+            <a:avLst>
+              <a:gd name="adj" fmla="val 15000"/>
+            </a:avLst>
+          </a:prstGeom>
+          <a:solidFill>
+            <a:srgbClr val="FFFFFF"/>
+          </a:solidFill>
+          <a:ln>
+            <a:noFill/>
+          </a:ln>
+        </p:spPr>
+        <p:style>
+          <a:lnRef idx="1">
+            <a:schemeClr val="accent1"/>
+          </a:lnRef>
+          <a:fillRef idx="3">
+            <a:schemeClr val="accent1"/>
+          </a:fillRef>
+          <a:effectRef idx="2">
+            <a:schemeClr val="accent1"/>
+          </a:effectRef>
+          <a:fontRef idx="minor">
+            <a:schemeClr val="lt1"/>
+          </a:fontRef>
+        </p:style>
+        <p:txBody>
+          <a:bodyPr rtlCol="0" anchor="ctr"/>
+          <a:lstStyle/>
+          <a:p>
+            <a:pPr algn="ctr"/>
+          </a:p>
+        </p:txBody>
+      </p:sp>
+      <p:sp>
+        <p:nvSpPr>
+          <p:cNvPr id="11" name="TextBox 10"/>
+          <p:cNvSpPr txBox="1"/>
+          <p:nvPr/>
+        </p:nvSpPr>
+        <p:spPr>
+          <a:xfrm>
+            <a:off x="859536" y="2395728"/>
+            <a:ext cx="2743200" cy="320040"/>
+          </a:xfrm>
+          <a:prstGeom prst="rect">
+            <a:avLst/>
+          </a:prstGeom>
+          <a:noFill/>
+        </p:spPr>
+        <p:txBody>
+          <a:bodyPr wrap="square" lIns="0" rIns="0" tIns="0" bIns="0" anchor="ctr">
+            <a:spAutoFit/>
+          </a:bodyPr>
+          <a:lstStyle/>
+          <a:p>
+            <a:pPr algn="l">
+              <a:spcAft>
+                <a:spcPts val="200"/>
+              </a:spcAft>
+              <a:defRPr sz="1200" b="1">
+                <a:solidFill>
+                  <a:srgbClr val="167E78"/>
+                </a:solidFill>
+                <a:latin typeface="Aptos"/>
+              </a:defRPr>
+            </a:pPr>
+            <a:r>
+              <a:t>MAE  /  mg/dL</a:t>
+            </a:r>
+          </a:p>
+        </p:txBody>
+      </p:sp>
+      <p:sp>
+        <p:nvSpPr>
+          <p:cNvPr id="12" name="TextBox 11"/>
+          <p:cNvSpPr txBox="1"/>
+          <p:nvPr/>
+        </p:nvSpPr>
+        <p:spPr>
+          <a:xfrm>
+            <a:off x="877824" y="2862072"/>
+            <a:ext cx="1051560" cy="274320"/>
+          </a:xfrm>
+          <a:prstGeom prst="rect">
+            <a:avLst/>
+          </a:prstGeom>
+          <a:noFill/>
+        </p:spPr>
+        <p:txBody>
+          <a:bodyPr wrap="square" lIns="0" rIns="0" tIns="0" bIns="0" anchor="ctr">
+            <a:spAutoFit/>
+          </a:bodyPr>
+          <a:lstStyle/>
+          <a:p>
+            <a:pPr algn="l">
+              <a:spcAft>
+                <a:spcPts val="200"/>
+              </a:spcAft>
+              <a:defRPr sz="1400" b="1">
+                <a:solidFill>
+                  <a:srgbClr val="172F3B"/>
+                </a:solidFill>
+                <a:latin typeface="Aptos"/>
+              </a:defRPr>
+            </a:pPr>
+            <a:r>
+              <a:t>30 min</a:t>
+            </a:r>
+          </a:p>
+        </p:txBody>
+      </p:sp>
+      <p:sp>
+        <p:nvSpPr>
+          <p:cNvPr id="13" name="Rectangle 12"/>
+          <p:cNvSpPr/>
+          <p:nvPr/>
+        </p:nvSpPr>
+        <p:spPr>
+          <a:xfrm>
+            <a:off x="1920240" y="2862072"/>
+            <a:ext cx="1641656" cy="173736"/>
+          </a:xfrm>
+          <a:prstGeom prst="rect">
+            <a:avLst/>
+          </a:prstGeom>
+          <a:solidFill>
+            <a:srgbClr val="9FB7C1"/>
+          </a:solidFill>
+          <a:ln>
+            <a:noFill/>
+          </a:ln>
+        </p:spPr>
+        <p:style>
+          <a:lnRef idx="1">
+            <a:schemeClr val="accent1"/>
+          </a:lnRef>
+          <a:fillRef idx="3">
+            <a:schemeClr val="accent1"/>
+          </a:fillRef>
+          <a:effectRef idx="2">
+            <a:schemeClr val="accent1"/>
+          </a:effectRef>
+          <a:fontRef idx="minor">
+            <a:schemeClr val="lt1"/>
+          </a:fontRef>
+        </p:style>
+        <p:txBody>
+          <a:bodyPr rtlCol="0" anchor="ctr"/>
+          <a:lstStyle/>
+          <a:p>
+            <a:pPr algn="ctr"/>
+          </a:p>
+        </p:txBody>
+      </p:sp>
+      <p:sp>
+        <p:nvSpPr>
+          <p:cNvPr id="14" name="Rectangle 13"/>
+          <p:cNvSpPr/>
+          <p:nvPr/>
+        </p:nvSpPr>
+        <p:spPr>
+          <a:xfrm>
+            <a:off x="1920240" y="3108960"/>
+            <a:ext cx="1450018" cy="173736"/>
+          </a:xfrm>
+          <a:prstGeom prst="rect">
+            <a:avLst/>
+          </a:prstGeom>
+          <a:solidFill>
+            <a:srgbClr val="167E78"/>
+          </a:solidFill>
+          <a:ln>
+            <a:noFill/>
+          </a:ln>
+        </p:spPr>
+        <p:style>
+          <a:lnRef idx="1">
+            <a:schemeClr val="accent1"/>
+          </a:lnRef>
+          <a:fillRef idx="3">
+            <a:schemeClr val="accent1"/>
+          </a:fillRef>
+          <a:effectRef idx="2">
+            <a:schemeClr val="accent1"/>
+          </a:effectRef>
+          <a:fontRef idx="minor">
+            <a:schemeClr val="lt1"/>
+          </a:fontRef>
+        </p:style>
+        <p:txBody>
+          <a:bodyPr rtlCol="0" anchor="ctr"/>
+          <a:lstStyle/>
+          <a:p>
+            <a:pPr algn="ctr"/>
+          </a:p>
+        </p:txBody>
+      </p:sp>
+      <p:sp>
+        <p:nvSpPr>
+          <p:cNvPr id="15" name="TextBox 14"/>
+          <p:cNvSpPr txBox="1"/>
+          <p:nvPr/>
+        </p:nvSpPr>
+        <p:spPr>
+          <a:xfrm>
+            <a:off x="5852160" y="2852928"/>
+            <a:ext cx="1252728" cy="429768"/>
+          </a:xfrm>
+          <a:prstGeom prst="rect">
+            <a:avLst/>
+          </a:prstGeom>
+          <a:noFill/>
+        </p:spPr>
+        <p:txBody>
+          <a:bodyPr wrap="square" lIns="0" rIns="0" tIns="0" bIns="0" anchor="ctr">
+            <a:spAutoFit/>
+          </a:bodyPr>
+          <a:lstStyle/>
+          <a:p>
+            <a:pPr algn="l">
+              <a:spcAft>
+                <a:spcPts val="200"/>
+              </a:spcAft>
+              <a:defRPr sz="1300" b="1">
+                <a:solidFill>
+                  <a:srgbClr val="172F3B"/>
+                </a:solidFill>
+                <a:latin typeface="Aptos"/>
+              </a:defRPr>
+            </a:pPr>
+            <a:r>
+              <a:t>14.82 / 13.09</a:t>
+            </a:r>
+          </a:p>
+        </p:txBody>
+      </p:sp>
+      <p:sp>
+        <p:nvSpPr>
+          <p:cNvPr id="16" name="TextBox 15"/>
+          <p:cNvSpPr txBox="1"/>
+          <p:nvPr/>
+        </p:nvSpPr>
+        <p:spPr>
+          <a:xfrm>
+            <a:off x="877824" y="3694176"/>
+            <a:ext cx="1051560" cy="274320"/>
+          </a:xfrm>
+          <a:prstGeom prst="rect">
+            <a:avLst/>
+          </a:prstGeom>
+          <a:noFill/>
+        </p:spPr>
+        <p:txBody>
+          <a:bodyPr wrap="square" lIns="0" rIns="0" tIns="0" bIns="0" anchor="ctr">
+            <a:spAutoFit/>
+          </a:bodyPr>
+          <a:lstStyle/>
+          <a:p>
+            <a:pPr algn="l">
+              <a:spcAft>
+                <a:spcPts val="200"/>
+              </a:spcAft>
+              <a:defRPr sz="1400" b="1">
+                <a:solidFill>
+                  <a:srgbClr val="172F3B"/>
+                </a:solidFill>
+                <a:latin typeface="Aptos"/>
+              </a:defRPr>
+            </a:pPr>
+            <a:r>
+              <a:t>60 min</a:t>
+            </a:r>
+          </a:p>
+        </p:txBody>
+      </p:sp>
+      <p:sp>
+        <p:nvSpPr>
+          <p:cNvPr id="17" name="Rectangle 16"/>
+          <p:cNvSpPr/>
+          <p:nvPr/>
+        </p:nvSpPr>
+        <p:spPr>
+          <a:xfrm>
+            <a:off x="1920240" y="3694176"/>
+            <a:ext cx="2541133" cy="173736"/>
+          </a:xfrm>
+          <a:prstGeom prst="rect">
+            <a:avLst/>
+          </a:prstGeom>
+          <a:solidFill>
+            <a:srgbClr val="9FB7C1"/>
+          </a:solidFill>
+          <a:ln>
+            <a:noFill/>
+          </a:ln>
+        </p:spPr>
+        <p:style>
+          <a:lnRef idx="1">
+            <a:schemeClr val="accent1"/>
+          </a:lnRef>
+          <a:fillRef idx="3">
+            <a:schemeClr val="accent1"/>
+          </a:fillRef>
+          <a:effectRef idx="2">
+            <a:schemeClr val="accent1"/>
+          </a:effectRef>
+          <a:fontRef idx="minor">
+            <a:schemeClr val="lt1"/>
+          </a:fontRef>
+        </p:style>
+        <p:txBody>
+          <a:bodyPr rtlCol="0" anchor="ctr"/>
+          <a:lstStyle/>
+          <a:p>
+            <a:pPr algn="ctr"/>
+          </a:p>
+        </p:txBody>
+      </p:sp>
+      <p:sp>
+        <p:nvSpPr>
+          <p:cNvPr id="18" name="Rectangle 17"/>
+          <p:cNvSpPr/>
+          <p:nvPr/>
+        </p:nvSpPr>
+        <p:spPr>
+          <a:xfrm>
+            <a:off x="1920240" y="3941064"/>
+            <a:ext cx="2300755" cy="173736"/>
+          </a:xfrm>
+          <a:prstGeom prst="rect">
+            <a:avLst/>
+          </a:prstGeom>
+          <a:solidFill>
+            <a:srgbClr val="167E78"/>
+          </a:solidFill>
+          <a:ln>
+            <a:noFill/>
+          </a:ln>
+        </p:spPr>
+        <p:style>
+          <a:lnRef idx="1">
+            <a:schemeClr val="accent1"/>
+          </a:lnRef>
+          <a:fillRef idx="3">
+            <a:schemeClr val="accent1"/>
+          </a:fillRef>
+          <a:effectRef idx="2">
+            <a:schemeClr val="accent1"/>
+          </a:effectRef>
+          <a:fontRef idx="minor">
+            <a:schemeClr val="lt1"/>
+          </a:fontRef>
+        </p:style>
+        <p:txBody>
+          <a:bodyPr rtlCol="0" anchor="ctr"/>
+          <a:lstStyle/>
+          <a:p>
+            <a:pPr algn="ctr"/>
+          </a:p>
+        </p:txBody>
+      </p:sp>
+      <p:sp>
+        <p:nvSpPr>
+          <p:cNvPr id="19" name="TextBox 18"/>
+          <p:cNvSpPr txBox="1"/>
+          <p:nvPr/>
+        </p:nvSpPr>
+        <p:spPr>
+          <a:xfrm>
+            <a:off x="5852160" y="3685032"/>
+            <a:ext cx="1252728" cy="429768"/>
+          </a:xfrm>
+          <a:prstGeom prst="rect">
+            <a:avLst/>
+          </a:prstGeom>
+          <a:noFill/>
+        </p:spPr>
+        <p:txBody>
+          <a:bodyPr wrap="square" lIns="0" rIns="0" tIns="0" bIns="0" anchor="ctr">
+            <a:spAutoFit/>
+          </a:bodyPr>
+          <a:lstStyle/>
+          <a:p>
+            <a:pPr algn="l">
+              <a:spcAft>
+                <a:spcPts val="200"/>
+              </a:spcAft>
+              <a:defRPr sz="1300" b="1">
+                <a:solidFill>
+                  <a:srgbClr val="172F3B"/>
+                </a:solidFill>
+                <a:latin typeface="Aptos"/>
+              </a:defRPr>
+            </a:pPr>
+            <a:r>
+              <a:t>22.94 / 20.77</a:t>
+            </a:r>
+          </a:p>
+        </p:txBody>
+      </p:sp>
+      <p:sp>
+        <p:nvSpPr>
+          <p:cNvPr id="20" name="TextBox 19"/>
+          <p:cNvSpPr txBox="1"/>
+          <p:nvPr/>
+        </p:nvSpPr>
+        <p:spPr>
+          <a:xfrm>
+            <a:off x="877824" y="4526280"/>
+            <a:ext cx="1051560" cy="274320"/>
+          </a:xfrm>
+          <a:prstGeom prst="rect">
+            <a:avLst/>
+          </a:prstGeom>
+          <a:noFill/>
+        </p:spPr>
+        <p:txBody>
+          <a:bodyPr wrap="square" lIns="0" rIns="0" tIns="0" bIns="0" anchor="ctr">
+            <a:spAutoFit/>
+          </a:bodyPr>
+          <a:lstStyle/>
+          <a:p>
+            <a:pPr algn="l">
+              <a:spcAft>
+                <a:spcPts val="200"/>
+              </a:spcAft>
+              <a:defRPr sz="1400" b="1">
+                <a:solidFill>
+                  <a:srgbClr val="172F3B"/>
+                </a:solidFill>
+                <a:latin typeface="Aptos"/>
+              </a:defRPr>
+            </a:pPr>
+            <a:r>
+              <a:t>120 min</a:t>
+            </a:r>
+          </a:p>
+        </p:txBody>
+      </p:sp>
+      <p:sp>
+        <p:nvSpPr>
+          <p:cNvPr id="21" name="Rectangle 20"/>
+          <p:cNvSpPr/>
+          <p:nvPr/>
+        </p:nvSpPr>
+        <p:spPr>
+          <a:xfrm>
+            <a:off x="1920240" y="4526280"/>
+            <a:ext cx="3595692" cy="173736"/>
+          </a:xfrm>
+          <a:prstGeom prst="rect">
+            <a:avLst/>
+          </a:prstGeom>
+          <a:solidFill>
+            <a:srgbClr val="9FB7C1"/>
+          </a:solidFill>
+          <a:ln>
+            <a:noFill/>
+          </a:ln>
+        </p:spPr>
+        <p:style>
+          <a:lnRef idx="1">
+            <a:schemeClr val="accent1"/>
+          </a:lnRef>
+          <a:fillRef idx="3">
+            <a:schemeClr val="accent1"/>
+          </a:fillRef>
+          <a:effectRef idx="2">
+            <a:schemeClr val="accent1"/>
+          </a:effectRef>
+          <a:fontRef idx="minor">
+            <a:schemeClr val="lt1"/>
+          </a:fontRef>
+        </p:style>
+        <p:txBody>
+          <a:bodyPr rtlCol="0" anchor="ctr"/>
+          <a:lstStyle/>
+          <a:p>
+            <a:pPr algn="ctr"/>
+          </a:p>
+        </p:txBody>
+      </p:sp>
+      <p:sp>
+        <p:nvSpPr>
+          <p:cNvPr id="22" name="Rectangle 21"/>
+          <p:cNvSpPr/>
+          <p:nvPr/>
+        </p:nvSpPr>
+        <p:spPr>
+          <a:xfrm>
+            <a:off x="1920240" y="4773168"/>
+            <a:ext cx="3065089" cy="173736"/>
+          </a:xfrm>
+          <a:prstGeom prst="rect">
+            <a:avLst/>
+          </a:prstGeom>
+          <a:solidFill>
+            <a:srgbClr val="167E78"/>
+          </a:solidFill>
+          <a:ln>
+            <a:noFill/>
+          </a:ln>
+        </p:spPr>
+        <p:style>
+          <a:lnRef idx="1">
+            <a:schemeClr val="accent1"/>
+          </a:lnRef>
+          <a:fillRef idx="3">
+            <a:schemeClr val="accent1"/>
+          </a:fillRef>
+          <a:effectRef idx="2">
+            <a:schemeClr val="accent1"/>
+          </a:effectRef>
+          <a:fontRef idx="minor">
+            <a:schemeClr val="lt1"/>
+          </a:fontRef>
+        </p:style>
+        <p:txBody>
+          <a:bodyPr rtlCol="0" anchor="ctr"/>
+          <a:lstStyle/>
+          <a:p>
+            <a:pPr algn="ctr"/>
+          </a:p>
+        </p:txBody>
+      </p:sp>
+      <p:sp>
+        <p:nvSpPr>
+          <p:cNvPr id="23" name="TextBox 22"/>
+          <p:cNvSpPr txBox="1"/>
+          <p:nvPr/>
+        </p:nvSpPr>
+        <p:spPr>
+          <a:xfrm>
+            <a:off x="5852160" y="4517136"/>
+            <a:ext cx="1252728" cy="429768"/>
+          </a:xfrm>
+          <a:prstGeom prst="rect">
+            <a:avLst/>
+          </a:prstGeom>
+          <a:noFill/>
+        </p:spPr>
+        <p:txBody>
+          <a:bodyPr wrap="square" lIns="0" rIns="0" tIns="0" bIns="0" anchor="ctr">
+            <a:spAutoFit/>
+          </a:bodyPr>
+          <a:lstStyle/>
+          <a:p>
+            <a:pPr algn="l">
+              <a:spcAft>
+                <a:spcPts val="200"/>
+              </a:spcAft>
+              <a:defRPr sz="1300" b="1">
+                <a:solidFill>
+                  <a:srgbClr val="172F3B"/>
+                </a:solidFill>
+                <a:latin typeface="Aptos"/>
+              </a:defRPr>
+            </a:pPr>
+            <a:r>
+              <a:t>32.46 / 27.67</a:t>
+            </a:r>
+          </a:p>
+        </p:txBody>
+      </p:sp>
+      <p:sp>
+        <p:nvSpPr>
+          <p:cNvPr id="24" name="TextBox 23"/>
+          <p:cNvSpPr txBox="1"/>
+          <p:nvPr/>
+        </p:nvSpPr>
+        <p:spPr>
+          <a:xfrm>
+            <a:off x="877824" y="5440680"/>
+            <a:ext cx="6300216" cy="228600"/>
+          </a:xfrm>
+          <a:prstGeom prst="rect">
+            <a:avLst/>
+          </a:prstGeom>
+          <a:noFill/>
+        </p:spPr>
+        <p:txBody>
+          <a:bodyPr wrap="square" lIns="0" rIns="0" tIns="0" bIns="0" anchor="ctr">
+            <a:spAutoFit/>
+          </a:bodyPr>
+          <a:lstStyle/>
+          <a:p>
+            <a:pPr algn="l">
+              <a:spcAft>
+                <a:spcPts val="200"/>
+              </a:spcAft>
+              <a:defRPr sz="1100" b="0">
+                <a:solidFill>
+                  <a:srgbClr val="667D88"/>
+                </a:solidFill>
+                <a:latin typeface="Aptos"/>
+              </a:defRPr>
+            </a:pPr>
+            <a:r>
+              <a:t>Gray: persistence baseline     Teal: independent study model</a:t>
+            </a:r>
+          </a:p>
+        </p:txBody>
+      </p:sp>
+      <p:sp>
+        <p:nvSpPr>
+          <p:cNvPr id="25" name="Rounded Rectangle 24"/>
+          <p:cNvSpPr/>
+          <p:nvPr/>
+        </p:nvSpPr>
+        <p:spPr>
+          <a:xfrm>
+            <a:off x="7616952" y="2157984"/>
+            <a:ext cx="3977639" cy="3602736"/>
+          </a:xfrm>
+          <a:prstGeom prst="roundRect">
+            <a:avLst>
+              <a:gd name="adj" fmla="val 15000"/>
+            </a:avLst>
+          </a:prstGeom>
+          <a:solidFill>
+            <a:srgbClr val="E8F0F0"/>
+          </a:solidFill>
+          <a:ln>
+            <a:noFill/>
+          </a:ln>
+        </p:spPr>
+        <p:style>
+          <a:lnRef idx="1">
+            <a:schemeClr val="accent1"/>
+          </a:lnRef>
+          <a:fillRef idx="3">
+            <a:schemeClr val="accent1"/>
+          </a:fillRef>
+          <a:effectRef idx="2">
+            <a:schemeClr val="accent1"/>
+          </a:effectRef>
+          <a:fontRef idx="minor">
+            <a:schemeClr val="lt1"/>
+          </a:fontRef>
+        </p:style>
+        <p:txBody>
+          <a:bodyPr rtlCol="0" anchor="ctr"/>
+          <a:lstStyle/>
+          <a:p>
+            <a:pPr algn="ctr"/>
+          </a:p>
+        </p:txBody>
+      </p:sp>
+      <p:sp>
+        <p:nvSpPr>
+          <p:cNvPr id="26" name="TextBox 25"/>
+          <p:cNvSpPr txBox="1"/>
+          <p:nvPr/>
+        </p:nvSpPr>
+        <p:spPr>
+          <a:xfrm>
+            <a:off x="7909560" y="2432304"/>
+            <a:ext cx="3346704" cy="246888"/>
+          </a:xfrm>
+          <a:prstGeom prst="rect">
+            <a:avLst/>
+          </a:prstGeom>
+          <a:noFill/>
+        </p:spPr>
+        <p:txBody>
+          <a:bodyPr wrap="square" lIns="0" rIns="0" tIns="0" bIns="0" anchor="ctr">
+            <a:spAutoFit/>
+          </a:bodyPr>
+          <a:lstStyle/>
+          <a:p>
+            <a:pPr algn="l">
+              <a:spcAft>
+                <a:spcPts val="200"/>
+              </a:spcAft>
+              <a:defRPr sz="1200" b="1">
+                <a:solidFill>
+                  <a:srgbClr val="167E78"/>
+                </a:solidFill>
+                <a:latin typeface="Aptos"/>
+              </a:defRPr>
+            </a:pPr>
+            <a:r>
+              <a:t>EVIDENCE BOUNDARY</a:t>
+            </a:r>
+          </a:p>
+        </p:txBody>
+      </p:sp>
+      <p:sp>
+        <p:nvSpPr>
+          <p:cNvPr id="27" name="TextBox 26"/>
+          <p:cNvSpPr txBox="1"/>
+          <p:nvPr/>
+        </p:nvSpPr>
+        <p:spPr>
+          <a:xfrm>
+            <a:off x="7909560" y="2816352"/>
+            <a:ext cx="1024128" cy="576072"/>
+          </a:xfrm>
+          <a:prstGeom prst="rect">
+            <a:avLst/>
+          </a:prstGeom>
+          <a:noFill/>
+        </p:spPr>
+        <p:txBody>
+          <a:bodyPr wrap="square" lIns="0" rIns="0" tIns="0" bIns="0" anchor="ctr">
+            <a:spAutoFit/>
+          </a:bodyPr>
+          <a:lstStyle/>
+          <a:p>
+            <a:pPr algn="l">
+              <a:spcAft>
+                <a:spcPts val="200"/>
+              </a:spcAft>
+              <a:defRPr sz="3500" b="1">
+                <a:solidFill>
+                  <a:srgbClr val="172F3B"/>
+                </a:solidFill>
+                <a:latin typeface="Aptos"/>
+              </a:defRPr>
+            </a:pPr>
+            <a:r>
+              <a:t>45</a:t>
+            </a:r>
+          </a:p>
+        </p:txBody>
+      </p:sp>
+      <p:sp>
+        <p:nvSpPr>
+          <p:cNvPr id="28" name="TextBox 27"/>
+          <p:cNvSpPr txBox="1"/>
+          <p:nvPr/>
+        </p:nvSpPr>
+        <p:spPr>
+          <a:xfrm>
+            <a:off x="8933688" y="2980944"/>
+            <a:ext cx="2404872" cy="256032"/>
+          </a:xfrm>
+          <a:prstGeom prst="rect">
+            <a:avLst/>
+          </a:prstGeom>
+          <a:noFill/>
+        </p:spPr>
+        <p:txBody>
+          <a:bodyPr wrap="square" lIns="0" rIns="0" tIns="0" bIns="0" anchor="ctr">
+            <a:spAutoFit/>
+          </a:bodyPr>
+          <a:lstStyle/>
+          <a:p>
+            <a:pPr algn="l">
+              <a:spcAft>
+                <a:spcPts val="200"/>
+              </a:spcAft>
+              <a:defRPr sz="1300" b="0">
+                <a:solidFill>
+                  <a:srgbClr val="667D88"/>
+                </a:solidFill>
+                <a:latin typeface="Aptos"/>
+              </a:defRPr>
+            </a:pPr>
+            <a:r>
+              <a:t>participants  /  14 with T2D</a:t>
+            </a:r>
+          </a:p>
+        </p:txBody>
+      </p:sp>
+      <p:cxnSp>
+        <p:nvCxnSpPr>
+          <p:cNvPr id="29" name="Connector 28"/>
+          <p:cNvCxnSpPr/>
+          <p:nvPr/>
+        </p:nvCxnSpPr>
+        <p:spPr>
+          <a:xfrm>
+            <a:off x="7900416" y="3520440"/>
+            <a:ext cx="3337560" cy="0"/>
+          </a:xfrm>
+          <a:prstGeom prst="line">
+            <a:avLst/>
+          </a:prstGeom>
+          <a:ln w="17780">
+            <a:solidFill>
+              <a:srgbClr val="C6D6D9"/>
+            </a:solidFill>
+          </a:ln>
+        </p:spPr>
+        <p:style>
+          <a:lnRef idx="2">
+            <a:schemeClr val="accent1"/>
+          </a:lnRef>
+          <a:fillRef idx="0">
+            <a:schemeClr val="accent1"/>
+          </a:fillRef>
+          <a:effectRef idx="1">
+            <a:schemeClr val="accent1"/>
+          </a:effectRef>
+          <a:fontRef idx="minor">
+            <a:schemeClr val="tx1"/>
+          </a:fontRef>
+        </p:style>
+      </p:cxnSp>
+      <p:sp>
+        <p:nvSpPr>
+          <p:cNvPr id="30" name="TextBox 29"/>
+          <p:cNvSpPr txBox="1"/>
+          <p:nvPr/>
+        </p:nvSpPr>
+        <p:spPr>
+          <a:xfrm>
+            <a:off x="7909560" y="3730752"/>
+            <a:ext cx="3246120" cy="832104"/>
+          </a:xfrm>
+          <a:prstGeom prst="rect">
+            <a:avLst/>
+          </a:prstGeom>
+          <a:noFill/>
+        </p:spPr>
+        <p:txBody>
+          <a:bodyPr wrap="square" lIns="0" rIns="0" tIns="0" bIns="0" anchor="ctr">
+            <a:spAutoFit/>
+          </a:bodyPr>
+          <a:lstStyle/>
+          <a:p>
+            <a:pPr algn="l">
+              <a:spcAft>
+                <a:spcPts val="200"/>
+              </a:spcAft>
+              <a:defRPr sz="1700" b="1">
+                <a:solidFill>
+                  <a:srgbClr val="172F3B"/>
+                </a:solidFill>
+                <a:latin typeface="Aptos"/>
+              </a:defRPr>
+            </a:pPr>
+            <a:r>
+              <a:t>Only 3 T2D participants in the</a:t>
+            </a:r>
+          </a:p>
+          <a:p>
+            <a:pPr algn="l">
+              <a:spcAft>
+                <a:spcPts val="200"/>
+              </a:spcAft>
+              <a:defRPr sz="1700" b="1">
+                <a:solidFill>
+                  <a:srgbClr val="172F3B"/>
+                </a:solidFill>
+                <a:latin typeface="Aptos"/>
+              </a:defRPr>
+            </a:pPr>
+            <a:r>
+              <a:t>10-person primary holdout.</a:t>
+            </a:r>
+          </a:p>
+        </p:txBody>
+      </p:sp>
+      <p:sp>
+        <p:nvSpPr>
+          <p:cNvPr id="31" name="TextBox 30"/>
+          <p:cNvSpPr txBox="1"/>
+          <p:nvPr/>
+        </p:nvSpPr>
+        <p:spPr>
+          <a:xfrm>
+            <a:off x="7909560" y="4736592"/>
+            <a:ext cx="3310128" cy="731520"/>
+          </a:xfrm>
+          <a:prstGeom prst="rect">
+            <a:avLst/>
+          </a:prstGeom>
+          <a:noFill/>
+        </p:spPr>
+        <p:txBody>
+          <a:bodyPr wrap="square" lIns="0" rIns="0" tIns="0" bIns="0" anchor="ctr">
+            <a:spAutoFit/>
+          </a:bodyPr>
+          <a:lstStyle/>
+          <a:p>
+            <a:pPr algn="l">
+              <a:spcAft>
+                <a:spcPts val="200"/>
+              </a:spcAft>
+              <a:defRPr sz="1500" b="1">
+                <a:solidFill>
+                  <a:srgbClr val="B46F4B"/>
+                </a:solidFill>
+                <a:latin typeface="Aptos"/>
+              </a:defRPr>
+            </a:pPr>
+            <a:r>
+              <a:t>The study model is NOT the model</a:t>
+            </a:r>
+          </a:p>
+          <a:p>
+            <a:pPr algn="l">
+              <a:spcAft>
+                <a:spcPts val="200"/>
+              </a:spcAft>
+              <a:defRPr sz="1500" b="1">
+                <a:solidFill>
+                  <a:srgbClr val="B46F4B"/>
+                </a:solidFill>
+                <a:latin typeface="Aptos"/>
+              </a:defRPr>
+            </a:pPr>
+            <a:r>
+              <a:t>running in the synthetic dashboard.</a:t>
+            </a:r>
+          </a:p>
+        </p:txBody>
+      </p:sp>
+      <p:sp>
+        <p:nvSpPr>
+          <p:cNvPr id="32" name="TextBox 31"/>
+          <p:cNvSpPr txBox="1"/>
+          <p:nvPr/>
+        </p:nvSpPr>
+        <p:spPr>
+          <a:xfrm>
+            <a:off x="667512" y="5943600"/>
+            <a:ext cx="10972800" cy="365760"/>
+          </a:xfrm>
+          <a:prstGeom prst="rect">
+            <a:avLst/>
+          </a:prstGeom>
+          <a:noFill/>
+        </p:spPr>
+        <p:txBody>
+          <a:bodyPr wrap="square" lIns="0" rIns="0" tIns="0" bIns="0" anchor="ctr">
+            <a:spAutoFit/>
+          </a:bodyPr>
+          <a:lstStyle/>
+          <a:p>
+            <a:pPr algn="l">
+              <a:spcAft>
+                <a:spcPts val="200"/>
+              </a:spcAft>
+              <a:defRPr sz="1500" b="1">
+                <a:solidFill>
+                  <a:srgbClr val="172F3B"/>
+                </a:solidFill>
+                <a:latin typeface="Aptos"/>
+              </a:defRPr>
+            </a:pPr>
+            <a:r>
+              <a:t>What the judge can verify: deterministic replay, sensor-gap abstention, and research provenance.</a:t>
+            </a:r>
+          </a:p>
+        </p:txBody>
+      </p:sp>
     </p:spTree>
   </p:cSld>
   <p:clrMapOvr>

--- a/submission/HimanshuDigitalTwin_Presentation.pptx
+++ b/submission/HimanshuDigitalTwin_Presentation.pptx
@@ -7231,7 +7231,7 @@
               </a:defRPr>
             </a:pPr>
             <a:r>
-              <a:t>03 / DEMONSTRATION</a:t>
+              <a:t>03 / WORKING PROTOTYPE</a:t>
             </a:r>
           </a:p>
         </p:txBody>
@@ -7270,7 +7270,7 @@
               </a:defRPr>
             </a:pPr>
             <a:r>
-              <a:t>Six checkpoints. One reproducible synthetic patient.</a:t>
+              <a:t>The running demo — not just an architecture diagram.</a:t>
             </a:r>
           </a:p>
         </p:txBody>
@@ -7309,7 +7309,7 @@
               </a:defRPr>
             </a:pPr>
             <a:r>
-              <a:t>The default FastAPI dashboard lets judges jump directly to each state.</a:t>
+              <a:t>Actual FastAPI dashboard, reproducible synthetic lunch checkpoint.</a:t>
             </a:r>
           </a:p>
         </p:txBody>
@@ -7435,8 +7435,8 @@
         </p:nvSpPr>
         <p:spPr>
           <a:xfrm>
-            <a:off x="603504" y="2240280"/>
-            <a:ext cx="3584448" cy="1261872"/>
+            <a:off x="566928" y="2221992"/>
+            <a:ext cx="7808975" cy="3858768"/>
           </a:xfrm>
           <a:prstGeom prst="roundRect">
             <a:avLst>
@@ -7474,22 +7474,87 @@
           </a:p>
         </p:txBody>
       </p:sp>
-      <p:sp>
-        <p:nvSpPr>
-          <p:cNvPr id="11" name="Rectangle 10"/>
+      <p:pic>
+        <p:nvPicPr>
+          <p:cNvPr id="11" name="Picture 10" descr="Live_Demo_Lunch.png"/>
+          <p:cNvPicPr>
+            <a:picLocks noChangeAspect="1"/>
+          </p:cNvPicPr>
+          <p:nvPr/>
+        </p:nvPicPr>
+        <p:blipFill>
+          <a:blip r:embed="rId2"/>
+          <a:stretch>
+            <a:fillRect/>
+          </a:stretch>
+        </p:blipFill>
+        <p:spPr>
+          <a:xfrm>
+            <a:off x="676656" y="2331720"/>
+            <a:ext cx="7580375" cy="3429000"/>
+          </a:xfrm>
+          <a:prstGeom prst="rect">
+            <a:avLst/>
+          </a:prstGeom>
+        </p:spPr>
+      </p:pic>
+      <p:sp>
+        <p:nvSpPr>
+          <p:cNvPr id="12" name="TextBox 11"/>
+          <p:cNvSpPr txBox="1"/>
+          <p:nvPr/>
+        </p:nvSpPr>
+        <p:spPr>
+          <a:xfrm>
+            <a:off x="777240" y="5797296"/>
+            <a:ext cx="7296912" cy="201168"/>
+          </a:xfrm>
+          <a:prstGeom prst="rect">
+            <a:avLst/>
+          </a:prstGeom>
+          <a:noFill/>
+        </p:spPr>
+        <p:txBody>
+          <a:bodyPr wrap="square" lIns="0" rIns="0" tIns="0" bIns="0" anchor="ctr">
+            <a:spAutoFit/>
+          </a:bodyPr>
+          <a:lstStyle/>
+          <a:p>
+            <a:pPr algn="l">
+              <a:spcAft>
+                <a:spcPts val="200"/>
+              </a:spcAft>
+              <a:defRPr sz="1000" b="1">
+                <a:solidFill>
+                  <a:srgbClr val="167E78"/>
+                </a:solidFill>
+                <a:latin typeface="Aptos"/>
+              </a:defRPr>
+            </a:pPr>
+            <a:r>
+              <a:t>ACTUAL LOCAL DEMO   /   LUNCH CHECKPOINT</a:t>
+            </a:r>
+          </a:p>
+        </p:txBody>
+      </p:sp>
+      <p:sp>
+        <p:nvSpPr>
+          <p:cNvPr id="13" name="Rounded Rectangle 12"/>
           <p:cNvSpPr/>
           <p:nvPr/>
         </p:nvSpPr>
         <p:spPr>
           <a:xfrm>
-            <a:off x="603504" y="2240280"/>
-            <a:ext cx="50292" cy="1261872"/>
-          </a:xfrm>
-          <a:prstGeom prst="rect">
-            <a:avLst/>
+            <a:off x="8558784" y="2221992"/>
+            <a:ext cx="3035808" cy="3858768"/>
+          </a:xfrm>
+          <a:prstGeom prst="roundRect">
+            <a:avLst>
+              <a:gd name="adj" fmla="val 15000"/>
+            </a:avLst>
           </a:prstGeom>
           <a:solidFill>
-            <a:srgbClr val="167E78"/>
+            <a:srgbClr val="E5F0EE"/>
           </a:solidFill>
           <a:ln>
             <a:noFill/>
@@ -7519,31 +7584,31 @@
       </p:sp>
       <p:sp>
         <p:nvSpPr>
-          <p:cNvPr id="12" name="TextBox 11"/>
-          <p:cNvSpPr txBox="1"/>
-          <p:nvPr/>
-        </p:nvSpPr>
-        <p:spPr>
-          <a:xfrm>
-            <a:off x="804672" y="2395728"/>
-            <a:ext cx="502920" cy="365760"/>
-          </a:xfrm>
-          <a:prstGeom prst="rect">
-            <a:avLst/>
-          </a:prstGeom>
-          <a:noFill/>
-        </p:spPr>
-        <p:txBody>
-          <a:bodyPr wrap="square" lIns="0" rIns="0" tIns="0" bIns="0" anchor="ctr">
-            <a:spAutoFit/>
-          </a:bodyPr>
-          <a:lstStyle/>
-          <a:p>
-            <a:pPr algn="l">
-              <a:spcAft>
-                <a:spcPts val="200"/>
-              </a:spcAft>
-              <a:defRPr sz="2300" b="1">
+          <p:cNvPr id="14" name="TextBox 13"/>
+          <p:cNvSpPr txBox="1"/>
+          <p:nvPr/>
+        </p:nvSpPr>
+        <p:spPr>
+          <a:xfrm>
+            <a:off x="8805672" y="2459736"/>
+            <a:ext cx="2514600" cy="237744"/>
+          </a:xfrm>
+          <a:prstGeom prst="rect">
+            <a:avLst/>
+          </a:prstGeom>
+          <a:noFill/>
+        </p:spPr>
+        <p:txBody>
+          <a:bodyPr wrap="square" lIns="0" rIns="0" tIns="0" bIns="0" anchor="ctr">
+            <a:spAutoFit/>
+          </a:bodyPr>
+          <a:lstStyle/>
+          <a:p>
+            <a:pPr algn="l">
+              <a:spcAft>
+                <a:spcPts val="200"/>
+              </a:spcAft>
+              <a:defRPr sz="1200" b="1">
                 <a:solidFill>
                   <a:srgbClr val="167E78"/>
                 </a:solidFill>
@@ -7551,38 +7616,38 @@
               </a:defRPr>
             </a:pPr>
             <a:r>
-              <a:t>01</a:t>
-            </a:r>
-          </a:p>
-        </p:txBody>
-      </p:sp>
-      <p:sp>
-        <p:nvSpPr>
-          <p:cNvPr id="13" name="TextBox 12"/>
-          <p:cNvSpPr txBox="1"/>
-          <p:nvPr/>
-        </p:nvSpPr>
-        <p:spPr>
-          <a:xfrm>
-            <a:off x="1362456" y="2377440"/>
-            <a:ext cx="2596896" cy="338328"/>
-          </a:xfrm>
-          <a:prstGeom prst="rect">
-            <a:avLst/>
-          </a:prstGeom>
-          <a:noFill/>
-        </p:spPr>
-        <p:txBody>
-          <a:bodyPr wrap="square" lIns="0" rIns="0" tIns="0" bIns="0" anchor="ctr">
-            <a:spAutoFit/>
-          </a:bodyPr>
-          <a:lstStyle/>
-          <a:p>
-            <a:pPr algn="l">
-              <a:spcAft>
-                <a:spcPts val="200"/>
-              </a:spcAft>
-              <a:defRPr sz="1600" b="1">
+              <a:t>JUDGE PATH</a:t>
+            </a:r>
+          </a:p>
+        </p:txBody>
+      </p:sp>
+      <p:sp>
+        <p:nvSpPr>
+          <p:cNvPr id="15" name="TextBox 14"/>
+          <p:cNvSpPr txBox="1"/>
+          <p:nvPr/>
+        </p:nvSpPr>
+        <p:spPr>
+          <a:xfrm>
+            <a:off x="8805672" y="2834640"/>
+            <a:ext cx="2560320" cy="210312"/>
+          </a:xfrm>
+          <a:prstGeom prst="rect">
+            <a:avLst/>
+          </a:prstGeom>
+          <a:noFill/>
+        </p:spPr>
+        <p:txBody>
+          <a:bodyPr wrap="square" lIns="0" rIns="0" tIns="0" bIns="0" anchor="ctr">
+            <a:spAutoFit/>
+          </a:bodyPr>
+          <a:lstStyle/>
+          <a:p>
+            <a:pPr algn="l">
+              <a:spcAft>
+                <a:spcPts val="200"/>
+              </a:spcAft>
+              <a:defRPr sz="1400" b="1">
                 <a:solidFill>
                   <a:srgbClr val="172F3B"/>
                 </a:solidFill>
@@ -7590,38 +7655,38 @@
               </a:defRPr>
             </a:pPr>
             <a:r>
-              <a:t>BASELINE</a:t>
-            </a:r>
-          </a:p>
-        </p:txBody>
-      </p:sp>
-      <p:sp>
-        <p:nvSpPr>
-          <p:cNvPr id="14" name="TextBox 13"/>
-          <p:cNvSpPr txBox="1"/>
-          <p:nvPr/>
-        </p:nvSpPr>
-        <p:spPr>
-          <a:xfrm>
-            <a:off x="1371600" y="2807208"/>
-            <a:ext cx="2633472" cy="320040"/>
-          </a:xfrm>
-          <a:prstGeom prst="rect">
-            <a:avLst/>
-          </a:prstGeom>
-          <a:noFill/>
-        </p:spPr>
-        <p:txBody>
-          <a:bodyPr wrap="square" lIns="0" rIns="0" tIns="0" bIns="0" anchor="ctr">
-            <a:spAutoFit/>
-          </a:bodyPr>
-          <a:lstStyle/>
-          <a:p>
-            <a:pPr algn="l">
-              <a:spcAft>
-                <a:spcPts val="200"/>
-              </a:spcAft>
-              <a:defRPr sz="1300" b="0">
+              <a:t>01 · Baseline</a:t>
+            </a:r>
+          </a:p>
+        </p:txBody>
+      </p:sp>
+      <p:sp>
+        <p:nvSpPr>
+          <p:cNvPr id="16" name="TextBox 15"/>
+          <p:cNvSpPr txBox="1"/>
+          <p:nvPr/>
+        </p:nvSpPr>
+        <p:spPr>
+          <a:xfrm>
+            <a:off x="8805672" y="3035808"/>
+            <a:ext cx="2560320" cy="182880"/>
+          </a:xfrm>
+          <a:prstGeom prst="rect">
+            <a:avLst/>
+          </a:prstGeom>
+          <a:noFill/>
+        </p:spPr>
+        <p:txBody>
+          <a:bodyPr wrap="square" lIns="0" rIns="0" tIns="0" bIns="0" anchor="ctr">
+            <a:spAutoFit/>
+          </a:bodyPr>
+          <a:lstStyle/>
+          <a:p>
+            <a:pPr algn="l">
+              <a:spcAft>
+                <a:spcPts val="200"/>
+              </a:spcAft>
+              <a:defRPr sz="1000" b="0">
                 <a:solidFill>
                   <a:srgbClr val="667D88"/>
                 </a:solidFill>
@@ -7629,98 +7694,8 @@
               </a:defRPr>
             </a:pPr>
             <a:r>
-              <a:t>Profile + first valid CGM</a:t>
-            </a:r>
-          </a:p>
-        </p:txBody>
-      </p:sp>
-      <p:sp>
-        <p:nvSpPr>
-          <p:cNvPr id="15" name="Rounded Rectangle 14"/>
-          <p:cNvSpPr/>
-          <p:nvPr/>
-        </p:nvSpPr>
-        <p:spPr>
-          <a:xfrm>
-            <a:off x="4425696" y="2240280"/>
-            <a:ext cx="3584448" cy="1261872"/>
-          </a:xfrm>
-          <a:prstGeom prst="roundRect">
-            <a:avLst>
-              <a:gd name="adj" fmla="val 15000"/>
-            </a:avLst>
-          </a:prstGeom>
-          <a:solidFill>
-            <a:srgbClr val="FFFFFF"/>
-          </a:solidFill>
-          <a:ln w="12700">
-            <a:solidFill>
-              <a:srgbClr val="D9E4E6"/>
-            </a:solidFill>
-          </a:ln>
-        </p:spPr>
-        <p:style>
-          <a:lnRef idx="1">
-            <a:schemeClr val="accent1"/>
-          </a:lnRef>
-          <a:fillRef idx="3">
-            <a:schemeClr val="accent1"/>
-          </a:fillRef>
-          <a:effectRef idx="2">
-            <a:schemeClr val="accent1"/>
-          </a:effectRef>
-          <a:fontRef idx="minor">
-            <a:schemeClr val="lt1"/>
-          </a:fontRef>
-        </p:style>
-        <p:txBody>
-          <a:bodyPr rtlCol="0" anchor="ctr"/>
-          <a:lstStyle/>
-          <a:p>
-            <a:pPr algn="ctr"/>
-          </a:p>
-        </p:txBody>
-      </p:sp>
-      <p:sp>
-        <p:nvSpPr>
-          <p:cNvPr id="16" name="Rectangle 15"/>
-          <p:cNvSpPr/>
-          <p:nvPr/>
-        </p:nvSpPr>
-        <p:spPr>
-          <a:xfrm>
-            <a:off x="4425696" y="2240280"/>
-            <a:ext cx="50292" cy="1261872"/>
-          </a:xfrm>
-          <a:prstGeom prst="rect">
-            <a:avLst/>
-          </a:prstGeom>
-          <a:solidFill>
-            <a:srgbClr val="167E78"/>
-          </a:solidFill>
-          <a:ln>
-            <a:noFill/>
-          </a:ln>
-        </p:spPr>
-        <p:style>
-          <a:lnRef idx="1">
-            <a:schemeClr val="accent1"/>
-          </a:lnRef>
-          <a:fillRef idx="3">
-            <a:schemeClr val="accent1"/>
-          </a:fillRef>
-          <a:effectRef idx="2">
-            <a:schemeClr val="accent1"/>
-          </a:effectRef>
-          <a:fontRef idx="minor">
-            <a:schemeClr val="lt1"/>
-          </a:fontRef>
-        </p:style>
-        <p:txBody>
-          <a:bodyPr rtlCol="0" anchor="ctr"/>
-          <a:lstStyle/>
-          <a:p>
-            <a:pPr algn="ctr"/>
+              <a:t>Initial reading</a:t>
+            </a:r>
           </a:p>
         </p:txBody>
       </p:sp>
@@ -7732,33 +7707,33 @@
         </p:nvSpPr>
         <p:spPr>
           <a:xfrm>
-            <a:off x="4626864" y="2395728"/>
-            <a:ext cx="502920" cy="365760"/>
-          </a:xfrm>
-          <a:prstGeom prst="rect">
-            <a:avLst/>
-          </a:prstGeom>
-          <a:noFill/>
-        </p:spPr>
-        <p:txBody>
-          <a:bodyPr wrap="square" lIns="0" rIns="0" tIns="0" bIns="0" anchor="ctr">
-            <a:spAutoFit/>
-          </a:bodyPr>
-          <a:lstStyle/>
-          <a:p>
-            <a:pPr algn="l">
-              <a:spcAft>
-                <a:spcPts val="200"/>
-              </a:spcAft>
-              <a:defRPr sz="2300" b="1">
-                <a:solidFill>
-                  <a:srgbClr val="167E78"/>
-                </a:solidFill>
-                <a:latin typeface="Aptos"/>
-              </a:defRPr>
-            </a:pPr>
-            <a:r>
-              <a:t>02</a:t>
+            <a:off x="8805672" y="3282696"/>
+            <a:ext cx="2560320" cy="210312"/>
+          </a:xfrm>
+          <a:prstGeom prst="rect">
+            <a:avLst/>
+          </a:prstGeom>
+          <a:noFill/>
+        </p:spPr>
+        <p:txBody>
+          <a:bodyPr wrap="square" lIns="0" rIns="0" tIns="0" bIns="0" anchor="ctr">
+            <a:spAutoFit/>
+          </a:bodyPr>
+          <a:lstStyle/>
+          <a:p>
+            <a:pPr algn="l">
+              <a:spcAft>
+                <a:spcPts val="200"/>
+              </a:spcAft>
+              <a:defRPr sz="1400" b="1">
+                <a:solidFill>
+                  <a:srgbClr val="172F3B"/>
+                </a:solidFill>
+                <a:latin typeface="Aptos"/>
+              </a:defRPr>
+            </a:pPr>
+            <a:r>
+              <a:t>02 · Breakfast</a:t>
             </a:r>
           </a:p>
         </p:txBody>
@@ -7771,25 +7746,64 @@
         </p:nvSpPr>
         <p:spPr>
           <a:xfrm>
-            <a:off x="5184648" y="2377440"/>
-            <a:ext cx="2596896" cy="338328"/>
-          </a:xfrm>
-          <a:prstGeom prst="rect">
-            <a:avLst/>
-          </a:prstGeom>
-          <a:noFill/>
-        </p:spPr>
-        <p:txBody>
-          <a:bodyPr wrap="square" lIns="0" rIns="0" tIns="0" bIns="0" anchor="ctr">
-            <a:spAutoFit/>
-          </a:bodyPr>
-          <a:lstStyle/>
-          <a:p>
-            <a:pPr algn="l">
-              <a:spcAft>
-                <a:spcPts val="200"/>
-              </a:spcAft>
-              <a:defRPr sz="1600" b="1">
+            <a:off x="8805672" y="3483864"/>
+            <a:ext cx="2560320" cy="182880"/>
+          </a:xfrm>
+          <a:prstGeom prst="rect">
+            <a:avLst/>
+          </a:prstGeom>
+          <a:noFill/>
+        </p:spPr>
+        <p:txBody>
+          <a:bodyPr wrap="square" lIns="0" rIns="0" tIns="0" bIns="0" anchor="ctr">
+            <a:spAutoFit/>
+          </a:bodyPr>
+          <a:lstStyle/>
+          <a:p>
+            <a:pPr algn="l">
+              <a:spcAft>
+                <a:spcPts val="200"/>
+              </a:spcAft>
+              <a:defRPr sz="1000" b="0">
+                <a:solidFill>
+                  <a:srgbClr val="667D88"/>
+                </a:solidFill>
+                <a:latin typeface="Aptos"/>
+              </a:defRPr>
+            </a:pPr>
+            <a:r>
+              <a:t>Meal context</a:t>
+            </a:r>
+          </a:p>
+        </p:txBody>
+      </p:sp>
+      <p:sp>
+        <p:nvSpPr>
+          <p:cNvPr id="19" name="TextBox 18"/>
+          <p:cNvSpPr txBox="1"/>
+          <p:nvPr/>
+        </p:nvSpPr>
+        <p:spPr>
+          <a:xfrm>
+            <a:off x="8805672" y="3730752"/>
+            <a:ext cx="2560320" cy="210312"/>
+          </a:xfrm>
+          <a:prstGeom prst="rect">
+            <a:avLst/>
+          </a:prstGeom>
+          <a:noFill/>
+        </p:spPr>
+        <p:txBody>
+          <a:bodyPr wrap="square" lIns="0" rIns="0" tIns="0" bIns="0" anchor="ctr">
+            <a:spAutoFit/>
+          </a:bodyPr>
+          <a:lstStyle/>
+          <a:p>
+            <a:pPr algn="l">
+              <a:spcAft>
+                <a:spcPts val="200"/>
+              </a:spcAft>
+              <a:defRPr sz="1400" b="1">
                 <a:solidFill>
                   <a:srgbClr val="172F3B"/>
                 </a:solidFill>
@@ -7797,38 +7811,38 @@
               </a:defRPr>
             </a:pPr>
             <a:r>
-              <a:t>BREAKFAST</a:t>
-            </a:r>
-          </a:p>
-        </p:txBody>
-      </p:sp>
-      <p:sp>
-        <p:nvSpPr>
-          <p:cNvPr id="19" name="TextBox 18"/>
-          <p:cNvSpPr txBox="1"/>
-          <p:nvPr/>
-        </p:nvSpPr>
-        <p:spPr>
-          <a:xfrm>
-            <a:off x="5193792" y="2807208"/>
-            <a:ext cx="2633472" cy="320040"/>
-          </a:xfrm>
-          <a:prstGeom prst="rect">
-            <a:avLst/>
-          </a:prstGeom>
-          <a:noFill/>
-        </p:spPr>
-        <p:txBody>
-          <a:bodyPr wrap="square" lIns="0" rIns="0" tIns="0" bIns="0" anchor="ctr">
-            <a:spAutoFit/>
-          </a:bodyPr>
-          <a:lstStyle/>
-          <a:p>
-            <a:pPr algn="l">
-              <a:spcAft>
-                <a:spcPts val="200"/>
-              </a:spcAft>
-              <a:defRPr sz="1300" b="0">
+              <a:t>03 · Lunch</a:t>
+            </a:r>
+          </a:p>
+        </p:txBody>
+      </p:sp>
+      <p:sp>
+        <p:nvSpPr>
+          <p:cNvPr id="20" name="TextBox 19"/>
+          <p:cNvSpPr txBox="1"/>
+          <p:nvPr/>
+        </p:nvSpPr>
+        <p:spPr>
+          <a:xfrm>
+            <a:off x="8805672" y="3931920"/>
+            <a:ext cx="2560320" cy="182880"/>
+          </a:xfrm>
+          <a:prstGeom prst="rect">
+            <a:avLst/>
+          </a:prstGeom>
+          <a:noFill/>
+        </p:spPr>
+        <p:txBody>
+          <a:bodyPr wrap="square" lIns="0" rIns="0" tIns="0" bIns="0" anchor="ctr">
+            <a:spAutoFit/>
+          </a:bodyPr>
+          <a:lstStyle/>
+          <a:p>
+            <a:pPr algn="l">
+              <a:spcAft>
+                <a:spcPts val="200"/>
+              </a:spcAft>
+              <a:defRPr sz="1000" b="0">
                 <a:solidFill>
                   <a:srgbClr val="667D88"/>
                 </a:solidFill>
@@ -7836,98 +7850,47 @@
               </a:defRPr>
             </a:pPr>
             <a:r>
-              <a:t>Meal context changes</a:t>
-            </a:r>
-          </a:p>
-        </p:txBody>
-      </p:sp>
-      <p:sp>
-        <p:nvSpPr>
-          <p:cNvPr id="20" name="Rounded Rectangle 19"/>
-          <p:cNvSpPr/>
-          <p:nvPr/>
-        </p:nvSpPr>
-        <p:spPr>
-          <a:xfrm>
-            <a:off x="8247888" y="2240280"/>
-            <a:ext cx="3584448" cy="1261872"/>
-          </a:xfrm>
-          <a:prstGeom prst="roundRect">
-            <a:avLst>
-              <a:gd name="adj" fmla="val 15000"/>
-            </a:avLst>
-          </a:prstGeom>
-          <a:solidFill>
-            <a:srgbClr val="FFFFFF"/>
-          </a:solidFill>
-          <a:ln w="12700">
-            <a:solidFill>
-              <a:srgbClr val="D9E4E6"/>
-            </a:solidFill>
-          </a:ln>
-        </p:spPr>
-        <p:style>
-          <a:lnRef idx="1">
-            <a:schemeClr val="accent1"/>
-          </a:lnRef>
-          <a:fillRef idx="3">
-            <a:schemeClr val="accent1"/>
-          </a:fillRef>
-          <a:effectRef idx="2">
-            <a:schemeClr val="accent1"/>
-          </a:effectRef>
-          <a:fontRef idx="minor">
-            <a:schemeClr val="lt1"/>
-          </a:fontRef>
-        </p:style>
-        <p:txBody>
-          <a:bodyPr rtlCol="0" anchor="ctr"/>
-          <a:lstStyle/>
-          <a:p>
-            <a:pPr algn="ctr"/>
-          </a:p>
-        </p:txBody>
-      </p:sp>
-      <p:sp>
-        <p:nvSpPr>
-          <p:cNvPr id="21" name="Rectangle 20"/>
-          <p:cNvSpPr/>
-          <p:nvPr/>
-        </p:nvSpPr>
-        <p:spPr>
-          <a:xfrm>
-            <a:off x="8247888" y="2240280"/>
-            <a:ext cx="50292" cy="1261872"/>
-          </a:xfrm>
-          <a:prstGeom prst="rect">
-            <a:avLst/>
-          </a:prstGeom>
-          <a:solidFill>
-            <a:srgbClr val="167E78"/>
-          </a:solidFill>
-          <a:ln>
-            <a:noFill/>
-          </a:ln>
-        </p:spPr>
-        <p:style>
-          <a:lnRef idx="1">
-            <a:schemeClr val="accent1"/>
-          </a:lnRef>
-          <a:fillRef idx="3">
-            <a:schemeClr val="accent1"/>
-          </a:fillRef>
-          <a:effectRef idx="2">
-            <a:schemeClr val="accent1"/>
-          </a:effectRef>
-          <a:fontRef idx="minor">
-            <a:schemeClr val="lt1"/>
-          </a:fontRef>
-        </p:style>
-        <p:txBody>
-          <a:bodyPr rtlCol="0" anchor="ctr"/>
-          <a:lstStyle/>
-          <a:p>
-            <a:pPr algn="ctr"/>
+              <a:t>Forecast trajectory</a:t>
+            </a:r>
+          </a:p>
+        </p:txBody>
+      </p:sp>
+      <p:sp>
+        <p:nvSpPr>
+          <p:cNvPr id="21" name="TextBox 20"/>
+          <p:cNvSpPr txBox="1"/>
+          <p:nvPr/>
+        </p:nvSpPr>
+        <p:spPr>
+          <a:xfrm>
+            <a:off x="8805672" y="4178808"/>
+            <a:ext cx="2560320" cy="210312"/>
+          </a:xfrm>
+          <a:prstGeom prst="rect">
+            <a:avLst/>
+          </a:prstGeom>
+          <a:noFill/>
+        </p:spPr>
+        <p:txBody>
+          <a:bodyPr wrap="square" lIns="0" rIns="0" tIns="0" bIns="0" anchor="ctr">
+            <a:spAutoFit/>
+          </a:bodyPr>
+          <a:lstStyle/>
+          <a:p>
+            <a:pPr algn="l">
+              <a:spcAft>
+                <a:spcPts val="200"/>
+              </a:spcAft>
+              <a:defRPr sz="1400" b="1">
+                <a:solidFill>
+                  <a:srgbClr val="172F3B"/>
+                </a:solidFill>
+                <a:latin typeface="Aptos"/>
+              </a:defRPr>
+            </a:pPr>
+            <a:r>
+              <a:t>04 · Verification</a:t>
+            </a:r>
           </a:p>
         </p:txBody>
       </p:sp>
@@ -7939,33 +7902,33 @@
         </p:nvSpPr>
         <p:spPr>
           <a:xfrm>
-            <a:off x="8449056" y="2395728"/>
-            <a:ext cx="502920" cy="365760"/>
-          </a:xfrm>
-          <a:prstGeom prst="rect">
-            <a:avLst/>
-          </a:prstGeom>
-          <a:noFill/>
-        </p:spPr>
-        <p:txBody>
-          <a:bodyPr wrap="square" lIns="0" rIns="0" tIns="0" bIns="0" anchor="ctr">
-            <a:spAutoFit/>
-          </a:bodyPr>
-          <a:lstStyle/>
-          <a:p>
-            <a:pPr algn="l">
-              <a:spcAft>
-                <a:spcPts val="200"/>
-              </a:spcAft>
-              <a:defRPr sz="2300" b="1">
-                <a:solidFill>
-                  <a:srgbClr val="167E78"/>
-                </a:solidFill>
-                <a:latin typeface="Aptos"/>
-              </a:defRPr>
-            </a:pPr>
-            <a:r>
-              <a:t>03</a:t>
+            <a:off x="8805672" y="4379976"/>
+            <a:ext cx="2560320" cy="182880"/>
+          </a:xfrm>
+          <a:prstGeom prst="rect">
+            <a:avLst/>
+          </a:prstGeom>
+          <a:noFill/>
+        </p:spPr>
+        <p:txBody>
+          <a:bodyPr wrap="square" lIns="0" rIns="0" tIns="0" bIns="0" anchor="ctr">
+            <a:spAutoFit/>
+          </a:bodyPr>
+          <a:lstStyle/>
+          <a:p>
+            <a:pPr algn="l">
+              <a:spcAft>
+                <a:spcPts val="200"/>
+              </a:spcAft>
+              <a:defRPr sz="1000" b="0">
+                <a:solidFill>
+                  <a:srgbClr val="667D88"/>
+                </a:solidFill>
+                <a:latin typeface="Aptos"/>
+              </a:defRPr>
+            </a:pPr>
+            <a:r>
+              <a:t>Forecasts resolved</a:t>
             </a:r>
           </a:p>
         </p:txBody>
@@ -7978,25 +7941,25 @@
         </p:nvSpPr>
         <p:spPr>
           <a:xfrm>
-            <a:off x="9006840" y="2377440"/>
-            <a:ext cx="2596896" cy="338328"/>
-          </a:xfrm>
-          <a:prstGeom prst="rect">
-            <a:avLst/>
-          </a:prstGeom>
-          <a:noFill/>
-        </p:spPr>
-        <p:txBody>
-          <a:bodyPr wrap="square" lIns="0" rIns="0" tIns="0" bIns="0" anchor="ctr">
-            <a:spAutoFit/>
-          </a:bodyPr>
-          <a:lstStyle/>
-          <a:p>
-            <a:pPr algn="l">
-              <a:spcAft>
-                <a:spcPts val="200"/>
-              </a:spcAft>
-              <a:defRPr sz="1600" b="1">
+            <a:off x="8805672" y="4626864"/>
+            <a:ext cx="2560320" cy="210312"/>
+          </a:xfrm>
+          <a:prstGeom prst="rect">
+            <a:avLst/>
+          </a:prstGeom>
+          <a:noFill/>
+        </p:spPr>
+        <p:txBody>
+          <a:bodyPr wrap="square" lIns="0" rIns="0" tIns="0" bIns="0" anchor="ctr">
+            <a:spAutoFit/>
+          </a:bodyPr>
+          <a:lstStyle/>
+          <a:p>
+            <a:pPr algn="l">
+              <a:spcAft>
+                <a:spcPts val="200"/>
+              </a:spcAft>
+              <a:defRPr sz="1400" b="1">
                 <a:solidFill>
                   <a:srgbClr val="172F3B"/>
                 </a:solidFill>
@@ -8004,7 +7967,7 @@
               </a:defRPr>
             </a:pPr>
             <a:r>
-              <a:t>LUNCH</a:t>
+              <a:t>05 · Sensor gap</a:t>
             </a:r>
           </a:p>
         </p:txBody>
@@ -8017,25 +7980,25 @@
         </p:nvSpPr>
         <p:spPr>
           <a:xfrm>
-            <a:off x="9015984" y="2807208"/>
-            <a:ext cx="2633472" cy="320040"/>
-          </a:xfrm>
-          <a:prstGeom prst="rect">
-            <a:avLst/>
-          </a:prstGeom>
-          <a:noFill/>
-        </p:spPr>
-        <p:txBody>
-          <a:bodyPr wrap="square" lIns="0" rIns="0" tIns="0" bIns="0" anchor="ctr">
-            <a:spAutoFit/>
-          </a:bodyPr>
-          <a:lstStyle/>
-          <a:p>
-            <a:pPr algn="l">
-              <a:spcAft>
-                <a:spcPts val="200"/>
-              </a:spcAft>
-              <a:defRPr sz="1300" b="0">
+            <a:off x="8805672" y="4828032"/>
+            <a:ext cx="2560320" cy="182880"/>
+          </a:xfrm>
+          <a:prstGeom prst="rect">
+            <a:avLst/>
+          </a:prstGeom>
+          <a:noFill/>
+        </p:spPr>
+        <p:txBody>
+          <a:bodyPr wrap="square" lIns="0" rIns="0" tIns="0" bIns="0" anchor="ctr">
+            <a:spAutoFit/>
+          </a:bodyPr>
+          <a:lstStyle/>
+          <a:p>
+            <a:pPr algn="l">
+              <a:spcAft>
+                <a:spcPts val="200"/>
+              </a:spcAft>
+              <a:defRPr sz="1000" b="0">
                 <a:solidFill>
                   <a:srgbClr val="667D88"/>
                 </a:solidFill>
@@ -8043,98 +8006,86 @@
               </a:defRPr>
             </a:pPr>
             <a:r>
-              <a:t>Forecast trajectory</a:t>
-            </a:r>
-          </a:p>
-        </p:txBody>
-      </p:sp>
-      <p:sp>
-        <p:nvSpPr>
-          <p:cNvPr id="25" name="Rounded Rectangle 24"/>
-          <p:cNvSpPr/>
-          <p:nvPr/>
-        </p:nvSpPr>
-        <p:spPr>
-          <a:xfrm>
-            <a:off x="603504" y="3694176"/>
-            <a:ext cx="3584448" cy="1261872"/>
-          </a:xfrm>
-          <a:prstGeom prst="roundRect">
-            <a:avLst>
-              <a:gd name="adj" fmla="val 15000"/>
-            </a:avLst>
-          </a:prstGeom>
-          <a:solidFill>
-            <a:srgbClr val="FFFFFF"/>
-          </a:solidFill>
-          <a:ln w="12700">
-            <a:solidFill>
-              <a:srgbClr val="D9E4E6"/>
-            </a:solidFill>
-          </a:ln>
-        </p:spPr>
-        <p:style>
-          <a:lnRef idx="1">
-            <a:schemeClr val="accent1"/>
-          </a:lnRef>
-          <a:fillRef idx="3">
-            <a:schemeClr val="accent1"/>
-          </a:fillRef>
-          <a:effectRef idx="2">
-            <a:schemeClr val="accent1"/>
-          </a:effectRef>
-          <a:fontRef idx="minor">
-            <a:schemeClr val="lt1"/>
-          </a:fontRef>
-        </p:style>
-        <p:txBody>
-          <a:bodyPr rtlCol="0" anchor="ctr"/>
-          <a:lstStyle/>
-          <a:p>
-            <a:pPr algn="ctr"/>
-          </a:p>
-        </p:txBody>
-      </p:sp>
-      <p:sp>
-        <p:nvSpPr>
-          <p:cNvPr id="26" name="Rectangle 25"/>
-          <p:cNvSpPr/>
-          <p:nvPr/>
-        </p:nvSpPr>
-        <p:spPr>
-          <a:xfrm>
-            <a:off x="603504" y="3694176"/>
-            <a:ext cx="50292" cy="1261872"/>
-          </a:xfrm>
-          <a:prstGeom prst="rect">
-            <a:avLst/>
-          </a:prstGeom>
-          <a:solidFill>
-            <a:srgbClr val="167E78"/>
-          </a:solidFill>
-          <a:ln>
-            <a:noFill/>
-          </a:ln>
-        </p:spPr>
-        <p:style>
-          <a:lnRef idx="1">
-            <a:schemeClr val="accent1"/>
-          </a:lnRef>
-          <a:fillRef idx="3">
-            <a:schemeClr val="accent1"/>
-          </a:fillRef>
-          <a:effectRef idx="2">
-            <a:schemeClr val="accent1"/>
-          </a:effectRef>
-          <a:fontRef idx="minor">
-            <a:schemeClr val="lt1"/>
-          </a:fontRef>
-        </p:style>
-        <p:txBody>
-          <a:bodyPr rtlCol="0" anchor="ctr"/>
-          <a:lstStyle/>
-          <a:p>
-            <a:pPr algn="ctr"/>
+              <a:t>Forecast withheld</a:t>
+            </a:r>
+          </a:p>
+        </p:txBody>
+      </p:sp>
+      <p:sp>
+        <p:nvSpPr>
+          <p:cNvPr id="25" name="TextBox 24"/>
+          <p:cNvSpPr txBox="1"/>
+          <p:nvPr/>
+        </p:nvSpPr>
+        <p:spPr>
+          <a:xfrm>
+            <a:off x="8805672" y="5074920"/>
+            <a:ext cx="2560320" cy="210312"/>
+          </a:xfrm>
+          <a:prstGeom prst="rect">
+            <a:avLst/>
+          </a:prstGeom>
+          <a:noFill/>
+        </p:spPr>
+        <p:txBody>
+          <a:bodyPr wrap="square" lIns="0" rIns="0" tIns="0" bIns="0" anchor="ctr">
+            <a:spAutoFit/>
+          </a:bodyPr>
+          <a:lstStyle/>
+          <a:p>
+            <a:pPr algn="l">
+              <a:spcAft>
+                <a:spcPts val="200"/>
+              </a:spcAft>
+              <a:defRPr sz="1400" b="1">
+                <a:solidFill>
+                  <a:srgbClr val="172F3B"/>
+                </a:solidFill>
+                <a:latin typeface="Aptos"/>
+              </a:defRPr>
+            </a:pPr>
+            <a:r>
+              <a:t>06 · Recovery</a:t>
+            </a:r>
+          </a:p>
+        </p:txBody>
+      </p:sp>
+      <p:sp>
+        <p:nvSpPr>
+          <p:cNvPr id="26" name="TextBox 25"/>
+          <p:cNvSpPr txBox="1"/>
+          <p:nvPr/>
+        </p:nvSpPr>
+        <p:spPr>
+          <a:xfrm>
+            <a:off x="8805672" y="5276088"/>
+            <a:ext cx="2560320" cy="182880"/>
+          </a:xfrm>
+          <a:prstGeom prst="rect">
+            <a:avLst/>
+          </a:prstGeom>
+          <a:noFill/>
+        </p:spPr>
+        <p:txBody>
+          <a:bodyPr wrap="square" lIns="0" rIns="0" tIns="0" bIns="0" anchor="ctr">
+            <a:spAutoFit/>
+          </a:bodyPr>
+          <a:lstStyle/>
+          <a:p>
+            <a:pPr algn="l">
+              <a:spcAft>
+                <a:spcPts val="200"/>
+              </a:spcAft>
+              <a:defRPr sz="1000" b="0">
+                <a:solidFill>
+                  <a:srgbClr val="667D88"/>
+                </a:solidFill>
+                <a:latin typeface="Aptos"/>
+              </a:defRPr>
+            </a:pPr>
+            <a:r>
+              <a:t>Fresh signal returns</a:t>
+            </a:r>
           </a:p>
         </p:txBody>
       </p:sp>
@@ -8146,232 +8097,25 @@
         </p:nvSpPr>
         <p:spPr>
           <a:xfrm>
-            <a:off x="804672" y="3849624"/>
-            <a:ext cx="502920" cy="365760"/>
-          </a:xfrm>
-          <a:prstGeom prst="rect">
-            <a:avLst/>
-          </a:prstGeom>
-          <a:noFill/>
-        </p:spPr>
-        <p:txBody>
-          <a:bodyPr wrap="square" lIns="0" rIns="0" tIns="0" bIns="0" anchor="ctr">
-            <a:spAutoFit/>
-          </a:bodyPr>
-          <a:lstStyle/>
-          <a:p>
-            <a:pPr algn="l">
-              <a:spcAft>
-                <a:spcPts val="200"/>
-              </a:spcAft>
-              <a:defRPr sz="2300" b="1">
-                <a:solidFill>
-                  <a:srgbClr val="167E78"/>
-                </a:solidFill>
-                <a:latin typeface="Aptos"/>
-              </a:defRPr>
-            </a:pPr>
-            <a:r>
-              <a:t>04</a:t>
-            </a:r>
-          </a:p>
-        </p:txBody>
-      </p:sp>
-      <p:sp>
-        <p:nvSpPr>
-          <p:cNvPr id="28" name="TextBox 27"/>
-          <p:cNvSpPr txBox="1"/>
-          <p:nvPr/>
-        </p:nvSpPr>
-        <p:spPr>
-          <a:xfrm>
-            <a:off x="1362456" y="3831336"/>
-            <a:ext cx="2596896" cy="338328"/>
-          </a:xfrm>
-          <a:prstGeom prst="rect">
-            <a:avLst/>
-          </a:prstGeom>
-          <a:noFill/>
-        </p:spPr>
-        <p:txBody>
-          <a:bodyPr wrap="square" lIns="0" rIns="0" tIns="0" bIns="0" anchor="ctr">
-            <a:spAutoFit/>
-          </a:bodyPr>
-          <a:lstStyle/>
-          <a:p>
-            <a:pPr algn="l">
-              <a:spcAft>
-                <a:spcPts val="200"/>
-              </a:spcAft>
-              <a:defRPr sz="1600" b="1">
-                <a:solidFill>
-                  <a:srgbClr val="172F3B"/>
-                </a:solidFill>
-                <a:latin typeface="Aptos"/>
-              </a:defRPr>
-            </a:pPr>
-            <a:r>
-              <a:t>VERIFICATION</a:t>
-            </a:r>
-          </a:p>
-        </p:txBody>
-      </p:sp>
-      <p:sp>
-        <p:nvSpPr>
-          <p:cNvPr id="29" name="TextBox 28"/>
-          <p:cNvSpPr txBox="1"/>
-          <p:nvPr/>
-        </p:nvSpPr>
-        <p:spPr>
-          <a:xfrm>
-            <a:off x="1371600" y="4261104"/>
-            <a:ext cx="2633472" cy="320040"/>
-          </a:xfrm>
-          <a:prstGeom prst="rect">
-            <a:avLst/>
-          </a:prstGeom>
-          <a:noFill/>
-        </p:spPr>
-        <p:txBody>
-          <a:bodyPr wrap="square" lIns="0" rIns="0" tIns="0" bIns="0" anchor="ctr">
-            <a:spAutoFit/>
-          </a:bodyPr>
-          <a:lstStyle/>
-          <a:p>
-            <a:pPr algn="l">
-              <a:spcAft>
-                <a:spcPts val="200"/>
-              </a:spcAft>
-              <a:defRPr sz="1300" b="0">
-                <a:solidFill>
-                  <a:srgbClr val="667D88"/>
-                </a:solidFill>
-                <a:latin typeface="Aptos"/>
-              </a:defRPr>
-            </a:pPr>
-            <a:r>
-              <a:t>Earlier forecasts resolved</a:t>
-            </a:r>
-          </a:p>
-        </p:txBody>
-      </p:sp>
-      <p:sp>
-        <p:nvSpPr>
-          <p:cNvPr id="30" name="Rounded Rectangle 29"/>
-          <p:cNvSpPr/>
-          <p:nvPr/>
-        </p:nvSpPr>
-        <p:spPr>
-          <a:xfrm>
-            <a:off x="4425696" y="3694176"/>
-            <a:ext cx="3584448" cy="1261872"/>
-          </a:xfrm>
-          <a:prstGeom prst="roundRect">
-            <a:avLst>
-              <a:gd name="adj" fmla="val 15000"/>
-            </a:avLst>
-          </a:prstGeom>
-          <a:solidFill>
-            <a:srgbClr val="FFFFFF"/>
-          </a:solidFill>
-          <a:ln w="12700">
-            <a:solidFill>
-              <a:srgbClr val="D9E4E6"/>
-            </a:solidFill>
-          </a:ln>
-        </p:spPr>
-        <p:style>
-          <a:lnRef idx="1">
-            <a:schemeClr val="accent1"/>
-          </a:lnRef>
-          <a:fillRef idx="3">
-            <a:schemeClr val="accent1"/>
-          </a:fillRef>
-          <a:effectRef idx="2">
-            <a:schemeClr val="accent1"/>
-          </a:effectRef>
-          <a:fontRef idx="minor">
-            <a:schemeClr val="lt1"/>
-          </a:fontRef>
-        </p:style>
-        <p:txBody>
-          <a:bodyPr rtlCol="0" anchor="ctr"/>
-          <a:lstStyle/>
-          <a:p>
-            <a:pPr algn="ctr"/>
-          </a:p>
-        </p:txBody>
-      </p:sp>
-      <p:sp>
-        <p:nvSpPr>
-          <p:cNvPr id="31" name="Rectangle 30"/>
-          <p:cNvSpPr/>
-          <p:nvPr/>
-        </p:nvSpPr>
-        <p:spPr>
-          <a:xfrm>
-            <a:off x="4425696" y="3694176"/>
-            <a:ext cx="50292" cy="1261872"/>
-          </a:xfrm>
-          <a:prstGeom prst="rect">
-            <a:avLst/>
-          </a:prstGeom>
-          <a:solidFill>
-            <a:srgbClr val="B46F4B"/>
-          </a:solidFill>
-          <a:ln>
-            <a:noFill/>
-          </a:ln>
-        </p:spPr>
-        <p:style>
-          <a:lnRef idx="1">
-            <a:schemeClr val="accent1"/>
-          </a:lnRef>
-          <a:fillRef idx="3">
-            <a:schemeClr val="accent1"/>
-          </a:fillRef>
-          <a:effectRef idx="2">
-            <a:schemeClr val="accent1"/>
-          </a:effectRef>
-          <a:fontRef idx="minor">
-            <a:schemeClr val="lt1"/>
-          </a:fontRef>
-        </p:style>
-        <p:txBody>
-          <a:bodyPr rtlCol="0" anchor="ctr"/>
-          <a:lstStyle/>
-          <a:p>
-            <a:pPr algn="ctr"/>
-          </a:p>
-        </p:txBody>
-      </p:sp>
-      <p:sp>
-        <p:nvSpPr>
-          <p:cNvPr id="32" name="TextBox 31"/>
-          <p:cNvSpPr txBox="1"/>
-          <p:nvPr/>
-        </p:nvSpPr>
-        <p:spPr>
-          <a:xfrm>
-            <a:off x="4626864" y="3849624"/>
-            <a:ext cx="502920" cy="365760"/>
-          </a:xfrm>
-          <a:prstGeom prst="rect">
-            <a:avLst/>
-          </a:prstGeom>
-          <a:noFill/>
-        </p:spPr>
-        <p:txBody>
-          <a:bodyPr wrap="square" lIns="0" rIns="0" tIns="0" bIns="0" anchor="ctr">
-            <a:spAutoFit/>
-          </a:bodyPr>
-          <a:lstStyle/>
-          <a:p>
-            <a:pPr algn="l">
-              <a:spcAft>
-                <a:spcPts val="200"/>
-              </a:spcAft>
-              <a:defRPr sz="2300" b="1">
+            <a:off x="8787384" y="5641848"/>
+            <a:ext cx="2542032" cy="256032"/>
+          </a:xfrm>
+          <a:prstGeom prst="rect">
+            <a:avLst/>
+          </a:prstGeom>
+          <a:noFill/>
+        </p:spPr>
+        <p:txBody>
+          <a:bodyPr wrap="square" lIns="0" rIns="0" tIns="0" bIns="0" anchor="ctr">
+            <a:spAutoFit/>
+          </a:bodyPr>
+          <a:lstStyle/>
+          <a:p>
+            <a:pPr algn="l">
+              <a:spcAft>
+                <a:spcPts val="200"/>
+              </a:spcAft>
+              <a:defRPr sz="1000" b="0">
                 <a:solidFill>
                   <a:srgbClr val="B46F4B"/>
                 </a:solidFill>
@@ -8379,415 +8123,7 @@
               </a:defRPr>
             </a:pPr>
             <a:r>
-              <a:t>05</a:t>
-            </a:r>
-          </a:p>
-        </p:txBody>
-      </p:sp>
-      <p:sp>
-        <p:nvSpPr>
-          <p:cNvPr id="33" name="TextBox 32"/>
-          <p:cNvSpPr txBox="1"/>
-          <p:nvPr/>
-        </p:nvSpPr>
-        <p:spPr>
-          <a:xfrm>
-            <a:off x="5184648" y="3831336"/>
-            <a:ext cx="2596896" cy="338328"/>
-          </a:xfrm>
-          <a:prstGeom prst="rect">
-            <a:avLst/>
-          </a:prstGeom>
-          <a:noFill/>
-        </p:spPr>
-        <p:txBody>
-          <a:bodyPr wrap="square" lIns="0" rIns="0" tIns="0" bIns="0" anchor="ctr">
-            <a:spAutoFit/>
-          </a:bodyPr>
-          <a:lstStyle/>
-          <a:p>
-            <a:pPr algn="l">
-              <a:spcAft>
-                <a:spcPts val="200"/>
-              </a:spcAft>
-              <a:defRPr sz="1600" b="1">
-                <a:solidFill>
-                  <a:srgbClr val="172F3B"/>
-                </a:solidFill>
-                <a:latin typeface="Aptos"/>
-              </a:defRPr>
-            </a:pPr>
-            <a:r>
-              <a:t>SENSOR GAP</a:t>
-            </a:r>
-          </a:p>
-        </p:txBody>
-      </p:sp>
-      <p:sp>
-        <p:nvSpPr>
-          <p:cNvPr id="34" name="TextBox 33"/>
-          <p:cNvSpPr txBox="1"/>
-          <p:nvPr/>
-        </p:nvSpPr>
-        <p:spPr>
-          <a:xfrm>
-            <a:off x="5193792" y="4261104"/>
-            <a:ext cx="2633472" cy="320040"/>
-          </a:xfrm>
-          <a:prstGeom prst="rect">
-            <a:avLst/>
-          </a:prstGeom>
-          <a:noFill/>
-        </p:spPr>
-        <p:txBody>
-          <a:bodyPr wrap="square" lIns="0" rIns="0" tIns="0" bIns="0" anchor="ctr">
-            <a:spAutoFit/>
-          </a:bodyPr>
-          <a:lstStyle/>
-          <a:p>
-            <a:pPr algn="l">
-              <a:spcAft>
-                <a:spcPts val="200"/>
-              </a:spcAft>
-              <a:defRPr sz="1300" b="0">
-                <a:solidFill>
-                  <a:srgbClr val="667D88"/>
-                </a:solidFill>
-                <a:latin typeface="Aptos"/>
-              </a:defRPr>
-            </a:pPr>
-            <a:r>
-              <a:t>Abstention, no risk</a:t>
-            </a:r>
-          </a:p>
-        </p:txBody>
-      </p:sp>
-      <p:sp>
-        <p:nvSpPr>
-          <p:cNvPr id="35" name="Rounded Rectangle 34"/>
-          <p:cNvSpPr/>
-          <p:nvPr/>
-        </p:nvSpPr>
-        <p:spPr>
-          <a:xfrm>
-            <a:off x="8247888" y="3694176"/>
-            <a:ext cx="3584448" cy="1261872"/>
-          </a:xfrm>
-          <a:prstGeom prst="roundRect">
-            <a:avLst>
-              <a:gd name="adj" fmla="val 15000"/>
-            </a:avLst>
-          </a:prstGeom>
-          <a:solidFill>
-            <a:srgbClr val="FFFFFF"/>
-          </a:solidFill>
-          <a:ln w="12700">
-            <a:solidFill>
-              <a:srgbClr val="D9E4E6"/>
-            </a:solidFill>
-          </a:ln>
-        </p:spPr>
-        <p:style>
-          <a:lnRef idx="1">
-            <a:schemeClr val="accent1"/>
-          </a:lnRef>
-          <a:fillRef idx="3">
-            <a:schemeClr val="accent1"/>
-          </a:fillRef>
-          <a:effectRef idx="2">
-            <a:schemeClr val="accent1"/>
-          </a:effectRef>
-          <a:fontRef idx="minor">
-            <a:schemeClr val="lt1"/>
-          </a:fontRef>
-        </p:style>
-        <p:txBody>
-          <a:bodyPr rtlCol="0" anchor="ctr"/>
-          <a:lstStyle/>
-          <a:p>
-            <a:pPr algn="ctr"/>
-          </a:p>
-        </p:txBody>
-      </p:sp>
-      <p:sp>
-        <p:nvSpPr>
-          <p:cNvPr id="36" name="Rectangle 35"/>
-          <p:cNvSpPr/>
-          <p:nvPr/>
-        </p:nvSpPr>
-        <p:spPr>
-          <a:xfrm>
-            <a:off x="8247888" y="3694176"/>
-            <a:ext cx="50292" cy="1261872"/>
-          </a:xfrm>
-          <a:prstGeom prst="rect">
-            <a:avLst/>
-          </a:prstGeom>
-          <a:solidFill>
-            <a:srgbClr val="167E78"/>
-          </a:solidFill>
-          <a:ln>
-            <a:noFill/>
-          </a:ln>
-        </p:spPr>
-        <p:style>
-          <a:lnRef idx="1">
-            <a:schemeClr val="accent1"/>
-          </a:lnRef>
-          <a:fillRef idx="3">
-            <a:schemeClr val="accent1"/>
-          </a:fillRef>
-          <a:effectRef idx="2">
-            <a:schemeClr val="accent1"/>
-          </a:effectRef>
-          <a:fontRef idx="minor">
-            <a:schemeClr val="lt1"/>
-          </a:fontRef>
-        </p:style>
-        <p:txBody>
-          <a:bodyPr rtlCol="0" anchor="ctr"/>
-          <a:lstStyle/>
-          <a:p>
-            <a:pPr algn="ctr"/>
-          </a:p>
-        </p:txBody>
-      </p:sp>
-      <p:sp>
-        <p:nvSpPr>
-          <p:cNvPr id="37" name="TextBox 36"/>
-          <p:cNvSpPr txBox="1"/>
-          <p:nvPr/>
-        </p:nvSpPr>
-        <p:spPr>
-          <a:xfrm>
-            <a:off x="8449056" y="3849624"/>
-            <a:ext cx="502920" cy="365760"/>
-          </a:xfrm>
-          <a:prstGeom prst="rect">
-            <a:avLst/>
-          </a:prstGeom>
-          <a:noFill/>
-        </p:spPr>
-        <p:txBody>
-          <a:bodyPr wrap="square" lIns="0" rIns="0" tIns="0" bIns="0" anchor="ctr">
-            <a:spAutoFit/>
-          </a:bodyPr>
-          <a:lstStyle/>
-          <a:p>
-            <a:pPr algn="l">
-              <a:spcAft>
-                <a:spcPts val="200"/>
-              </a:spcAft>
-              <a:defRPr sz="2300" b="1">
-                <a:solidFill>
-                  <a:srgbClr val="167E78"/>
-                </a:solidFill>
-                <a:latin typeface="Aptos"/>
-              </a:defRPr>
-            </a:pPr>
-            <a:r>
-              <a:t>06</a:t>
-            </a:r>
-          </a:p>
-        </p:txBody>
-      </p:sp>
-      <p:sp>
-        <p:nvSpPr>
-          <p:cNvPr id="38" name="TextBox 37"/>
-          <p:cNvSpPr txBox="1"/>
-          <p:nvPr/>
-        </p:nvSpPr>
-        <p:spPr>
-          <a:xfrm>
-            <a:off x="9006840" y="3831336"/>
-            <a:ext cx="2596896" cy="338328"/>
-          </a:xfrm>
-          <a:prstGeom prst="rect">
-            <a:avLst/>
-          </a:prstGeom>
-          <a:noFill/>
-        </p:spPr>
-        <p:txBody>
-          <a:bodyPr wrap="square" lIns="0" rIns="0" tIns="0" bIns="0" anchor="ctr">
-            <a:spAutoFit/>
-          </a:bodyPr>
-          <a:lstStyle/>
-          <a:p>
-            <a:pPr algn="l">
-              <a:spcAft>
-                <a:spcPts val="200"/>
-              </a:spcAft>
-              <a:defRPr sz="1600" b="1">
-                <a:solidFill>
-                  <a:srgbClr val="172F3B"/>
-                </a:solidFill>
-                <a:latin typeface="Aptos"/>
-              </a:defRPr>
-            </a:pPr>
-            <a:r>
-              <a:t>RECOVERY</a:t>
-            </a:r>
-          </a:p>
-        </p:txBody>
-      </p:sp>
-      <p:sp>
-        <p:nvSpPr>
-          <p:cNvPr id="39" name="TextBox 38"/>
-          <p:cNvSpPr txBox="1"/>
-          <p:nvPr/>
-        </p:nvSpPr>
-        <p:spPr>
-          <a:xfrm>
-            <a:off x="9015984" y="4261104"/>
-            <a:ext cx="2633472" cy="320040"/>
-          </a:xfrm>
-          <a:prstGeom prst="rect">
-            <a:avLst/>
-          </a:prstGeom>
-          <a:noFill/>
-        </p:spPr>
-        <p:txBody>
-          <a:bodyPr wrap="square" lIns="0" rIns="0" tIns="0" bIns="0" anchor="ctr">
-            <a:spAutoFit/>
-          </a:bodyPr>
-          <a:lstStyle/>
-          <a:p>
-            <a:pPr algn="l">
-              <a:spcAft>
-                <a:spcPts val="200"/>
-              </a:spcAft>
-              <a:defRPr sz="1300" b="0">
-                <a:solidFill>
-                  <a:srgbClr val="667D88"/>
-                </a:solidFill>
-                <a:latin typeface="Aptos"/>
-              </a:defRPr>
-            </a:pPr>
-            <a:r>
-              <a:t>Fresh signal returns</a:t>
-            </a:r>
-          </a:p>
-        </p:txBody>
-      </p:sp>
-      <p:sp>
-        <p:nvSpPr>
-          <p:cNvPr id="40" name="Rounded Rectangle 39"/>
-          <p:cNvSpPr/>
-          <p:nvPr/>
-        </p:nvSpPr>
-        <p:spPr>
-          <a:xfrm>
-            <a:off x="603504" y="5367528"/>
-            <a:ext cx="11219688" cy="740664"/>
-          </a:xfrm>
-          <a:prstGeom prst="roundRect">
-            <a:avLst>
-              <a:gd name="adj" fmla="val 15000"/>
-            </a:avLst>
-          </a:prstGeom>
-          <a:solidFill>
-            <a:srgbClr val="152C3C"/>
-          </a:solidFill>
-          <a:ln>
-            <a:noFill/>
-          </a:ln>
-        </p:spPr>
-        <p:style>
-          <a:lnRef idx="1">
-            <a:schemeClr val="accent1"/>
-          </a:lnRef>
-          <a:fillRef idx="3">
-            <a:schemeClr val="accent1"/>
-          </a:fillRef>
-          <a:effectRef idx="2">
-            <a:schemeClr val="accent1"/>
-          </a:effectRef>
-          <a:fontRef idx="minor">
-            <a:schemeClr val="lt1"/>
-          </a:fontRef>
-        </p:style>
-        <p:txBody>
-          <a:bodyPr rtlCol="0" anchor="ctr"/>
-          <a:lstStyle/>
-          <a:p>
-            <a:pPr algn="ctr"/>
-          </a:p>
-        </p:txBody>
-      </p:sp>
-      <p:sp>
-        <p:nvSpPr>
-          <p:cNvPr id="41" name="TextBox 40"/>
-          <p:cNvSpPr txBox="1"/>
-          <p:nvPr/>
-        </p:nvSpPr>
-        <p:spPr>
-          <a:xfrm>
-            <a:off x="832104" y="5532120"/>
-            <a:ext cx="1371600" cy="228600"/>
-          </a:xfrm>
-          <a:prstGeom prst="rect">
-            <a:avLst/>
-          </a:prstGeom>
-          <a:noFill/>
-        </p:spPr>
-        <p:txBody>
-          <a:bodyPr wrap="square" lIns="0" rIns="0" tIns="0" bIns="0" anchor="ctr">
-            <a:spAutoFit/>
-          </a:bodyPr>
-          <a:lstStyle/>
-          <a:p>
-            <a:pPr algn="l">
-              <a:spcAft>
-                <a:spcPts val="200"/>
-              </a:spcAft>
-              <a:defRPr sz="1100" b="1">
-                <a:solidFill>
-                  <a:srgbClr val="A5DCCB"/>
-                </a:solidFill>
-                <a:latin typeface="Aptos"/>
-              </a:defRPr>
-            </a:pPr>
-            <a:r>
-              <a:t>JUDGE ACTION</a:t>
-            </a:r>
-          </a:p>
-        </p:txBody>
-      </p:sp>
-      <p:sp>
-        <p:nvSpPr>
-          <p:cNvPr id="42" name="TextBox 41"/>
-          <p:cNvSpPr txBox="1"/>
-          <p:nvPr/>
-        </p:nvSpPr>
-        <p:spPr>
-          <a:xfrm>
-            <a:off x="2221992" y="5477256"/>
-            <a:ext cx="9235440" cy="365760"/>
-          </a:xfrm>
-          <a:prstGeom prst="rect">
-            <a:avLst/>
-          </a:prstGeom>
-          <a:noFill/>
-        </p:spPr>
-        <p:txBody>
-          <a:bodyPr wrap="square" lIns="0" rIns="0" tIns="0" bIns="0" anchor="ctr">
-            <a:spAutoFit/>
-          </a:bodyPr>
-          <a:lstStyle/>
-          <a:p>
-            <a:pPr algn="l">
-              <a:spcAft>
-                <a:spcPts val="200"/>
-              </a:spcAft>
-              <a:defRPr sz="1700" b="0">
-                <a:solidFill>
-                  <a:srgbClr val="FFFFFF"/>
-                </a:solidFill>
-                <a:latin typeface="Aptos"/>
-              </a:defRPr>
-            </a:pPr>
-            <a:r>
-              <a:t>Run FastAPI → open localhost:8000 → Guided judge demo → choose chapter</a:t>
+              <a:t>Six deterministic synthetic states. No clinical predictions.</a:t>
             </a:r>
           </a:p>
         </p:txBody>
